--- a/00_オリエンテーション/【AI Native研修-バイブコーディング】研修の概要.pptx
+++ b/00_オリエンテーション/【AI Native研修-バイブコーディング】研修の概要.pptx
@@ -4324,12 +4324,9 @@
           <a:p>
             <a:r>
               <a:rPr lang="ja-JP" altLang="en-US" dirty="0"/>
-              <a:t>バイブコーディング</a:t>
-            </a:r>
-            <a:r>
-              <a:rPr kumimoji="1" lang="ja-JP" altLang="en-US" dirty="0"/>
-              <a:t>の概要</a:t>
-            </a:r>
+              <a:t>研修の概要</a:t>
+            </a:r>
+            <a:endParaRPr kumimoji="1" lang="ja-JP" altLang="en-US" dirty="0"/>
           </a:p>
         </p:txBody>
       </p:sp>

--- a/00_オリエンテーション/【AI Native研修-バイブコーディング】研修の概要.pptx
+++ b/00_オリエンテーション/【AI Native研修-バイブコーディング】研修の概要.pptx
@@ -5,13 +5,14 @@
     <p:sldMasterId id="2147483648" r:id="rId1"/>
   </p:sldMasterIdLst>
   <p:notesMasterIdLst>
-    <p:notesMasterId r:id="rId6"/>
+    <p:notesMasterId r:id="rId7"/>
   </p:notesMasterIdLst>
   <p:sldIdLst>
     <p:sldId id="256" r:id="rId2"/>
     <p:sldId id="257" r:id="rId3"/>
-    <p:sldId id="259" r:id="rId4"/>
-    <p:sldId id="260" r:id="rId5"/>
+    <p:sldId id="262" r:id="rId4"/>
+    <p:sldId id="259" r:id="rId5"/>
+    <p:sldId id="260" r:id="rId6"/>
   </p:sldIdLst>
   <p:sldSz cx="12192000" cy="6858000"/>
   <p:notesSz cx="6858000" cy="9144000"/>
@@ -591,6 +592,114 @@
         <p:cNvPr id="1" name="">
           <a:extLst>
             <a:ext uri="{FF2B5EF4-FFF2-40B4-BE49-F238E27FC236}">
+              <a16:creationId xmlns:a16="http://schemas.microsoft.com/office/drawing/2014/main" id="{481AA336-75C3-CD9B-DD81-FDF8321B71BF}"/>
+            </a:ext>
+          </a:extLst>
+        </p:cNvPr>
+        <p:cNvGrpSpPr/>
+        <p:nvPr/>
+      </p:nvGrpSpPr>
+      <p:grpSpPr>
+        <a:xfrm>
+          <a:off x="0" y="0"/>
+          <a:ext cx="0" cy="0"/>
+          <a:chOff x="0" y="0"/>
+          <a:chExt cx="0" cy="0"/>
+        </a:xfrm>
+      </p:grpSpPr>
+      <p:sp>
+        <p:nvSpPr>
+          <p:cNvPr id="2" name="スライド イメージ プレースホルダー 1">
+            <a:extLst>
+              <a:ext uri="{FF2B5EF4-FFF2-40B4-BE49-F238E27FC236}">
+                <a16:creationId xmlns:a16="http://schemas.microsoft.com/office/drawing/2014/main" id="{7F3BBA8C-384A-3178-FDF8-B082A5EF4449}"/>
+              </a:ext>
+            </a:extLst>
+          </p:cNvPr>
+          <p:cNvSpPr>
+            <a:spLocks noGrp="1" noRot="1" noChangeAspect="1"/>
+          </p:cNvSpPr>
+          <p:nvPr>
+            <p:ph type="sldImg"/>
+          </p:nvPr>
+        </p:nvSpPr>
+        <p:spPr/>
+      </p:sp>
+      <p:sp>
+        <p:nvSpPr>
+          <p:cNvPr id="3" name="ノート プレースホルダー 2">
+            <a:extLst>
+              <a:ext uri="{FF2B5EF4-FFF2-40B4-BE49-F238E27FC236}">
+                <a16:creationId xmlns:a16="http://schemas.microsoft.com/office/drawing/2014/main" id="{CEA09C0A-0869-4E79-1C96-C64810BA662B}"/>
+              </a:ext>
+            </a:extLst>
+          </p:cNvPr>
+          <p:cNvSpPr>
+            <a:spLocks noGrp="1"/>
+          </p:cNvSpPr>
+          <p:nvPr>
+            <p:ph type="body" idx="1"/>
+          </p:nvPr>
+        </p:nvSpPr>
+        <p:spPr/>
+        <p:txBody>
+          <a:bodyPr/>
+          <a:lstStyle/>
+          <a:p>
+            <a:endParaRPr kumimoji="1" lang="ja-JP" altLang="en-US" dirty="0"/>
+          </a:p>
+        </p:txBody>
+      </p:sp>
+      <p:sp>
+        <p:nvSpPr>
+          <p:cNvPr id="4" name="スライド番号プレースホルダー 3">
+            <a:extLst>
+              <a:ext uri="{FF2B5EF4-FFF2-40B4-BE49-F238E27FC236}">
+                <a16:creationId xmlns:a16="http://schemas.microsoft.com/office/drawing/2014/main" id="{71E7B48C-5AB3-9943-9970-20FAF701AEF5}"/>
+              </a:ext>
+            </a:extLst>
+          </p:cNvPr>
+          <p:cNvSpPr>
+            <a:spLocks noGrp="1"/>
+          </p:cNvSpPr>
+          <p:nvPr>
+            <p:ph type="sldNum" sz="quarter" idx="5"/>
+          </p:nvPr>
+        </p:nvSpPr>
+        <p:spPr/>
+        <p:txBody>
+          <a:bodyPr/>
+          <a:lstStyle/>
+          <a:p>
+            <a:fld id="{A58A0B64-6D67-42B8-83A5-133498884D56}" type="slidenum">
+              <a:rPr kumimoji="1" lang="ja-JP" altLang="en-US" smtClean="0"/>
+              <a:t>3</a:t>
+            </a:fld>
+            <a:endParaRPr kumimoji="1" lang="ja-JP" altLang="en-US"/>
+          </a:p>
+        </p:txBody>
+      </p:sp>
+    </p:spTree>
+    <p:extLst>
+      <p:ext uri="{BB962C8B-B14F-4D97-AF65-F5344CB8AC3E}">
+        <p14:creationId xmlns:p14="http://schemas.microsoft.com/office/powerpoint/2010/main" val="829269738"/>
+      </p:ext>
+    </p:extLst>
+  </p:cSld>
+  <p:clrMapOvr>
+    <a:masterClrMapping/>
+  </p:clrMapOvr>
+</p:notes>
+</file>
+
+<file path=ppt/notesSlides/notesSlide3.xml><?xml version="1.0" encoding="utf-8"?>
+<p:notes xmlns:a="http://schemas.openxmlformats.org/drawingml/2006/main" xmlns:r="http://schemas.openxmlformats.org/officeDocument/2006/relationships" xmlns:p="http://schemas.openxmlformats.org/presentationml/2006/main">
+  <p:cSld>
+    <p:spTree>
+      <p:nvGrpSpPr>
+        <p:cNvPr id="1" name="">
+          <a:extLst>
+            <a:ext uri="{FF2B5EF4-FFF2-40B4-BE49-F238E27FC236}">
               <a16:creationId xmlns:a16="http://schemas.microsoft.com/office/drawing/2014/main" id="{EBD93ED5-9666-7F1B-85EF-FF6C29A43EB8}"/>
             </a:ext>
           </a:extLst>
@@ -672,7 +781,7 @@
           <a:p>
             <a:fld id="{A58A0B64-6D67-42B8-83A5-133498884D56}" type="slidenum">
               <a:rPr kumimoji="1" lang="ja-JP" altLang="en-US" smtClean="0"/>
-              <a:t>3</a:t>
+              <a:t>4</a:t>
             </a:fld>
             <a:endParaRPr kumimoji="1" lang="ja-JP" altLang="en-US"/>
           </a:p>
@@ -691,7 +800,7 @@
 </p:notes>
 </file>
 
-<file path=ppt/notesSlides/notesSlide3.xml><?xml version="1.0" encoding="utf-8"?>
+<file path=ppt/notesSlides/notesSlide4.xml><?xml version="1.0" encoding="utf-8"?>
 <p:notes xmlns:a="http://schemas.openxmlformats.org/drawingml/2006/main" xmlns:r="http://schemas.openxmlformats.org/officeDocument/2006/relationships" xmlns:p="http://schemas.openxmlformats.org/presentationml/2006/main">
   <p:cSld>
     <p:spTree>
@@ -780,7 +889,7 @@
           <a:p>
             <a:fld id="{A58A0B64-6D67-42B8-83A5-133498884D56}" type="slidenum">
               <a:rPr kumimoji="1" lang="ja-JP" altLang="en-US" smtClean="0"/>
-              <a:t>4</a:t>
+              <a:t>5</a:t>
             </a:fld>
             <a:endParaRPr kumimoji="1" lang="ja-JP" altLang="en-US"/>
           </a:p>
@@ -1490,7 +1599,7 @@
 </file>
 
 <file path=ppt/slideLayouts/slideLayout2.xml><?xml version="1.0" encoding="utf-8"?>
-<p:sldLayout xmlns:a="http://schemas.openxmlformats.org/drawingml/2006/main" xmlns:r="http://schemas.openxmlformats.org/officeDocument/2006/relationships" xmlns:p="http://schemas.openxmlformats.org/presentationml/2006/main" type="obj" preserve="1">
+<p:sldLayout xmlns:a="http://schemas.openxmlformats.org/drawingml/2006/main" xmlns:r="http://schemas.openxmlformats.org/officeDocument/2006/relationships" xmlns:p="http://schemas.openxmlformats.org/presentationml/2006/main" preserve="1" userDrawn="1">
   <p:cSld name="タイトルとコンテンツ">
     <p:spTree>
       <p:nvGrpSpPr>
@@ -1508,10 +1617,93 @@
       </p:grpSpPr>
       <p:sp>
         <p:nvSpPr>
-          <p:cNvPr id="2" name="タイトル 1">
-            <a:extLst>
-              <a:ext uri="{FF2B5EF4-FFF2-40B4-BE49-F238E27FC236}">
-                <a16:creationId xmlns:a16="http://schemas.microsoft.com/office/drawing/2014/main" id="{8B9C75F2-6284-9EE3-07F1-8A8C63284933}"/>
+          <p:cNvPr id="4" name="日付プレースホルダー 3">
+            <a:extLst>
+              <a:ext uri="{FF2B5EF4-FFF2-40B4-BE49-F238E27FC236}">
+                <a16:creationId xmlns:a16="http://schemas.microsoft.com/office/drawing/2014/main" id="{311DBD3B-56FD-917A-7F5A-3015D9774F18}"/>
+              </a:ext>
+            </a:extLst>
+          </p:cNvPr>
+          <p:cNvSpPr>
+            <a:spLocks noGrp="1"/>
+          </p:cNvSpPr>
+          <p:nvPr>
+            <p:ph type="dt" sz="half" idx="10"/>
+          </p:nvPr>
+        </p:nvSpPr>
+        <p:spPr/>
+        <p:txBody>
+          <a:bodyPr/>
+          <a:lstStyle/>
+          <a:p>
+            <a:fld id="{E3EFBC31-9ECA-48C0-910F-E09377915FB8}" type="datetimeFigureOut">
+              <a:rPr kumimoji="1" lang="ja-JP" altLang="en-US" smtClean="0"/>
+              <a:t>2026/7/5</a:t>
+            </a:fld>
+            <a:endParaRPr kumimoji="1" lang="ja-JP" altLang="en-US"/>
+          </a:p>
+        </p:txBody>
+      </p:sp>
+      <p:sp>
+        <p:nvSpPr>
+          <p:cNvPr id="5" name="フッター プレースホルダー 4">
+            <a:extLst>
+              <a:ext uri="{FF2B5EF4-FFF2-40B4-BE49-F238E27FC236}">
+                <a16:creationId xmlns:a16="http://schemas.microsoft.com/office/drawing/2014/main" id="{8F2DC64E-F29E-D854-BEF0-3070C545D5CA}"/>
+              </a:ext>
+            </a:extLst>
+          </p:cNvPr>
+          <p:cNvSpPr>
+            <a:spLocks noGrp="1"/>
+          </p:cNvSpPr>
+          <p:nvPr>
+            <p:ph type="ftr" sz="quarter" idx="11"/>
+          </p:nvPr>
+        </p:nvSpPr>
+        <p:spPr/>
+        <p:txBody>
+          <a:bodyPr/>
+          <a:lstStyle/>
+          <a:p>
+            <a:endParaRPr kumimoji="1" lang="ja-JP" altLang="en-US"/>
+          </a:p>
+        </p:txBody>
+      </p:sp>
+      <p:sp>
+        <p:nvSpPr>
+          <p:cNvPr id="6" name="スライド番号プレースホルダー 5">
+            <a:extLst>
+              <a:ext uri="{FF2B5EF4-FFF2-40B4-BE49-F238E27FC236}">
+                <a16:creationId xmlns:a16="http://schemas.microsoft.com/office/drawing/2014/main" id="{7548F59C-A5D5-E9EE-6BFB-1E812ECDBA45}"/>
+              </a:ext>
+            </a:extLst>
+          </p:cNvPr>
+          <p:cNvSpPr>
+            <a:spLocks noGrp="1"/>
+          </p:cNvSpPr>
+          <p:nvPr>
+            <p:ph type="sldNum" sz="quarter" idx="12"/>
+          </p:nvPr>
+        </p:nvSpPr>
+        <p:spPr/>
+        <p:txBody>
+          <a:bodyPr/>
+          <a:lstStyle/>
+          <a:p>
+            <a:fld id="{9EBFBC76-F46F-4ADD-8228-9529630895ED}" type="slidenum">
+              <a:rPr kumimoji="1" lang="ja-JP" altLang="en-US" smtClean="0"/>
+              <a:t>‹#›</a:t>
+            </a:fld>
+            <a:endParaRPr kumimoji="1" lang="ja-JP" altLang="en-US"/>
+          </a:p>
+        </p:txBody>
+      </p:sp>
+      <p:sp>
+        <p:nvSpPr>
+          <p:cNvPr id="7" name="タイトル 1">
+            <a:extLst>
+              <a:ext uri="{FF2B5EF4-FFF2-40B4-BE49-F238E27FC236}">
+                <a16:creationId xmlns:a16="http://schemas.microsoft.com/office/drawing/2014/main" id="{3268BB7D-DBD7-1713-CFE8-36DAC54A4B03}"/>
               </a:ext>
             </a:extLst>
           </p:cNvPr>
@@ -1522,13 +1714,27 @@
             <p:ph type="title"/>
           </p:nvPr>
         </p:nvSpPr>
-        <p:spPr/>
-        <p:txBody>
-          <a:bodyPr/>
-          <a:lstStyle/>
-          <a:p>
-            <a:r>
-              <a:rPr kumimoji="1" lang="ja-JP" altLang="en-US"/>
+        <p:spPr>
+          <a:xfrm>
+            <a:off x="167951" y="365124"/>
+            <a:ext cx="11877869" cy="540000"/>
+          </a:xfrm>
+        </p:spPr>
+        <p:txBody>
+          <a:bodyPr>
+            <a:normAutofit/>
+          </a:bodyPr>
+          <a:lstStyle>
+            <a:lvl1pPr>
+              <a:defRPr sz="2400" b="1">
+                <a:latin typeface="Meiryo UI" panose="020B0604030504040204" pitchFamily="50" charset="-128"/>
+                <a:ea typeface="Meiryo UI" panose="020B0604030504040204" pitchFamily="50" charset="-128"/>
+              </a:defRPr>
+            </a:lvl1pPr>
+          </a:lstStyle>
+          <a:p>
+            <a:r>
+              <a:rPr kumimoji="1" lang="ja-JP" altLang="en-US" dirty="0"/>
               <a:t>マスター タイトルの書式設定</a:t>
             </a:r>
           </a:p>
@@ -1536,10 +1742,10 @@
       </p:sp>
       <p:sp>
         <p:nvSpPr>
-          <p:cNvPr id="3" name="コンテンツ プレースホルダー 2">
-            <a:extLst>
-              <a:ext uri="{FF2B5EF4-FFF2-40B4-BE49-F238E27FC236}">
-                <a16:creationId xmlns:a16="http://schemas.microsoft.com/office/drawing/2014/main" id="{03BB957D-55BF-E429-F24B-9AB0F2BC57A6}"/>
+          <p:cNvPr id="8" name="コンテンツ プレースホルダー 2">
+            <a:extLst>
+              <a:ext uri="{FF2B5EF4-FFF2-40B4-BE49-F238E27FC236}">
+                <a16:creationId xmlns:a16="http://schemas.microsoft.com/office/drawing/2014/main" id="{FB81DDD8-40FD-B704-081F-F14E6F08899A}"/>
               </a:ext>
             </a:extLst>
           </p:cNvPr>
@@ -1550,159 +1756,81 @@
             <p:ph idx="1"/>
           </p:nvPr>
         </p:nvSpPr>
-        <p:spPr/>
+        <p:spPr>
+          <a:xfrm>
+            <a:off x="167951" y="1073020"/>
+            <a:ext cx="11877869" cy="5103943"/>
+          </a:xfrm>
+        </p:spPr>
         <p:txBody>
           <a:bodyPr/>
           <a:lstStyle/>
           <a:p>
             <a:pPr lvl="0"/>
             <a:r>
-              <a:rPr kumimoji="1" lang="ja-JP" altLang="en-US"/>
+              <a:rPr kumimoji="1" lang="ja-JP" altLang="en-US" dirty="0"/>
               <a:t>マスター テキストの書式設定</a:t>
             </a:r>
           </a:p>
           <a:p>
             <a:pPr lvl="1"/>
             <a:r>
-              <a:rPr kumimoji="1" lang="ja-JP" altLang="en-US"/>
+              <a:rPr kumimoji="1" lang="ja-JP" altLang="en-US" dirty="0"/>
               <a:t>第 </a:t>
             </a:r>
             <a:r>
-              <a:rPr kumimoji="1" lang="en-US" altLang="ja-JP"/>
+              <a:rPr kumimoji="1" lang="en-US" altLang="ja-JP" dirty="0"/>
               <a:t>2 </a:t>
             </a:r>
             <a:r>
-              <a:rPr kumimoji="1" lang="ja-JP" altLang="en-US"/>
+              <a:rPr kumimoji="1" lang="ja-JP" altLang="en-US" dirty="0"/>
               <a:t>レベル</a:t>
             </a:r>
           </a:p>
           <a:p>
             <a:pPr lvl="2"/>
             <a:r>
-              <a:rPr kumimoji="1" lang="ja-JP" altLang="en-US"/>
+              <a:rPr kumimoji="1" lang="ja-JP" altLang="en-US" dirty="0"/>
               <a:t>第 </a:t>
             </a:r>
             <a:r>
-              <a:rPr kumimoji="1" lang="en-US" altLang="ja-JP"/>
+              <a:rPr kumimoji="1" lang="en-US" altLang="ja-JP" dirty="0"/>
               <a:t>3 </a:t>
             </a:r>
             <a:r>
-              <a:rPr kumimoji="1" lang="ja-JP" altLang="en-US"/>
+              <a:rPr kumimoji="1" lang="ja-JP" altLang="en-US" dirty="0"/>
               <a:t>レベル</a:t>
             </a:r>
           </a:p>
           <a:p>
             <a:pPr lvl="3"/>
             <a:r>
-              <a:rPr kumimoji="1" lang="ja-JP" altLang="en-US"/>
+              <a:rPr kumimoji="1" lang="ja-JP" altLang="en-US" dirty="0"/>
               <a:t>第 </a:t>
             </a:r>
             <a:r>
-              <a:rPr kumimoji="1" lang="en-US" altLang="ja-JP"/>
+              <a:rPr kumimoji="1" lang="en-US" altLang="ja-JP" dirty="0"/>
               <a:t>4 </a:t>
             </a:r>
             <a:r>
-              <a:rPr kumimoji="1" lang="ja-JP" altLang="en-US"/>
+              <a:rPr kumimoji="1" lang="ja-JP" altLang="en-US" dirty="0"/>
               <a:t>レベル</a:t>
             </a:r>
           </a:p>
           <a:p>
             <a:pPr lvl="4"/>
             <a:r>
-              <a:rPr kumimoji="1" lang="ja-JP" altLang="en-US"/>
+              <a:rPr kumimoji="1" lang="ja-JP" altLang="en-US" dirty="0"/>
               <a:t>第 </a:t>
             </a:r>
             <a:r>
-              <a:rPr kumimoji="1" lang="en-US" altLang="ja-JP"/>
+              <a:rPr kumimoji="1" lang="en-US" altLang="ja-JP" dirty="0"/>
               <a:t>5 </a:t>
             </a:r>
             <a:r>
-              <a:rPr kumimoji="1" lang="ja-JP" altLang="en-US"/>
+              <a:rPr kumimoji="1" lang="ja-JP" altLang="en-US" dirty="0"/>
               <a:t>レベル</a:t>
             </a:r>
-          </a:p>
-        </p:txBody>
-      </p:sp>
-      <p:sp>
-        <p:nvSpPr>
-          <p:cNvPr id="4" name="日付プレースホルダー 3">
-            <a:extLst>
-              <a:ext uri="{FF2B5EF4-FFF2-40B4-BE49-F238E27FC236}">
-                <a16:creationId xmlns:a16="http://schemas.microsoft.com/office/drawing/2014/main" id="{311DBD3B-56FD-917A-7F5A-3015D9774F18}"/>
-              </a:ext>
-            </a:extLst>
-          </p:cNvPr>
-          <p:cNvSpPr>
-            <a:spLocks noGrp="1"/>
-          </p:cNvSpPr>
-          <p:nvPr>
-            <p:ph type="dt" sz="half" idx="10"/>
-          </p:nvPr>
-        </p:nvSpPr>
-        <p:spPr/>
-        <p:txBody>
-          <a:bodyPr/>
-          <a:lstStyle/>
-          <a:p>
-            <a:fld id="{E3EFBC31-9ECA-48C0-910F-E09377915FB8}" type="datetimeFigureOut">
-              <a:rPr kumimoji="1" lang="ja-JP" altLang="en-US" smtClean="0"/>
-              <a:t>2026/7/5</a:t>
-            </a:fld>
-            <a:endParaRPr kumimoji="1" lang="ja-JP" altLang="en-US"/>
-          </a:p>
-        </p:txBody>
-      </p:sp>
-      <p:sp>
-        <p:nvSpPr>
-          <p:cNvPr id="5" name="フッター プレースホルダー 4">
-            <a:extLst>
-              <a:ext uri="{FF2B5EF4-FFF2-40B4-BE49-F238E27FC236}">
-                <a16:creationId xmlns:a16="http://schemas.microsoft.com/office/drawing/2014/main" id="{8F2DC64E-F29E-D854-BEF0-3070C545D5CA}"/>
-              </a:ext>
-            </a:extLst>
-          </p:cNvPr>
-          <p:cNvSpPr>
-            <a:spLocks noGrp="1"/>
-          </p:cNvSpPr>
-          <p:nvPr>
-            <p:ph type="ftr" sz="quarter" idx="11"/>
-          </p:nvPr>
-        </p:nvSpPr>
-        <p:spPr/>
-        <p:txBody>
-          <a:bodyPr/>
-          <a:lstStyle/>
-          <a:p>
-            <a:endParaRPr kumimoji="1" lang="ja-JP" altLang="en-US"/>
-          </a:p>
-        </p:txBody>
-      </p:sp>
-      <p:sp>
-        <p:nvSpPr>
-          <p:cNvPr id="6" name="スライド番号プレースホルダー 5">
-            <a:extLst>
-              <a:ext uri="{FF2B5EF4-FFF2-40B4-BE49-F238E27FC236}">
-                <a16:creationId xmlns:a16="http://schemas.microsoft.com/office/drawing/2014/main" id="{7548F59C-A5D5-E9EE-6BFB-1E812ECDBA45}"/>
-              </a:ext>
-            </a:extLst>
-          </p:cNvPr>
-          <p:cNvSpPr>
-            <a:spLocks noGrp="1"/>
-          </p:cNvSpPr>
-          <p:nvPr>
-            <p:ph type="sldNum" sz="quarter" idx="12"/>
-          </p:nvPr>
-        </p:nvSpPr>
-        <p:spPr/>
-        <p:txBody>
-          <a:bodyPr/>
-          <a:lstStyle/>
-          <a:p>
-            <a:fld id="{9EBFBC76-F46F-4ADD-8228-9529630895ED}" type="slidenum">
-              <a:rPr kumimoji="1" lang="ja-JP" altLang="en-US" smtClean="0"/>
-              <a:t>‹#›</a:t>
-            </a:fld>
-            <a:endParaRPr kumimoji="1" lang="ja-JP" altLang="en-US"/>
           </a:p>
         </p:txBody>
       </p:sp>
@@ -4400,13 +4528,13 @@
           <p:nvPr>
             <p:extLst>
               <p:ext uri="{D42A27DB-BD31-4B8C-83A1-F6EECF244321}">
-                <p14:modId xmlns:p14="http://schemas.microsoft.com/office/powerpoint/2010/main" val="1283482374"/>
+                <p14:modId xmlns:p14="http://schemas.microsoft.com/office/powerpoint/2010/main" val="2468268616"/>
               </p:ext>
             </p:extLst>
           </p:nvPr>
         </p:nvGraphicFramePr>
         <p:xfrm>
-          <a:off x="370800" y="858160"/>
+          <a:off x="172278" y="1076821"/>
           <a:ext cx="7878678" cy="5075501"/>
         </p:xfrm>
         <a:graphic>
@@ -5162,32 +5290,19 @@
               <a:tabLst/>
               <a:defRPr/>
             </a:pPr>
-            <a:r>
-              <a:rPr lang="ja-JP" altLang="en-US" dirty="0">
-                <a:solidFill>
-                  <a:srgbClr val="070F26"/>
-                </a:solidFill>
-                <a:latin typeface="Meiryo UI"/>
-                <a:ea typeface="Meiryo UI"/>
-              </a:rPr>
-              <a:t>研修</a:t>
-            </a:r>
-            <a:r>
-              <a:rPr kumimoji="1" lang="ja-JP" altLang="en-US" sz="2600" b="1" i="0" u="none" strike="noStrike" kern="1200" cap="none" spc="0" normalizeH="0" baseline="0" noProof="0" dirty="0">
-                <a:ln>
-                  <a:noFill/>
-                </a:ln>
-                <a:solidFill>
-                  <a:srgbClr val="070F26"/>
-                </a:solidFill>
-                <a:effectLst/>
-                <a:uLnTx/>
-                <a:uFillTx/>
-                <a:latin typeface="Meiryo UI"/>
-                <a:ea typeface="Meiryo UI"/>
-              </a:rPr>
-              <a:t>の全体像について</a:t>
-            </a:r>
+            <a:endParaRPr kumimoji="1" lang="ja-JP" altLang="en-US" sz="2600" b="1" i="0" u="none" strike="noStrike" kern="1200" cap="none" spc="0" normalizeH="0" baseline="0" noProof="0" dirty="0">
+              <a:ln>
+                <a:noFill/>
+              </a:ln>
+              <a:solidFill>
+                <a:srgbClr val="070F26"/>
+              </a:solidFill>
+              <a:effectLst/>
+              <a:uLnTx/>
+              <a:uFillTx/>
+              <a:latin typeface="Meiryo UI"/>
+              <a:ea typeface="Meiryo UI"/>
+            </a:endParaRPr>
           </a:p>
         </p:txBody>
       </p:sp>
@@ -5205,7 +5320,7 @@
         </p:nvGrpSpPr>
         <p:grpSpPr>
           <a:xfrm>
-            <a:off x="480129" y="1423907"/>
+            <a:off x="281607" y="1642568"/>
             <a:ext cx="3600000" cy="2621059"/>
             <a:chOff x="946296" y="1364275"/>
             <a:chExt cx="4359349" cy="2794887"/>
@@ -5398,7 +5513,7 @@
         </p:nvSpPr>
         <p:spPr>
           <a:xfrm>
-            <a:off x="660129" y="3075796"/>
+            <a:off x="461607" y="3294457"/>
             <a:ext cx="3240000" cy="360000"/>
           </a:xfrm>
           <a:prstGeom prst="roundRect">
@@ -5471,7 +5586,7 @@
         </p:nvSpPr>
         <p:spPr>
           <a:xfrm>
-            <a:off x="660129" y="2099518"/>
+            <a:off x="461607" y="2318179"/>
             <a:ext cx="3240000" cy="360000"/>
           </a:xfrm>
           <a:prstGeom prst="roundRect">
@@ -5606,7 +5721,7 @@
         </p:nvSpPr>
         <p:spPr>
           <a:xfrm rot="16200000">
-            <a:off x="4126704" y="2189518"/>
+            <a:off x="3928182" y="2408179"/>
             <a:ext cx="360000" cy="180000"/>
           </a:xfrm>
           <a:prstGeom prst="downArrow">
@@ -5680,7 +5795,7 @@
         </p:nvSpPr>
         <p:spPr>
           <a:xfrm>
-            <a:off x="660129" y="2587657"/>
+            <a:off x="461607" y="2806318"/>
             <a:ext cx="3240000" cy="360000"/>
           </a:xfrm>
           <a:prstGeom prst="roundRect">
@@ -5788,7 +5903,7 @@
         </p:nvGrpSpPr>
         <p:grpSpPr>
           <a:xfrm>
-            <a:off x="4503504" y="1423907"/>
+            <a:off x="4304982" y="1642568"/>
             <a:ext cx="3600000" cy="1648169"/>
             <a:chOff x="946296" y="1364275"/>
             <a:chExt cx="4359349" cy="1757475"/>
@@ -5981,7 +6096,7 @@
         </p:nvSpPr>
         <p:spPr>
           <a:xfrm>
-            <a:off x="4683504" y="2575123"/>
+            <a:off x="4484982" y="2793784"/>
             <a:ext cx="3240000" cy="360000"/>
           </a:xfrm>
           <a:prstGeom prst="roundRect">
@@ -6064,7 +6179,7 @@
         </p:nvSpPr>
         <p:spPr>
           <a:xfrm>
-            <a:off x="4683504" y="2099518"/>
+            <a:off x="4484982" y="2318179"/>
             <a:ext cx="3240000" cy="360000"/>
           </a:xfrm>
           <a:prstGeom prst="roundRect">
@@ -6189,7 +6304,7 @@
         </p:nvSpPr>
         <p:spPr>
           <a:xfrm>
-            <a:off x="2100129" y="4244378"/>
+            <a:off x="1901607" y="4463039"/>
             <a:ext cx="360000" cy="180000"/>
           </a:xfrm>
           <a:prstGeom prst="downArrow">
@@ -6263,7 +6378,7 @@
         </p:nvGrpSpPr>
         <p:grpSpPr>
           <a:xfrm>
-            <a:off x="480129" y="4694326"/>
+            <a:off x="281607" y="4912987"/>
             <a:ext cx="3600000" cy="936522"/>
             <a:chOff x="946296" y="5714099"/>
             <a:chExt cx="4359349" cy="936522"/>
@@ -6477,7 +6592,7 @@
         </p:nvSpPr>
         <p:spPr>
           <a:xfrm>
-            <a:off x="6123504" y="3310095"/>
+            <a:off x="5924982" y="3528756"/>
             <a:ext cx="360000" cy="180000"/>
           </a:xfrm>
           <a:prstGeom prst="downArrow">
@@ -6551,7 +6666,7 @@
         </p:nvGrpSpPr>
         <p:grpSpPr>
           <a:xfrm>
-            <a:off x="4503504" y="3740167"/>
+            <a:off x="4304982" y="3958828"/>
             <a:ext cx="3600000" cy="936522"/>
             <a:chOff x="946296" y="5714099"/>
             <a:chExt cx="4359349" cy="936522"/>
@@ -6767,7 +6882,7 @@
         </p:nvSpPr>
         <p:spPr>
           <a:xfrm>
-            <a:off x="660129" y="3563934"/>
+            <a:off x="461607" y="3782595"/>
             <a:ext cx="3240000" cy="360000"/>
           </a:xfrm>
           <a:prstGeom prst="roundRect">
@@ -6836,6 +6951,41 @@
           </a:p>
         </p:txBody>
       </p:sp>
+      <p:sp>
+        <p:nvSpPr>
+          <p:cNvPr id="9" name="タイトル 8">
+            <a:extLst>
+              <a:ext uri="{FF2B5EF4-FFF2-40B4-BE49-F238E27FC236}">
+                <a16:creationId xmlns:a16="http://schemas.microsoft.com/office/drawing/2014/main" id="{51DBEF25-129E-B6F5-A529-739CDDD782A0}"/>
+              </a:ext>
+            </a:extLst>
+          </p:cNvPr>
+          <p:cNvSpPr>
+            <a:spLocks noGrp="1"/>
+          </p:cNvSpPr>
+          <p:nvPr>
+            <p:ph type="title"/>
+          </p:nvPr>
+        </p:nvSpPr>
+        <p:spPr>
+          <a:xfrm>
+            <a:off x="167951" y="365124"/>
+            <a:ext cx="11877869" cy="540000"/>
+          </a:xfrm>
+        </p:spPr>
+        <p:txBody>
+          <a:bodyPr>
+            <a:normAutofit/>
+          </a:bodyPr>
+          <a:lstStyle/>
+          <a:p>
+            <a:r>
+              <a:rPr lang="ja-JP" altLang="en-US" dirty="0"/>
+              <a:t>研修の全体像について</a:t>
+            </a:r>
+          </a:p>
+        </p:txBody>
+      </p:sp>
     </p:spTree>
     <p:extLst>
       <p:ext uri="{BB962C8B-B14F-4D97-AF65-F5344CB8AC3E}">
@@ -6850,6 +7000,1273 @@
 </file>
 
 <file path=ppt/slides/slide3.xml><?xml version="1.0" encoding="utf-8"?>
+<p:sld xmlns:a="http://schemas.openxmlformats.org/drawingml/2006/main" xmlns:r="http://schemas.openxmlformats.org/officeDocument/2006/relationships" xmlns:p="http://schemas.openxmlformats.org/presentationml/2006/main">
+  <p:cSld>
+    <p:spTree>
+      <p:nvGrpSpPr>
+        <p:cNvPr id="1" name="">
+          <a:extLst>
+            <a:ext uri="{FF2B5EF4-FFF2-40B4-BE49-F238E27FC236}">
+              <a16:creationId xmlns:a16="http://schemas.microsoft.com/office/drawing/2014/main" id="{64037E58-8B60-786B-44B9-0C5D8487152A}"/>
+            </a:ext>
+          </a:extLst>
+        </p:cNvPr>
+        <p:cNvGrpSpPr/>
+        <p:nvPr/>
+      </p:nvGrpSpPr>
+      <p:grpSpPr>
+        <a:xfrm>
+          <a:off x="0" y="0"/>
+          <a:ext cx="0" cy="0"/>
+          <a:chOff x="0" y="0"/>
+          <a:chExt cx="0" cy="0"/>
+        </a:xfrm>
+      </p:grpSpPr>
+      <p:pic>
+        <p:nvPicPr>
+          <p:cNvPr id="59" name="Picture 8" descr="ウェブブラウザーのアイコン | フリーのアイコンイラスト素材 icon-pit">
+            <a:extLst>
+              <a:ext uri="{FF2B5EF4-FFF2-40B4-BE49-F238E27FC236}">
+                <a16:creationId xmlns:a16="http://schemas.microsoft.com/office/drawing/2014/main" id="{FE5E833F-75B4-D73C-6039-DACC4C583ECB}"/>
+              </a:ext>
+            </a:extLst>
+          </p:cNvPr>
+          <p:cNvPicPr>
+            <a:picLocks noChangeAspect="1" noChangeArrowheads="1"/>
+          </p:cNvPicPr>
+          <p:nvPr/>
+        </p:nvPicPr>
+        <p:blipFill>
+          <a:blip r:embed="rId3">
+            <a:extLst>
+              <a:ext uri="{28A0092B-C50C-407E-A947-70E740481C1C}">
+                <a14:useLocalDpi xmlns:a14="http://schemas.microsoft.com/office/drawing/2010/main" val="0"/>
+              </a:ext>
+            </a:extLst>
+          </a:blip>
+          <a:srcRect/>
+          <a:stretch>
+            <a:fillRect/>
+          </a:stretch>
+        </p:blipFill>
+        <p:spPr bwMode="auto">
+          <a:xfrm>
+            <a:off x="8729196" y="4611453"/>
+            <a:ext cx="1531777" cy="1531777"/>
+          </a:xfrm>
+          <a:prstGeom prst="rect">
+            <a:avLst/>
+          </a:prstGeom>
+          <a:noFill/>
+          <a:extLst>
+            <a:ext uri="{909E8E84-426E-40DD-AFC4-6F175D3DCCD1}">
+              <a14:hiddenFill xmlns:a14="http://schemas.microsoft.com/office/drawing/2010/main">
+                <a:solidFill>
+                  <a:srgbClr val="FFFFFF"/>
+                </a:solidFill>
+              </a14:hiddenFill>
+            </a:ext>
+          </a:extLst>
+        </p:spPr>
+      </p:pic>
+      <p:pic>
+        <p:nvPicPr>
+          <p:cNvPr id="1032" name="Picture 8" descr="ウェブブラウザーのアイコン | フリーのアイコンイラスト素材 icon-pit">
+            <a:extLst>
+              <a:ext uri="{FF2B5EF4-FFF2-40B4-BE49-F238E27FC236}">
+                <a16:creationId xmlns:a16="http://schemas.microsoft.com/office/drawing/2014/main" id="{E6A23D2A-D3FB-5249-04D3-BB137F42E6EB}"/>
+              </a:ext>
+            </a:extLst>
+          </p:cNvPr>
+          <p:cNvPicPr>
+            <a:picLocks noChangeAspect="1" noChangeArrowheads="1"/>
+          </p:cNvPicPr>
+          <p:nvPr/>
+        </p:nvPicPr>
+        <p:blipFill>
+          <a:blip r:embed="rId3">
+            <a:extLst>
+              <a:ext uri="{28A0092B-C50C-407E-A947-70E740481C1C}">
+                <a14:useLocalDpi xmlns:a14="http://schemas.microsoft.com/office/drawing/2010/main" val="0"/>
+              </a:ext>
+            </a:extLst>
+          </a:blip>
+          <a:srcRect/>
+          <a:stretch>
+            <a:fillRect/>
+          </a:stretch>
+        </p:blipFill>
+        <p:spPr bwMode="auto">
+          <a:xfrm>
+            <a:off x="1058434" y="5564312"/>
+            <a:ext cx="991427" cy="991427"/>
+          </a:xfrm>
+          <a:prstGeom prst="rect">
+            <a:avLst/>
+          </a:prstGeom>
+          <a:noFill/>
+          <a:extLst>
+            <a:ext uri="{909E8E84-426E-40DD-AFC4-6F175D3DCCD1}">
+              <a14:hiddenFill xmlns:a14="http://schemas.microsoft.com/office/drawing/2010/main">
+                <a:solidFill>
+                  <a:srgbClr val="FFFFFF"/>
+                </a:solidFill>
+              </a14:hiddenFill>
+            </a:ext>
+          </a:extLst>
+        </p:spPr>
+      </p:pic>
+      <p:sp>
+        <p:nvSpPr>
+          <p:cNvPr id="13" name="タイトル 12">
+            <a:extLst>
+              <a:ext uri="{FF2B5EF4-FFF2-40B4-BE49-F238E27FC236}">
+                <a16:creationId xmlns:a16="http://schemas.microsoft.com/office/drawing/2014/main" id="{0289634B-65D7-3B24-C52F-C76CB8E19700}"/>
+              </a:ext>
+            </a:extLst>
+          </p:cNvPr>
+          <p:cNvSpPr>
+            <a:spLocks noGrp="1"/>
+          </p:cNvSpPr>
+          <p:nvPr>
+            <p:ph type="title"/>
+          </p:nvPr>
+        </p:nvSpPr>
+        <p:spPr>
+          <a:xfrm>
+            <a:off x="167951" y="365124"/>
+            <a:ext cx="11877869" cy="540000"/>
+          </a:xfrm>
+        </p:spPr>
+        <p:txBody>
+          <a:bodyPr>
+            <a:normAutofit/>
+          </a:bodyPr>
+          <a:lstStyle/>
+          <a:p>
+            <a:r>
+              <a:rPr lang="ja-JP" altLang="en-US" dirty="0"/>
+              <a:t>課題について</a:t>
+            </a:r>
+          </a:p>
+        </p:txBody>
+      </p:sp>
+      <p:sp>
+        <p:nvSpPr>
+          <p:cNvPr id="14" name="コンテンツ プレースホルダー 13">
+            <a:extLst>
+              <a:ext uri="{FF2B5EF4-FFF2-40B4-BE49-F238E27FC236}">
+                <a16:creationId xmlns:a16="http://schemas.microsoft.com/office/drawing/2014/main" id="{A6119A6B-0C81-0313-4CFC-EDD3139BA480}"/>
+              </a:ext>
+            </a:extLst>
+          </p:cNvPr>
+          <p:cNvSpPr>
+            <a:spLocks noGrp="1"/>
+          </p:cNvSpPr>
+          <p:nvPr>
+            <p:ph idx="1"/>
+          </p:nvPr>
+        </p:nvSpPr>
+        <p:spPr>
+          <a:xfrm>
+            <a:off x="168275" y="1073150"/>
+            <a:ext cx="11877675" cy="5103813"/>
+          </a:xfrm>
+        </p:spPr>
+        <p:txBody>
+          <a:bodyPr>
+            <a:normAutofit/>
+          </a:bodyPr>
+          <a:lstStyle/>
+          <a:p>
+            <a:r>
+              <a:rPr lang="ja-JP" altLang="en-US" dirty="0"/>
+              <a:t>課題①</a:t>
+            </a:r>
+            <a:endParaRPr lang="en-US" altLang="ja-JP" dirty="0"/>
+          </a:p>
+          <a:p>
+            <a:pPr lvl="1"/>
+            <a:r>
+              <a:rPr lang="en-US" altLang="ja-JP" dirty="0"/>
+              <a:t>Java</a:t>
+            </a:r>
+            <a:r>
+              <a:rPr lang="ja-JP" altLang="en-US" dirty="0"/>
+              <a:t>、</a:t>
+            </a:r>
+            <a:r>
+              <a:rPr lang="en-US" altLang="ja-JP" dirty="0"/>
+              <a:t>Spring</a:t>
+            </a:r>
+            <a:r>
+              <a:rPr lang="ja-JP" altLang="en-US" dirty="0"/>
+              <a:t>、</a:t>
+            </a:r>
+            <a:r>
+              <a:rPr lang="en-US" altLang="ja-JP" dirty="0"/>
+              <a:t>DB</a:t>
+            </a:r>
+            <a:r>
+              <a:rPr lang="ja-JP" altLang="en-US" dirty="0"/>
+              <a:t>を用いて、</a:t>
+            </a:r>
+            <a:r>
+              <a:rPr lang="en-US" altLang="ja-JP" dirty="0"/>
+              <a:t>Web</a:t>
+            </a:r>
+            <a:r>
+              <a:rPr lang="ja-JP" altLang="en-US" dirty="0"/>
+              <a:t>アプリケーションを作成します。</a:t>
+            </a:r>
+            <a:endParaRPr lang="en-US" altLang="ja-JP" dirty="0"/>
+          </a:p>
+          <a:p>
+            <a:r>
+              <a:rPr lang="ja-JP" altLang="en-US" dirty="0"/>
+              <a:t>課題②</a:t>
+            </a:r>
+            <a:endParaRPr lang="en-US" altLang="ja-JP" dirty="0"/>
+          </a:p>
+          <a:p>
+            <a:pPr lvl="1"/>
+            <a:r>
+              <a:rPr lang="ja-JP" altLang="en-US" dirty="0"/>
+              <a:t>課題①で作成した</a:t>
+            </a:r>
+            <a:r>
+              <a:rPr lang="en-US" altLang="ja-JP" dirty="0"/>
+              <a:t>Web</a:t>
+            </a:r>
+            <a:r>
+              <a:rPr lang="ja-JP" altLang="en-US" dirty="0"/>
+              <a:t>アプリケーションを対象に、テスト仕様書を作成し、その内容に基づいて単体テストを実施します。</a:t>
+            </a:r>
+            <a:endParaRPr lang="en-US" altLang="ja-JP" dirty="0"/>
+          </a:p>
+        </p:txBody>
+      </p:sp>
+      <p:sp>
+        <p:nvSpPr>
+          <p:cNvPr id="17" name="正方形/長方形 16">
+            <a:extLst>
+              <a:ext uri="{FF2B5EF4-FFF2-40B4-BE49-F238E27FC236}">
+                <a16:creationId xmlns:a16="http://schemas.microsoft.com/office/drawing/2014/main" id="{24B6AE76-DE29-4093-B356-B2FA8EBAB3EA}"/>
+              </a:ext>
+            </a:extLst>
+          </p:cNvPr>
+          <p:cNvSpPr/>
+          <p:nvPr/>
+        </p:nvSpPr>
+        <p:spPr>
+          <a:xfrm>
+            <a:off x="654644" y="4114799"/>
+            <a:ext cx="5364373" cy="2525086"/>
+          </a:xfrm>
+          <a:prstGeom prst="rect">
+            <a:avLst/>
+          </a:prstGeom>
+          <a:noFill/>
+          <a:ln w="38100">
+            <a:solidFill>
+              <a:schemeClr val="tx1"/>
+            </a:solidFill>
+          </a:ln>
+          <a:effectLst/>
+        </p:spPr>
+        <p:style>
+          <a:lnRef idx="1">
+            <a:schemeClr val="accent1"/>
+          </a:lnRef>
+          <a:fillRef idx="3">
+            <a:schemeClr val="accent1"/>
+          </a:fillRef>
+          <a:effectRef idx="2">
+            <a:schemeClr val="accent1"/>
+          </a:effectRef>
+          <a:fontRef idx="minor">
+            <a:schemeClr val="lt1"/>
+          </a:fontRef>
+        </p:style>
+        <p:txBody>
+          <a:bodyPr rot="0" spcFirstLastPara="0" vert="horz" wrap="square" lIns="36000" tIns="36000" rIns="36000" bIns="36000" numCol="1" spcCol="0" rtlCol="0" fromWordArt="0" anchor="t" anchorCtr="0" forceAA="0" compatLnSpc="1">
+            <a:prstTxWarp prst="textNoShape">
+              <a:avLst/>
+            </a:prstTxWarp>
+            <a:noAutofit/>
+          </a:bodyPr>
+          <a:lstStyle>
+            <a:defPPr>
+              <a:defRPr lang="ja-JP"/>
+            </a:defPPr>
+            <a:lvl1pPr marL="0" algn="l" defTabSz="914400" rtl="0" eaLnBrk="1" latinLnBrk="0" hangingPunct="1">
+              <a:defRPr kumimoji="1" sz="1800" kern="1200">
+                <a:solidFill>
+                  <a:schemeClr val="lt1"/>
+                </a:solidFill>
+                <a:latin typeface="+mn-lt"/>
+                <a:ea typeface="+mn-ea"/>
+                <a:cs typeface="+mn-cs"/>
+              </a:defRPr>
+            </a:lvl1pPr>
+            <a:lvl2pPr marL="457200" algn="l" defTabSz="914400" rtl="0" eaLnBrk="1" latinLnBrk="0" hangingPunct="1">
+              <a:defRPr kumimoji="1" sz="1800" kern="1200">
+                <a:solidFill>
+                  <a:schemeClr val="lt1"/>
+                </a:solidFill>
+                <a:latin typeface="+mn-lt"/>
+                <a:ea typeface="+mn-ea"/>
+                <a:cs typeface="+mn-cs"/>
+              </a:defRPr>
+            </a:lvl2pPr>
+            <a:lvl3pPr marL="914400" algn="l" defTabSz="914400" rtl="0" eaLnBrk="1" latinLnBrk="0" hangingPunct="1">
+              <a:defRPr kumimoji="1" sz="1800" kern="1200">
+                <a:solidFill>
+                  <a:schemeClr val="lt1"/>
+                </a:solidFill>
+                <a:latin typeface="+mn-lt"/>
+                <a:ea typeface="+mn-ea"/>
+                <a:cs typeface="+mn-cs"/>
+              </a:defRPr>
+            </a:lvl3pPr>
+            <a:lvl4pPr marL="1371600" algn="l" defTabSz="914400" rtl="0" eaLnBrk="1" latinLnBrk="0" hangingPunct="1">
+              <a:defRPr kumimoji="1" sz="1800" kern="1200">
+                <a:solidFill>
+                  <a:schemeClr val="lt1"/>
+                </a:solidFill>
+                <a:latin typeface="+mn-lt"/>
+                <a:ea typeface="+mn-ea"/>
+                <a:cs typeface="+mn-cs"/>
+              </a:defRPr>
+            </a:lvl4pPr>
+            <a:lvl5pPr marL="1828800" algn="l" defTabSz="914400" rtl="0" eaLnBrk="1" latinLnBrk="0" hangingPunct="1">
+              <a:defRPr kumimoji="1" sz="1800" kern="1200">
+                <a:solidFill>
+                  <a:schemeClr val="lt1"/>
+                </a:solidFill>
+                <a:latin typeface="+mn-lt"/>
+                <a:ea typeface="+mn-ea"/>
+                <a:cs typeface="+mn-cs"/>
+              </a:defRPr>
+            </a:lvl5pPr>
+            <a:lvl6pPr marL="2286000" algn="l" defTabSz="914400" rtl="0" eaLnBrk="1" latinLnBrk="0" hangingPunct="1">
+              <a:defRPr kumimoji="1" sz="1800" kern="1200">
+                <a:solidFill>
+                  <a:schemeClr val="lt1"/>
+                </a:solidFill>
+                <a:latin typeface="+mn-lt"/>
+                <a:ea typeface="+mn-ea"/>
+                <a:cs typeface="+mn-cs"/>
+              </a:defRPr>
+            </a:lvl6pPr>
+            <a:lvl7pPr marL="2743200" algn="l" defTabSz="914400" rtl="0" eaLnBrk="1" latinLnBrk="0" hangingPunct="1">
+              <a:defRPr kumimoji="1" sz="1800" kern="1200">
+                <a:solidFill>
+                  <a:schemeClr val="lt1"/>
+                </a:solidFill>
+                <a:latin typeface="+mn-lt"/>
+                <a:ea typeface="+mn-ea"/>
+                <a:cs typeface="+mn-cs"/>
+              </a:defRPr>
+            </a:lvl7pPr>
+            <a:lvl8pPr marL="3200400" algn="l" defTabSz="914400" rtl="0" eaLnBrk="1" latinLnBrk="0" hangingPunct="1">
+              <a:defRPr kumimoji="1" sz="1800" kern="1200">
+                <a:solidFill>
+                  <a:schemeClr val="lt1"/>
+                </a:solidFill>
+                <a:latin typeface="+mn-lt"/>
+                <a:ea typeface="+mn-ea"/>
+                <a:cs typeface="+mn-cs"/>
+              </a:defRPr>
+            </a:lvl8pPr>
+            <a:lvl9pPr marL="3657600" algn="l" defTabSz="914400" rtl="0" eaLnBrk="1" latinLnBrk="0" hangingPunct="1">
+              <a:defRPr kumimoji="1" sz="1800" kern="1200">
+                <a:solidFill>
+                  <a:schemeClr val="lt1"/>
+                </a:solidFill>
+                <a:latin typeface="+mn-lt"/>
+                <a:ea typeface="+mn-ea"/>
+                <a:cs typeface="+mn-cs"/>
+              </a:defRPr>
+            </a:lvl9pPr>
+          </a:lstStyle>
+          <a:p>
+            <a:r>
+              <a:rPr kumimoji="1" lang="ja-JP" altLang="en-US" b="1" dirty="0">
+                <a:solidFill>
+                  <a:schemeClr val="tx1"/>
+                </a:solidFill>
+              </a:rPr>
+              <a:t>課題①</a:t>
+            </a:r>
+          </a:p>
+        </p:txBody>
+      </p:sp>
+      <p:sp>
+        <p:nvSpPr>
+          <p:cNvPr id="19" name="正方形/長方形 18">
+            <a:extLst>
+              <a:ext uri="{FF2B5EF4-FFF2-40B4-BE49-F238E27FC236}">
+                <a16:creationId xmlns:a16="http://schemas.microsoft.com/office/drawing/2014/main" id="{7AB07655-88F8-4026-B433-91F9105203F0}"/>
+              </a:ext>
+            </a:extLst>
+          </p:cNvPr>
+          <p:cNvSpPr/>
+          <p:nvPr/>
+        </p:nvSpPr>
+        <p:spPr>
+          <a:xfrm>
+            <a:off x="6781410" y="4114799"/>
+            <a:ext cx="4795702" cy="2525086"/>
+          </a:xfrm>
+          <a:prstGeom prst="rect">
+            <a:avLst/>
+          </a:prstGeom>
+          <a:noFill/>
+          <a:ln w="38100">
+            <a:solidFill>
+              <a:schemeClr val="tx1"/>
+            </a:solidFill>
+          </a:ln>
+          <a:effectLst/>
+        </p:spPr>
+        <p:style>
+          <a:lnRef idx="1">
+            <a:schemeClr val="accent1"/>
+          </a:lnRef>
+          <a:fillRef idx="3">
+            <a:schemeClr val="accent1"/>
+          </a:fillRef>
+          <a:effectRef idx="2">
+            <a:schemeClr val="accent1"/>
+          </a:effectRef>
+          <a:fontRef idx="minor">
+            <a:schemeClr val="lt1"/>
+          </a:fontRef>
+        </p:style>
+        <p:txBody>
+          <a:bodyPr rot="0" spcFirstLastPara="0" vert="horz" wrap="square" lIns="36000" tIns="36000" rIns="36000" bIns="36000" numCol="1" spcCol="0" rtlCol="0" fromWordArt="0" anchor="t" anchorCtr="0" forceAA="0" compatLnSpc="1">
+            <a:prstTxWarp prst="textNoShape">
+              <a:avLst/>
+            </a:prstTxWarp>
+            <a:noAutofit/>
+          </a:bodyPr>
+          <a:lstStyle>
+            <a:defPPr>
+              <a:defRPr lang="ja-JP"/>
+            </a:defPPr>
+            <a:lvl1pPr marL="0" algn="l" defTabSz="914400" rtl="0" eaLnBrk="1" latinLnBrk="0" hangingPunct="1">
+              <a:defRPr kumimoji="1" sz="1800" kern="1200">
+                <a:solidFill>
+                  <a:schemeClr val="lt1"/>
+                </a:solidFill>
+                <a:latin typeface="+mn-lt"/>
+                <a:ea typeface="+mn-ea"/>
+                <a:cs typeface="+mn-cs"/>
+              </a:defRPr>
+            </a:lvl1pPr>
+            <a:lvl2pPr marL="457200" algn="l" defTabSz="914400" rtl="0" eaLnBrk="1" latinLnBrk="0" hangingPunct="1">
+              <a:defRPr kumimoji="1" sz="1800" kern="1200">
+                <a:solidFill>
+                  <a:schemeClr val="lt1"/>
+                </a:solidFill>
+                <a:latin typeface="+mn-lt"/>
+                <a:ea typeface="+mn-ea"/>
+                <a:cs typeface="+mn-cs"/>
+              </a:defRPr>
+            </a:lvl2pPr>
+            <a:lvl3pPr marL="914400" algn="l" defTabSz="914400" rtl="0" eaLnBrk="1" latinLnBrk="0" hangingPunct="1">
+              <a:defRPr kumimoji="1" sz="1800" kern="1200">
+                <a:solidFill>
+                  <a:schemeClr val="lt1"/>
+                </a:solidFill>
+                <a:latin typeface="+mn-lt"/>
+                <a:ea typeface="+mn-ea"/>
+                <a:cs typeface="+mn-cs"/>
+              </a:defRPr>
+            </a:lvl3pPr>
+            <a:lvl4pPr marL="1371600" algn="l" defTabSz="914400" rtl="0" eaLnBrk="1" latinLnBrk="0" hangingPunct="1">
+              <a:defRPr kumimoji="1" sz="1800" kern="1200">
+                <a:solidFill>
+                  <a:schemeClr val="lt1"/>
+                </a:solidFill>
+                <a:latin typeface="+mn-lt"/>
+                <a:ea typeface="+mn-ea"/>
+                <a:cs typeface="+mn-cs"/>
+              </a:defRPr>
+            </a:lvl4pPr>
+            <a:lvl5pPr marL="1828800" algn="l" defTabSz="914400" rtl="0" eaLnBrk="1" latinLnBrk="0" hangingPunct="1">
+              <a:defRPr kumimoji="1" sz="1800" kern="1200">
+                <a:solidFill>
+                  <a:schemeClr val="lt1"/>
+                </a:solidFill>
+                <a:latin typeface="+mn-lt"/>
+                <a:ea typeface="+mn-ea"/>
+                <a:cs typeface="+mn-cs"/>
+              </a:defRPr>
+            </a:lvl5pPr>
+            <a:lvl6pPr marL="2286000" algn="l" defTabSz="914400" rtl="0" eaLnBrk="1" latinLnBrk="0" hangingPunct="1">
+              <a:defRPr kumimoji="1" sz="1800" kern="1200">
+                <a:solidFill>
+                  <a:schemeClr val="lt1"/>
+                </a:solidFill>
+                <a:latin typeface="+mn-lt"/>
+                <a:ea typeface="+mn-ea"/>
+                <a:cs typeface="+mn-cs"/>
+              </a:defRPr>
+            </a:lvl6pPr>
+            <a:lvl7pPr marL="2743200" algn="l" defTabSz="914400" rtl="0" eaLnBrk="1" latinLnBrk="0" hangingPunct="1">
+              <a:defRPr kumimoji="1" sz="1800" kern="1200">
+                <a:solidFill>
+                  <a:schemeClr val="lt1"/>
+                </a:solidFill>
+                <a:latin typeface="+mn-lt"/>
+                <a:ea typeface="+mn-ea"/>
+                <a:cs typeface="+mn-cs"/>
+              </a:defRPr>
+            </a:lvl7pPr>
+            <a:lvl8pPr marL="3200400" algn="l" defTabSz="914400" rtl="0" eaLnBrk="1" latinLnBrk="0" hangingPunct="1">
+              <a:defRPr kumimoji="1" sz="1800" kern="1200">
+                <a:solidFill>
+                  <a:schemeClr val="lt1"/>
+                </a:solidFill>
+                <a:latin typeface="+mn-lt"/>
+                <a:ea typeface="+mn-ea"/>
+                <a:cs typeface="+mn-cs"/>
+              </a:defRPr>
+            </a:lvl8pPr>
+            <a:lvl9pPr marL="3657600" algn="l" defTabSz="914400" rtl="0" eaLnBrk="1" latinLnBrk="0" hangingPunct="1">
+              <a:defRPr kumimoji="1" sz="1800" kern="1200">
+                <a:solidFill>
+                  <a:schemeClr val="lt1"/>
+                </a:solidFill>
+                <a:latin typeface="+mn-lt"/>
+                <a:ea typeface="+mn-ea"/>
+                <a:cs typeface="+mn-cs"/>
+              </a:defRPr>
+            </a:lvl9pPr>
+          </a:lstStyle>
+          <a:p>
+            <a:r>
+              <a:rPr kumimoji="1" lang="ja-JP" altLang="en-US" b="1" dirty="0">
+                <a:solidFill>
+                  <a:schemeClr val="tx1"/>
+                </a:solidFill>
+              </a:rPr>
+              <a:t>課題</a:t>
+            </a:r>
+            <a:r>
+              <a:rPr lang="ja-JP" altLang="en-US" b="1" dirty="0">
+                <a:solidFill>
+                  <a:schemeClr val="tx1"/>
+                </a:solidFill>
+              </a:rPr>
+              <a:t>②</a:t>
+            </a:r>
+            <a:endParaRPr kumimoji="1" lang="ja-JP" altLang="en-US" b="1" dirty="0">
+              <a:solidFill>
+                <a:schemeClr val="tx1"/>
+              </a:solidFill>
+            </a:endParaRPr>
+          </a:p>
+        </p:txBody>
+      </p:sp>
+      <p:pic>
+        <p:nvPicPr>
+          <p:cNvPr id="20" name="グラフィックス 18" descr="拡大鏡 単色塗りつぶし">
+            <a:extLst>
+              <a:ext uri="{FF2B5EF4-FFF2-40B4-BE49-F238E27FC236}">
+                <a16:creationId xmlns:a16="http://schemas.microsoft.com/office/drawing/2014/main" id="{382C8686-E55F-1B52-FD04-5E0EFF6CE13C}"/>
+              </a:ext>
+            </a:extLst>
+          </p:cNvPr>
+          <p:cNvPicPr>
+            <a:picLocks noChangeAspect="1"/>
+          </p:cNvPicPr>
+          <p:nvPr/>
+        </p:nvPicPr>
+        <p:blipFill>
+          <a:blip r:embed="rId4">
+            <a:extLst>
+              <a:ext uri="{96DAC541-7B7A-43D3-8B79-37D633B846F1}">
+                <asvg:svgBlip xmlns:asvg="http://schemas.microsoft.com/office/drawing/2016/SVG/main" r:embed="rId5"/>
+              </a:ext>
+            </a:extLst>
+          </a:blip>
+          <a:stretch>
+            <a:fillRect/>
+          </a:stretch>
+        </p:blipFill>
+        <p:spPr>
+          <a:xfrm>
+            <a:off x="10520279" y="4256234"/>
+            <a:ext cx="914400" cy="914400"/>
+          </a:xfrm>
+          <a:prstGeom prst="rect">
+            <a:avLst/>
+          </a:prstGeom>
+        </p:spPr>
+      </p:pic>
+      <p:sp>
+        <p:nvSpPr>
+          <p:cNvPr id="22" name="フローチャート: 結合子 21">
+            <a:extLst>
+              <a:ext uri="{FF2B5EF4-FFF2-40B4-BE49-F238E27FC236}">
+                <a16:creationId xmlns:a16="http://schemas.microsoft.com/office/drawing/2014/main" id="{39945E82-EB28-A483-6CB0-0D38E9357B7C}"/>
+              </a:ext>
+            </a:extLst>
+          </p:cNvPr>
+          <p:cNvSpPr/>
+          <p:nvPr/>
+        </p:nvSpPr>
+        <p:spPr>
+          <a:xfrm>
+            <a:off x="8595085" y="4477342"/>
+            <a:ext cx="1800000" cy="1800000"/>
+          </a:xfrm>
+          <a:prstGeom prst="flowChartConnector">
+            <a:avLst/>
+          </a:prstGeom>
+          <a:noFill/>
+          <a:ln w="19050">
+            <a:solidFill>
+              <a:schemeClr val="accent3"/>
+            </a:solidFill>
+          </a:ln>
+          <a:effectLst/>
+        </p:spPr>
+        <p:style>
+          <a:lnRef idx="1">
+            <a:schemeClr val="accent1"/>
+          </a:lnRef>
+          <a:fillRef idx="3">
+            <a:schemeClr val="accent1"/>
+          </a:fillRef>
+          <a:effectRef idx="2">
+            <a:schemeClr val="accent1"/>
+          </a:effectRef>
+          <a:fontRef idx="minor">
+            <a:schemeClr val="lt1"/>
+          </a:fontRef>
+        </p:style>
+        <p:txBody>
+          <a:bodyPr rot="0" spcFirstLastPara="0" vert="horz" wrap="square" lIns="36000" tIns="36000" rIns="36000" bIns="36000" numCol="1" spcCol="0" rtlCol="0" fromWordArt="0" anchor="ctr" anchorCtr="0" forceAA="0" compatLnSpc="1">
+            <a:prstTxWarp prst="textNoShape">
+              <a:avLst/>
+            </a:prstTxWarp>
+            <a:noAutofit/>
+          </a:bodyPr>
+          <a:lstStyle>
+            <a:defPPr>
+              <a:defRPr lang="ja-JP"/>
+            </a:defPPr>
+            <a:lvl1pPr marL="0" algn="l" defTabSz="914400" rtl="0" eaLnBrk="1" latinLnBrk="0" hangingPunct="1">
+              <a:defRPr kumimoji="1" sz="1800" kern="1200">
+                <a:solidFill>
+                  <a:schemeClr val="lt1"/>
+                </a:solidFill>
+                <a:latin typeface="+mn-lt"/>
+                <a:ea typeface="+mn-ea"/>
+                <a:cs typeface="+mn-cs"/>
+              </a:defRPr>
+            </a:lvl1pPr>
+            <a:lvl2pPr marL="457200" algn="l" defTabSz="914400" rtl="0" eaLnBrk="1" latinLnBrk="0" hangingPunct="1">
+              <a:defRPr kumimoji="1" sz="1800" kern="1200">
+                <a:solidFill>
+                  <a:schemeClr val="lt1"/>
+                </a:solidFill>
+                <a:latin typeface="+mn-lt"/>
+                <a:ea typeface="+mn-ea"/>
+                <a:cs typeface="+mn-cs"/>
+              </a:defRPr>
+            </a:lvl2pPr>
+            <a:lvl3pPr marL="914400" algn="l" defTabSz="914400" rtl="0" eaLnBrk="1" latinLnBrk="0" hangingPunct="1">
+              <a:defRPr kumimoji="1" sz="1800" kern="1200">
+                <a:solidFill>
+                  <a:schemeClr val="lt1"/>
+                </a:solidFill>
+                <a:latin typeface="+mn-lt"/>
+                <a:ea typeface="+mn-ea"/>
+                <a:cs typeface="+mn-cs"/>
+              </a:defRPr>
+            </a:lvl3pPr>
+            <a:lvl4pPr marL="1371600" algn="l" defTabSz="914400" rtl="0" eaLnBrk="1" latinLnBrk="0" hangingPunct="1">
+              <a:defRPr kumimoji="1" sz="1800" kern="1200">
+                <a:solidFill>
+                  <a:schemeClr val="lt1"/>
+                </a:solidFill>
+                <a:latin typeface="+mn-lt"/>
+                <a:ea typeface="+mn-ea"/>
+                <a:cs typeface="+mn-cs"/>
+              </a:defRPr>
+            </a:lvl4pPr>
+            <a:lvl5pPr marL="1828800" algn="l" defTabSz="914400" rtl="0" eaLnBrk="1" latinLnBrk="0" hangingPunct="1">
+              <a:defRPr kumimoji="1" sz="1800" kern="1200">
+                <a:solidFill>
+                  <a:schemeClr val="lt1"/>
+                </a:solidFill>
+                <a:latin typeface="+mn-lt"/>
+                <a:ea typeface="+mn-ea"/>
+                <a:cs typeface="+mn-cs"/>
+              </a:defRPr>
+            </a:lvl5pPr>
+            <a:lvl6pPr marL="2286000" algn="l" defTabSz="914400" rtl="0" eaLnBrk="1" latinLnBrk="0" hangingPunct="1">
+              <a:defRPr kumimoji="1" sz="1800" kern="1200">
+                <a:solidFill>
+                  <a:schemeClr val="lt1"/>
+                </a:solidFill>
+                <a:latin typeface="+mn-lt"/>
+                <a:ea typeface="+mn-ea"/>
+                <a:cs typeface="+mn-cs"/>
+              </a:defRPr>
+            </a:lvl6pPr>
+            <a:lvl7pPr marL="2743200" algn="l" defTabSz="914400" rtl="0" eaLnBrk="1" latinLnBrk="0" hangingPunct="1">
+              <a:defRPr kumimoji="1" sz="1800" kern="1200">
+                <a:solidFill>
+                  <a:schemeClr val="lt1"/>
+                </a:solidFill>
+                <a:latin typeface="+mn-lt"/>
+                <a:ea typeface="+mn-ea"/>
+                <a:cs typeface="+mn-cs"/>
+              </a:defRPr>
+            </a:lvl7pPr>
+            <a:lvl8pPr marL="3200400" algn="l" defTabSz="914400" rtl="0" eaLnBrk="1" latinLnBrk="0" hangingPunct="1">
+              <a:defRPr kumimoji="1" sz="1800" kern="1200">
+                <a:solidFill>
+                  <a:schemeClr val="lt1"/>
+                </a:solidFill>
+                <a:latin typeface="+mn-lt"/>
+                <a:ea typeface="+mn-ea"/>
+                <a:cs typeface="+mn-cs"/>
+              </a:defRPr>
+            </a:lvl8pPr>
+            <a:lvl9pPr marL="3657600" algn="l" defTabSz="914400" rtl="0" eaLnBrk="1" latinLnBrk="0" hangingPunct="1">
+              <a:defRPr kumimoji="1" sz="1800" kern="1200">
+                <a:solidFill>
+                  <a:schemeClr val="lt1"/>
+                </a:solidFill>
+                <a:latin typeface="+mn-lt"/>
+                <a:ea typeface="+mn-ea"/>
+                <a:cs typeface="+mn-cs"/>
+              </a:defRPr>
+            </a:lvl9pPr>
+          </a:lstStyle>
+          <a:p>
+            <a:pPr algn="ctr"/>
+            <a:endParaRPr kumimoji="1" lang="ja-JP" altLang="en-US" sz="1400" err="1">
+              <a:solidFill>
+                <a:schemeClr val="tx1"/>
+              </a:solidFill>
+            </a:endParaRPr>
+          </a:p>
+        </p:txBody>
+      </p:sp>
+      <p:pic>
+        <p:nvPicPr>
+          <p:cNvPr id="23" name="グラフィックス 23" descr="クリップボード: 混合 単色塗りつぶし">
+            <a:extLst>
+              <a:ext uri="{FF2B5EF4-FFF2-40B4-BE49-F238E27FC236}">
+                <a16:creationId xmlns:a16="http://schemas.microsoft.com/office/drawing/2014/main" id="{D8657E05-43F4-54E6-20EB-989CC3C24F02}"/>
+              </a:ext>
+            </a:extLst>
+          </p:cNvPr>
+          <p:cNvPicPr>
+            <a:picLocks noChangeAspect="1"/>
+          </p:cNvPicPr>
+          <p:nvPr/>
+        </p:nvPicPr>
+        <p:blipFill>
+          <a:blip r:embed="rId6">
+            <a:extLst>
+              <a:ext uri="{96DAC541-7B7A-43D3-8B79-37D633B846F1}">
+                <asvg:svgBlip xmlns:asvg="http://schemas.microsoft.com/office/drawing/2016/SVG/main" r:embed="rId7"/>
+              </a:ext>
+            </a:extLst>
+          </a:blip>
+          <a:stretch>
+            <a:fillRect/>
+          </a:stretch>
+        </p:blipFill>
+        <p:spPr>
+          <a:xfrm>
+            <a:off x="7117756" y="4690233"/>
+            <a:ext cx="1374218" cy="1374218"/>
+          </a:xfrm>
+          <a:prstGeom prst="rect">
+            <a:avLst/>
+          </a:prstGeom>
+        </p:spPr>
+      </p:pic>
+      <p:cxnSp>
+        <p:nvCxnSpPr>
+          <p:cNvPr id="24" name="直線コネクタ 23">
+            <a:extLst>
+              <a:ext uri="{FF2B5EF4-FFF2-40B4-BE49-F238E27FC236}">
+                <a16:creationId xmlns:a16="http://schemas.microsoft.com/office/drawing/2014/main" id="{5DC46E5B-CFA9-A41B-91A1-F732C30D3B31}"/>
+              </a:ext>
+            </a:extLst>
+          </p:cNvPr>
+          <p:cNvCxnSpPr>
+            <a:cxnSpLocks/>
+            <a:stCxn id="22" idx="0"/>
+          </p:cNvCxnSpPr>
+          <p:nvPr/>
+        </p:nvCxnSpPr>
+        <p:spPr>
+          <a:xfrm flipV="1">
+            <a:off x="9495085" y="4427151"/>
+            <a:ext cx="1191197" cy="50191"/>
+          </a:xfrm>
+          <a:prstGeom prst="line">
+            <a:avLst/>
+          </a:prstGeom>
+          <a:ln w="19050">
+            <a:solidFill>
+              <a:schemeClr val="accent3"/>
+            </a:solidFill>
+          </a:ln>
+          <a:effectLst/>
+        </p:spPr>
+        <p:style>
+          <a:lnRef idx="2">
+            <a:schemeClr val="accent1"/>
+          </a:lnRef>
+          <a:fillRef idx="0">
+            <a:schemeClr val="accent1"/>
+          </a:fillRef>
+          <a:effectRef idx="1">
+            <a:schemeClr val="accent1"/>
+          </a:effectRef>
+          <a:fontRef idx="minor">
+            <a:schemeClr val="tx1"/>
+          </a:fontRef>
+        </p:style>
+      </p:cxnSp>
+      <p:cxnSp>
+        <p:nvCxnSpPr>
+          <p:cNvPr id="25" name="直線コネクタ 24">
+            <a:extLst>
+              <a:ext uri="{FF2B5EF4-FFF2-40B4-BE49-F238E27FC236}">
+                <a16:creationId xmlns:a16="http://schemas.microsoft.com/office/drawing/2014/main" id="{E49AA7CD-8C90-471C-6F68-5D0CF44C7743}"/>
+              </a:ext>
+            </a:extLst>
+          </p:cNvPr>
+          <p:cNvCxnSpPr>
+            <a:cxnSpLocks/>
+          </p:cNvCxnSpPr>
+          <p:nvPr/>
+        </p:nvCxnSpPr>
+        <p:spPr>
+          <a:xfrm flipV="1">
+            <a:off x="10229082" y="4956450"/>
+            <a:ext cx="715913" cy="965038"/>
+          </a:xfrm>
+          <a:prstGeom prst="line">
+            <a:avLst/>
+          </a:prstGeom>
+          <a:ln w="19050">
+            <a:solidFill>
+              <a:schemeClr val="accent3"/>
+            </a:solidFill>
+          </a:ln>
+          <a:effectLst/>
+        </p:spPr>
+        <p:style>
+          <a:lnRef idx="2">
+            <a:schemeClr val="accent1"/>
+          </a:lnRef>
+          <a:fillRef idx="0">
+            <a:schemeClr val="accent1"/>
+          </a:fillRef>
+          <a:effectRef idx="1">
+            <a:schemeClr val="accent1"/>
+          </a:effectRef>
+          <a:fontRef idx="minor">
+            <a:schemeClr val="tx1"/>
+          </a:fontRef>
+        </p:style>
+      </p:cxnSp>
+      <p:sp>
+        <p:nvSpPr>
+          <p:cNvPr id="34" name="矢印: 下 33">
+            <a:extLst>
+              <a:ext uri="{FF2B5EF4-FFF2-40B4-BE49-F238E27FC236}">
+                <a16:creationId xmlns:a16="http://schemas.microsoft.com/office/drawing/2014/main" id="{83C7652C-8730-6792-1408-7B30375B9687}"/>
+              </a:ext>
+            </a:extLst>
+          </p:cNvPr>
+          <p:cNvSpPr/>
+          <p:nvPr/>
+        </p:nvSpPr>
+        <p:spPr>
+          <a:xfrm rot="16200000">
+            <a:off x="6220213" y="5287343"/>
+            <a:ext cx="360000" cy="180000"/>
+          </a:xfrm>
+          <a:prstGeom prst="downArrow">
+            <a:avLst/>
+          </a:prstGeom>
+          <a:solidFill>
+            <a:schemeClr val="tx1"/>
+          </a:solidFill>
+          <a:ln w="3175" cap="flat" cmpd="sng" algn="ctr">
+            <a:solidFill>
+              <a:srgbClr val="000000"/>
+            </a:solidFill>
+            <a:prstDash val="solid"/>
+          </a:ln>
+          <a:effectLst/>
+        </p:spPr>
+        <p:txBody>
+          <a:bodyPr rot="0" spcFirstLastPara="0" vertOverflow="overflow" horzOverflow="overflow" vert="horz" wrap="square" lIns="36000" tIns="36000" rIns="36000" bIns="36000" numCol="1" spcCol="0" rtlCol="0" fromWordArt="0" anchor="ctr" anchorCtr="0" forceAA="0" compatLnSpc="1">
+            <a:prstTxWarp prst="textNoShape">
+              <a:avLst/>
+            </a:prstTxWarp>
+            <a:noAutofit/>
+          </a:bodyPr>
+          <a:lstStyle/>
+          <a:p>
+            <a:pPr marL="0" marR="0" lvl="0" indent="0" algn="ctr" defTabSz="914400" eaLnBrk="1" fontAlgn="auto" latinLnBrk="0" hangingPunct="1">
+              <a:lnSpc>
+                <a:spcPct val="100000"/>
+              </a:lnSpc>
+              <a:spcBef>
+                <a:spcPts val="0"/>
+              </a:spcBef>
+              <a:spcAft>
+                <a:spcPts val="0"/>
+              </a:spcAft>
+              <a:buClrTx/>
+              <a:buSzTx/>
+              <a:buFontTx/>
+              <a:buNone/>
+              <a:tabLst/>
+              <a:defRPr/>
+            </a:pPr>
+            <a:endParaRPr kumimoji="0" lang="ja-JP" altLang="en-US" sz="1400" b="0" i="0" u="none" strike="noStrike" kern="0" cap="none" spc="0" normalizeH="0" baseline="0" noProof="0" err="1">
+              <a:ln>
+                <a:noFill/>
+              </a:ln>
+              <a:solidFill>
+                <a:srgbClr val="000000"/>
+              </a:solidFill>
+              <a:effectLst/>
+              <a:uLnTx/>
+              <a:uFillTx/>
+              <a:latin typeface="Arial"/>
+              <a:ea typeface="Meiryo UI"/>
+              <a:cs typeface="+mn-cs"/>
+            </a:endParaRPr>
+          </a:p>
+        </p:txBody>
+      </p:sp>
+      <p:pic>
+        <p:nvPicPr>
+          <p:cNvPr id="50" name="図 49">
+            <a:extLst>
+              <a:ext uri="{FF2B5EF4-FFF2-40B4-BE49-F238E27FC236}">
+                <a16:creationId xmlns:a16="http://schemas.microsoft.com/office/drawing/2014/main" id="{23121F06-DDC4-9336-E9FB-C7AAAE9B4529}"/>
+              </a:ext>
+            </a:extLst>
+          </p:cNvPr>
+          <p:cNvPicPr>
+            <a:picLocks noChangeAspect="1"/>
+          </p:cNvPicPr>
+          <p:nvPr/>
+        </p:nvPicPr>
+        <p:blipFill>
+          <a:blip r:embed="rId8">
+            <a:extLst>
+              <a:ext uri="{28A0092B-C50C-407E-A947-70E740481C1C}">
+                <a14:useLocalDpi xmlns:a14="http://schemas.microsoft.com/office/drawing/2010/main" val="0"/>
+              </a:ext>
+            </a:extLst>
+          </a:blip>
+          <a:stretch>
+            <a:fillRect/>
+          </a:stretch>
+        </p:blipFill>
+        <p:spPr>
+          <a:xfrm>
+            <a:off x="4417233" y="4529486"/>
+            <a:ext cx="523364" cy="523364"/>
+          </a:xfrm>
+          <a:prstGeom prst="rect">
+            <a:avLst/>
+          </a:prstGeom>
+        </p:spPr>
+      </p:pic>
+      <p:sp>
+        <p:nvSpPr>
+          <p:cNvPr id="51" name="テキスト ボックス 50">
+            <a:extLst>
+              <a:ext uri="{FF2B5EF4-FFF2-40B4-BE49-F238E27FC236}">
+                <a16:creationId xmlns:a16="http://schemas.microsoft.com/office/drawing/2014/main" id="{95D4BC6D-C730-9ECD-0C06-666951057564}"/>
+              </a:ext>
+            </a:extLst>
+          </p:cNvPr>
+          <p:cNvSpPr txBox="1"/>
+          <p:nvPr/>
+        </p:nvSpPr>
+        <p:spPr>
+          <a:xfrm>
+            <a:off x="4430289" y="5109519"/>
+            <a:ext cx="497252" cy="369332"/>
+          </a:xfrm>
+          <a:prstGeom prst="rect">
+            <a:avLst/>
+          </a:prstGeom>
+          <a:noFill/>
+        </p:spPr>
+        <p:txBody>
+          <a:bodyPr wrap="none" rtlCol="0">
+            <a:spAutoFit/>
+          </a:bodyPr>
+          <a:lstStyle/>
+          <a:p>
+            <a:r>
+              <a:rPr kumimoji="1" lang="en-US" altLang="ja-JP" b="1" dirty="0"/>
+              <a:t>H2</a:t>
+            </a:r>
+            <a:endParaRPr kumimoji="1" lang="ja-JP" altLang="en-US" b="1" dirty="0"/>
+          </a:p>
+        </p:txBody>
+      </p:sp>
+      <p:pic>
+        <p:nvPicPr>
+          <p:cNvPr id="1028" name="Picture 4" descr="Spring プロジェクト一覧 - リファレンスドキュメント">
+            <a:extLst>
+              <a:ext uri="{FF2B5EF4-FFF2-40B4-BE49-F238E27FC236}">
+                <a16:creationId xmlns:a16="http://schemas.microsoft.com/office/drawing/2014/main" id="{7347444A-97CA-BE25-FCC7-E175DC3ECF01}"/>
+              </a:ext>
+            </a:extLst>
+          </p:cNvPr>
+          <p:cNvPicPr>
+            <a:picLocks noChangeAspect="1" noChangeArrowheads="1"/>
+          </p:cNvPicPr>
+          <p:nvPr/>
+        </p:nvPicPr>
+        <p:blipFill>
+          <a:blip r:embed="rId9">
+            <a:extLst>
+              <a:ext uri="{28A0092B-C50C-407E-A947-70E740481C1C}">
+                <a14:useLocalDpi xmlns:a14="http://schemas.microsoft.com/office/drawing/2010/main" val="0"/>
+              </a:ext>
+            </a:extLst>
+          </a:blip>
+          <a:srcRect/>
+          <a:stretch>
+            <a:fillRect/>
+          </a:stretch>
+        </p:blipFill>
+        <p:spPr bwMode="auto">
+          <a:xfrm>
+            <a:off x="3344476" y="4554816"/>
+            <a:ext cx="562384" cy="492583"/>
+          </a:xfrm>
+          <a:prstGeom prst="rect">
+            <a:avLst/>
+          </a:prstGeom>
+          <a:noFill/>
+          <a:extLst>
+            <a:ext uri="{909E8E84-426E-40DD-AFC4-6F175D3DCCD1}">
+              <a14:hiddenFill xmlns:a14="http://schemas.microsoft.com/office/drawing/2010/main">
+                <a:solidFill>
+                  <a:srgbClr val="FFFFFF"/>
+                </a:solidFill>
+              </a14:hiddenFill>
+            </a:ext>
+          </a:extLst>
+        </p:spPr>
+      </p:pic>
+      <p:pic>
+        <p:nvPicPr>
+          <p:cNvPr id="1030" name="Picture 6" descr="Java アイコン、ロゴ、シンボル – 無料ダウンロード PNG、SVG">
+            <a:extLst>
+              <a:ext uri="{FF2B5EF4-FFF2-40B4-BE49-F238E27FC236}">
+                <a16:creationId xmlns:a16="http://schemas.microsoft.com/office/drawing/2014/main" id="{1F1A5D85-4453-9F62-8DFF-6EFF2049D274}"/>
+              </a:ext>
+            </a:extLst>
+          </p:cNvPr>
+          <p:cNvPicPr>
+            <a:picLocks noChangeAspect="1" noChangeArrowheads="1"/>
+          </p:cNvPicPr>
+          <p:nvPr/>
+        </p:nvPicPr>
+        <p:blipFill>
+          <a:blip r:embed="rId10">
+            <a:extLst>
+              <a:ext uri="{28A0092B-C50C-407E-A947-70E740481C1C}">
+                <a14:useLocalDpi xmlns:a14="http://schemas.microsoft.com/office/drawing/2010/main" val="0"/>
+              </a:ext>
+            </a:extLst>
+          </a:blip>
+          <a:srcRect/>
+          <a:stretch>
+            <a:fillRect/>
+          </a:stretch>
+        </p:blipFill>
+        <p:spPr bwMode="auto">
+          <a:xfrm>
+            <a:off x="2198753" y="4485168"/>
+            <a:ext cx="612000" cy="612000"/>
+          </a:xfrm>
+          <a:prstGeom prst="rect">
+            <a:avLst/>
+          </a:prstGeom>
+          <a:noFill/>
+          <a:extLst>
+            <a:ext uri="{909E8E84-426E-40DD-AFC4-6F175D3DCCD1}">
+              <a14:hiddenFill xmlns:a14="http://schemas.microsoft.com/office/drawing/2010/main">
+                <a:solidFill>
+                  <a:srgbClr val="FFFFFF"/>
+                </a:solidFill>
+              </a14:hiddenFill>
+            </a:ext>
+          </a:extLst>
+        </p:spPr>
+      </p:pic>
+      <p:sp>
+        <p:nvSpPr>
+          <p:cNvPr id="53" name="テキスト ボックス 52">
+            <a:extLst>
+              <a:ext uri="{FF2B5EF4-FFF2-40B4-BE49-F238E27FC236}">
+                <a16:creationId xmlns:a16="http://schemas.microsoft.com/office/drawing/2014/main" id="{6C03C138-170D-1597-7660-E30141051223}"/>
+              </a:ext>
+            </a:extLst>
+          </p:cNvPr>
+          <p:cNvSpPr txBox="1"/>
+          <p:nvPr/>
+        </p:nvSpPr>
+        <p:spPr>
+          <a:xfrm>
+            <a:off x="2167161" y="5109519"/>
+            <a:ext cx="675185" cy="369332"/>
+          </a:xfrm>
+          <a:prstGeom prst="rect">
+            <a:avLst/>
+          </a:prstGeom>
+          <a:noFill/>
+        </p:spPr>
+        <p:txBody>
+          <a:bodyPr wrap="none" rtlCol="0">
+            <a:spAutoFit/>
+          </a:bodyPr>
+          <a:lstStyle/>
+          <a:p>
+            <a:r>
+              <a:rPr kumimoji="1" lang="en-US" altLang="ja-JP" b="1" dirty="0"/>
+              <a:t>Java</a:t>
+            </a:r>
+            <a:endParaRPr kumimoji="1" lang="ja-JP" altLang="en-US" b="1" dirty="0"/>
+          </a:p>
+        </p:txBody>
+      </p:sp>
+      <p:sp>
+        <p:nvSpPr>
+          <p:cNvPr id="55" name="テキスト ボックス 54">
+            <a:extLst>
+              <a:ext uri="{FF2B5EF4-FFF2-40B4-BE49-F238E27FC236}">
+                <a16:creationId xmlns:a16="http://schemas.microsoft.com/office/drawing/2014/main" id="{2F5F44CC-DAE5-07AC-6607-F3CA9BAFB7CE}"/>
+              </a:ext>
+            </a:extLst>
+          </p:cNvPr>
+          <p:cNvSpPr txBox="1"/>
+          <p:nvPr/>
+        </p:nvSpPr>
+        <p:spPr>
+          <a:xfrm>
+            <a:off x="3170255" y="5076118"/>
+            <a:ext cx="910827" cy="369332"/>
+          </a:xfrm>
+          <a:prstGeom prst="rect">
+            <a:avLst/>
+          </a:prstGeom>
+          <a:noFill/>
+        </p:spPr>
+        <p:txBody>
+          <a:bodyPr wrap="none" rtlCol="0">
+            <a:spAutoFit/>
+          </a:bodyPr>
+          <a:lstStyle/>
+          <a:p>
+            <a:r>
+              <a:rPr lang="en-US" altLang="ja-JP" b="1" dirty="0"/>
+              <a:t>Spring</a:t>
+            </a:r>
+            <a:endParaRPr kumimoji="1" lang="ja-JP" altLang="en-US" b="1" dirty="0"/>
+          </a:p>
+        </p:txBody>
+      </p:sp>
+      <p:sp>
+        <p:nvSpPr>
+          <p:cNvPr id="57" name="吹き出し: 四角形 56">
+            <a:extLst>
+              <a:ext uri="{FF2B5EF4-FFF2-40B4-BE49-F238E27FC236}">
+                <a16:creationId xmlns:a16="http://schemas.microsoft.com/office/drawing/2014/main" id="{828805BD-8C23-AA91-2832-4223D636C516}"/>
+              </a:ext>
+            </a:extLst>
+          </p:cNvPr>
+          <p:cNvSpPr/>
+          <p:nvPr/>
+        </p:nvSpPr>
+        <p:spPr>
+          <a:xfrm>
+            <a:off x="1831903" y="4374415"/>
+            <a:ext cx="3508513" cy="1104436"/>
+          </a:xfrm>
+          <a:prstGeom prst="wedgeRectCallout">
+            <a:avLst>
+              <a:gd name="adj1" fmla="val -43534"/>
+              <a:gd name="adj2" fmla="val 79599"/>
+            </a:avLst>
+          </a:prstGeom>
+          <a:noFill/>
+          <a:ln w="28575">
+            <a:solidFill>
+              <a:schemeClr val="tx1"/>
+            </a:solidFill>
+          </a:ln>
+        </p:spPr>
+        <p:style>
+          <a:lnRef idx="2">
+            <a:schemeClr val="accent1">
+              <a:shade val="15000"/>
+            </a:schemeClr>
+          </a:lnRef>
+          <a:fillRef idx="1">
+            <a:schemeClr val="accent1"/>
+          </a:fillRef>
+          <a:effectRef idx="0">
+            <a:schemeClr val="accent1"/>
+          </a:effectRef>
+          <a:fontRef idx="minor">
+            <a:schemeClr val="lt1"/>
+          </a:fontRef>
+        </p:style>
+        <p:txBody>
+          <a:bodyPr rtlCol="0" anchor="ctr"/>
+          <a:lstStyle/>
+          <a:p>
+            <a:pPr algn="ctr"/>
+            <a:endParaRPr kumimoji="1" lang="ja-JP" altLang="en-US" dirty="0"/>
+          </a:p>
+        </p:txBody>
+      </p:sp>
+    </p:spTree>
+    <p:extLst>
+      <p:ext uri="{BB962C8B-B14F-4D97-AF65-F5344CB8AC3E}">
+        <p14:creationId xmlns:p14="http://schemas.microsoft.com/office/powerpoint/2010/main" val="13863217"/>
+      </p:ext>
+    </p:extLst>
+  </p:cSld>
+  <p:clrMapOvr>
+    <a:masterClrMapping/>
+  </p:clrMapOvr>
+</p:sld>
+</file>
+
+<file path=ppt/slides/slide4.xml><?xml version="1.0" encoding="utf-8"?>
 <p:sld xmlns:a="http://schemas.openxmlformats.org/drawingml/2006/main" xmlns:r="http://schemas.openxmlformats.org/officeDocument/2006/relationships" xmlns:p="http://schemas.openxmlformats.org/presentationml/2006/main">
   <p:cSld>
     <p:spTree>
@@ -7063,31 +8480,53 @@
               <a:tabLst/>
               <a:defRPr/>
             </a:pPr>
-            <a:r>
-              <a:rPr lang="ja-JP" altLang="en-US" dirty="0">
-                <a:solidFill>
-                  <a:srgbClr val="070F26"/>
-                </a:solidFill>
-                <a:latin typeface="Meiryo UI"/>
-                <a:ea typeface="Meiryo UI"/>
-              </a:rPr>
-              <a:t>バイブコーディング①</a:t>
-            </a:r>
-            <a:r>
-              <a:rPr kumimoji="1" lang="ja-JP" altLang="en-US" sz="2600" b="1" i="0" u="none" strike="noStrike" kern="1200" cap="none" spc="0" normalizeH="0" baseline="0" noProof="0" dirty="0">
-                <a:ln>
-                  <a:noFill/>
-                </a:ln>
-                <a:solidFill>
-                  <a:srgbClr val="070F26"/>
-                </a:solidFill>
-                <a:effectLst/>
-                <a:uLnTx/>
-                <a:uFillTx/>
-                <a:latin typeface="Meiryo UI"/>
-                <a:ea typeface="Meiryo UI"/>
-              </a:rPr>
-              <a:t>について</a:t>
+            <a:endParaRPr kumimoji="1" lang="ja-JP" altLang="en-US" sz="2600" b="1" i="0" u="none" strike="noStrike" kern="1200" cap="none" spc="0" normalizeH="0" baseline="0" noProof="0" dirty="0">
+              <a:ln>
+                <a:noFill/>
+              </a:ln>
+              <a:solidFill>
+                <a:srgbClr val="070F26"/>
+              </a:solidFill>
+              <a:effectLst/>
+              <a:uLnTx/>
+              <a:uFillTx/>
+              <a:latin typeface="Meiryo UI"/>
+              <a:ea typeface="Meiryo UI"/>
+            </a:endParaRPr>
+          </a:p>
+        </p:txBody>
+      </p:sp>
+      <p:sp>
+        <p:nvSpPr>
+          <p:cNvPr id="4" name="タイトル 3">
+            <a:extLst>
+              <a:ext uri="{FF2B5EF4-FFF2-40B4-BE49-F238E27FC236}">
+                <a16:creationId xmlns:a16="http://schemas.microsoft.com/office/drawing/2014/main" id="{42AD97C9-BA36-19C3-717F-1EDC599C4E1B}"/>
+              </a:ext>
+            </a:extLst>
+          </p:cNvPr>
+          <p:cNvSpPr>
+            <a:spLocks noGrp="1"/>
+          </p:cNvSpPr>
+          <p:nvPr>
+            <p:ph type="title"/>
+          </p:nvPr>
+        </p:nvSpPr>
+        <p:spPr>
+          <a:xfrm>
+            <a:off x="167951" y="365124"/>
+            <a:ext cx="11877869" cy="540000"/>
+          </a:xfrm>
+        </p:spPr>
+        <p:txBody>
+          <a:bodyPr>
+            <a:normAutofit/>
+          </a:bodyPr>
+          <a:lstStyle/>
+          <a:p>
+            <a:r>
+              <a:rPr lang="ja-JP" altLang="en-US" dirty="0"/>
+              <a:t>バイブコーディング①について</a:t>
             </a:r>
           </a:p>
         </p:txBody>
@@ -7110,8 +8549,8 @@
         </p:nvSpPr>
         <p:spPr>
           <a:xfrm>
-            <a:off x="838200" y="914400"/>
-            <a:ext cx="7920000" cy="5241600"/>
+            <a:off x="167951" y="1073020"/>
+            <a:ext cx="11877869" cy="5103943"/>
           </a:xfrm>
         </p:spPr>
         <p:txBody>
@@ -7127,10 +8566,7 @@
             <a:endParaRPr lang="en-US" altLang="ja-JP" dirty="0"/>
           </a:p>
           <a:p>
-            <a:pPr marL="914400" lvl="1" indent="-457200">
-              <a:buFont typeface="+mj-lt"/>
-              <a:buAutoNum type="arabicPeriod"/>
-            </a:pPr>
+            <a:pPr lvl="1"/>
             <a:r>
               <a:rPr lang="ja-JP" altLang="en-US" dirty="0"/>
               <a:t>バイブコーディング</a:t>
@@ -7161,7 +8597,7 @@
             </a:r>
             <a:r>
               <a:rPr lang="ja-JP" altLang="en-US" dirty="0"/>
-              <a:t>＆</a:t>
+              <a:t>フレームワーク＆</a:t>
             </a:r>
             <a:r>
               <a:rPr lang="en-US" altLang="ja-JP" dirty="0"/>
@@ -7169,8 +8605,11 @@
             </a:r>
             <a:r>
               <a:rPr lang="ja-JP" altLang="en-US" dirty="0"/>
-              <a:t>を利用した</a:t>
-            </a:r>
+              <a:t>を用いた</a:t>
+            </a:r>
+            <a:br>
+              <a:rPr lang="en-US" altLang="ja-JP" dirty="0"/>
+            </a:br>
             <a:r>
               <a:rPr lang="en-US" altLang="ja-JP" dirty="0"/>
               <a:t>Web</a:t>
@@ -7187,6 +8626,9 @@
               <a:rPr lang="ja-JP" altLang="en-US" dirty="0"/>
               <a:t>ハンズオン形式で、バイブコーディングを活用した</a:t>
             </a:r>
+            <a:br>
+              <a:rPr lang="en-US" altLang="ja-JP" dirty="0"/>
+            </a:br>
             <a:r>
               <a:rPr lang="en-US" altLang="ja-JP" dirty="0"/>
               <a:t>Web</a:t>
@@ -7198,10 +8640,7 @@
             <a:endParaRPr lang="en-US" altLang="ja-JP" dirty="0"/>
           </a:p>
           <a:p>
-            <a:pPr marL="914400" lvl="1" indent="-457200">
-              <a:buFont typeface="+mj-lt"/>
-              <a:buAutoNum type="arabicPeriod"/>
-            </a:pPr>
+            <a:pPr lvl="1"/>
             <a:r>
               <a:rPr lang="en-US" altLang="ja-JP" dirty="0"/>
               <a:t>Git-</a:t>
@@ -7225,10 +8664,7 @@
             <a:endParaRPr lang="en-US" altLang="ja-JP" dirty="0"/>
           </a:p>
           <a:p>
-            <a:pPr marL="914400" lvl="1" indent="-457200">
-              <a:buFont typeface="+mj-lt"/>
-              <a:buAutoNum type="arabicPeriod"/>
-            </a:pPr>
+            <a:pPr lvl="1"/>
             <a:r>
               <a:rPr lang="en-US" altLang="ja-JP" dirty="0"/>
               <a:t>Git-</a:t>
@@ -7272,10 +8708,7 @@
             <a:endParaRPr lang="en-US" altLang="ja-JP" dirty="0"/>
           </a:p>
           <a:p>
-            <a:pPr marL="914400" lvl="1" indent="-457200">
-              <a:buFont typeface="+mj-lt"/>
-              <a:buAutoNum type="arabicPeriod"/>
-            </a:pPr>
+            <a:pPr lvl="1"/>
             <a:r>
               <a:rPr lang="ja-JP" altLang="en-US" dirty="0"/>
               <a:t>バイブコーディング</a:t>
@@ -7343,7 +8776,7 @@
 </p:sld>
 </file>
 
-<file path=ppt/slides/slide4.xml><?xml version="1.0" encoding="utf-8"?>
+<file path=ppt/slides/slide5.xml><?xml version="1.0" encoding="utf-8"?>
 <p:sld xmlns:a="http://schemas.openxmlformats.org/drawingml/2006/main" xmlns:r="http://schemas.openxmlformats.org/officeDocument/2006/relationships" xmlns:p="http://schemas.openxmlformats.org/presentationml/2006/main">
   <p:cSld>
     <p:spTree>
@@ -7368,220 +8801,35 @@
       </p:grpSpPr>
       <p:sp>
         <p:nvSpPr>
-          <p:cNvPr id="69" name="タイトル 1">
-            <a:extLst>
-              <a:ext uri="{FF2B5EF4-FFF2-40B4-BE49-F238E27FC236}">
-                <a16:creationId xmlns:a16="http://schemas.microsoft.com/office/drawing/2014/main" id="{950DA96C-E905-74A5-F5A1-A78A050EBD70}"/>
-              </a:ext>
-            </a:extLst>
-          </p:cNvPr>
-          <p:cNvSpPr txBox="1">
-            <a:spLocks/>
+          <p:cNvPr id="5" name="タイトル 4">
+            <a:extLst>
+              <a:ext uri="{FF2B5EF4-FFF2-40B4-BE49-F238E27FC236}">
+                <a16:creationId xmlns:a16="http://schemas.microsoft.com/office/drawing/2014/main" id="{9CCD1628-6540-C81B-7F57-A4349115AF05}"/>
+              </a:ext>
+            </a:extLst>
+          </p:cNvPr>
+          <p:cNvSpPr>
+            <a:spLocks noGrp="1"/>
           </p:cNvSpPr>
-          <p:nvPr/>
+          <p:nvPr>
+            <p:ph type="title"/>
+          </p:nvPr>
         </p:nvSpPr>
         <p:spPr>
           <a:xfrm>
-            <a:off x="370800" y="334800"/>
-            <a:ext cx="11448000" cy="396000"/>
+            <a:off x="167951" y="365124"/>
+            <a:ext cx="11877869" cy="540000"/>
           </a:xfrm>
-          <a:prstGeom prst="rect">
-            <a:avLst/>
-          </a:prstGeom>
         </p:spPr>
         <p:txBody>
-          <a:bodyPr vert="horz" lIns="0" tIns="0" rIns="0" bIns="0" rtlCol="0" anchor="t" anchorCtr="0">
-            <a:noAutofit/>
+          <a:bodyPr>
+            <a:normAutofit/>
           </a:bodyPr>
-          <a:lstStyle>
-            <a:lvl1pPr algn="l" defTabSz="609555" rtl="0" eaLnBrk="1" fontAlgn="base" hangingPunct="1">
-              <a:spcBef>
-                <a:spcPct val="0"/>
-              </a:spcBef>
-              <a:spcAft>
-                <a:spcPct val="0"/>
-              </a:spcAft>
-              <a:defRPr kumimoji="1" sz="2600" b="1" i="0" kern="1200" spc="0" baseline="0">
-                <a:solidFill>
-                  <a:schemeClr val="accent1"/>
-                </a:solidFill>
-                <a:latin typeface="+mj-ea"/>
-                <a:ea typeface="+mj-ea"/>
-                <a:cs typeface="HGPGothicE" charset="-128"/>
-              </a:defRPr>
-            </a:lvl1pPr>
-            <a:lvl2pPr algn="l" defTabSz="609555" rtl="0" eaLnBrk="1" fontAlgn="base" hangingPunct="1">
-              <a:spcBef>
-                <a:spcPct val="0"/>
-              </a:spcBef>
-              <a:spcAft>
-                <a:spcPct val="0"/>
-              </a:spcAft>
-              <a:defRPr kumimoji="1" sz="2667">
-                <a:solidFill>
-                  <a:schemeClr val="tx1"/>
-                </a:solidFill>
-                <a:latin typeface="Arial" pitchFamily="34" charset="0"/>
-                <a:ea typeface="HGP創英角ｺﾞｼｯｸUB"/>
-                <a:cs typeface="Arial" pitchFamily="34" charset="0"/>
-              </a:defRPr>
-            </a:lvl2pPr>
-            <a:lvl3pPr algn="l" defTabSz="609555" rtl="0" eaLnBrk="1" fontAlgn="base" hangingPunct="1">
-              <a:spcBef>
-                <a:spcPct val="0"/>
-              </a:spcBef>
-              <a:spcAft>
-                <a:spcPct val="0"/>
-              </a:spcAft>
-              <a:defRPr kumimoji="1" sz="2667">
-                <a:solidFill>
-                  <a:schemeClr val="tx1"/>
-                </a:solidFill>
-                <a:latin typeface="Arial" pitchFamily="34" charset="0"/>
-                <a:ea typeface="HGP創英角ｺﾞｼｯｸUB"/>
-                <a:cs typeface="Arial" pitchFamily="34" charset="0"/>
-              </a:defRPr>
-            </a:lvl3pPr>
-            <a:lvl4pPr algn="l" defTabSz="609555" rtl="0" eaLnBrk="1" fontAlgn="base" hangingPunct="1">
-              <a:spcBef>
-                <a:spcPct val="0"/>
-              </a:spcBef>
-              <a:spcAft>
-                <a:spcPct val="0"/>
-              </a:spcAft>
-              <a:defRPr kumimoji="1" sz="2667">
-                <a:solidFill>
-                  <a:schemeClr val="tx1"/>
-                </a:solidFill>
-                <a:latin typeface="Arial" pitchFamily="34" charset="0"/>
-                <a:ea typeface="HGP創英角ｺﾞｼｯｸUB"/>
-                <a:cs typeface="Arial" pitchFamily="34" charset="0"/>
-              </a:defRPr>
-            </a:lvl4pPr>
-            <a:lvl5pPr algn="l" defTabSz="609555" rtl="0" eaLnBrk="1" fontAlgn="base" hangingPunct="1">
-              <a:spcBef>
-                <a:spcPct val="0"/>
-              </a:spcBef>
-              <a:spcAft>
-                <a:spcPct val="0"/>
-              </a:spcAft>
-              <a:defRPr kumimoji="1" sz="2667">
-                <a:solidFill>
-                  <a:schemeClr val="tx1"/>
-                </a:solidFill>
-                <a:latin typeface="Arial" pitchFamily="34" charset="0"/>
-                <a:ea typeface="HGP創英角ｺﾞｼｯｸUB"/>
-                <a:cs typeface="Arial" pitchFamily="34" charset="0"/>
-              </a:defRPr>
-            </a:lvl5pPr>
-            <a:lvl6pPr marL="609555" algn="l" defTabSz="609555" rtl="0" eaLnBrk="1" fontAlgn="base" hangingPunct="1">
-              <a:spcBef>
-                <a:spcPct val="0"/>
-              </a:spcBef>
-              <a:spcAft>
-                <a:spcPct val="0"/>
-              </a:spcAft>
-              <a:defRPr kumimoji="1" sz="2667">
-                <a:solidFill>
-                  <a:schemeClr val="tx1"/>
-                </a:solidFill>
-                <a:latin typeface="Arial" pitchFamily="34" charset="0"/>
-                <a:ea typeface="HGP創英角ｺﾞｼｯｸUB"/>
-                <a:cs typeface="Arial" pitchFamily="34" charset="0"/>
-              </a:defRPr>
-            </a:lvl6pPr>
-            <a:lvl7pPr marL="1219110" algn="l" defTabSz="609555" rtl="0" eaLnBrk="1" fontAlgn="base" hangingPunct="1">
-              <a:spcBef>
-                <a:spcPct val="0"/>
-              </a:spcBef>
-              <a:spcAft>
-                <a:spcPct val="0"/>
-              </a:spcAft>
-              <a:defRPr kumimoji="1" sz="2667">
-                <a:solidFill>
-                  <a:schemeClr val="tx1"/>
-                </a:solidFill>
-                <a:latin typeface="Arial" pitchFamily="34" charset="0"/>
-                <a:ea typeface="HGP創英角ｺﾞｼｯｸUB"/>
-                <a:cs typeface="Arial" pitchFamily="34" charset="0"/>
-              </a:defRPr>
-            </a:lvl7pPr>
-            <a:lvl8pPr marL="1828664" algn="l" defTabSz="609555" rtl="0" eaLnBrk="1" fontAlgn="base" hangingPunct="1">
-              <a:spcBef>
-                <a:spcPct val="0"/>
-              </a:spcBef>
-              <a:spcAft>
-                <a:spcPct val="0"/>
-              </a:spcAft>
-              <a:defRPr kumimoji="1" sz="2667">
-                <a:solidFill>
-                  <a:schemeClr val="tx1"/>
-                </a:solidFill>
-                <a:latin typeface="Arial" pitchFamily="34" charset="0"/>
-                <a:ea typeface="HGP創英角ｺﾞｼｯｸUB"/>
-                <a:cs typeface="Arial" pitchFamily="34" charset="0"/>
-              </a:defRPr>
-            </a:lvl8pPr>
-            <a:lvl9pPr marL="2438218" algn="l" defTabSz="609555" rtl="0" eaLnBrk="1" fontAlgn="base" hangingPunct="1">
-              <a:spcBef>
-                <a:spcPct val="0"/>
-              </a:spcBef>
-              <a:spcAft>
-                <a:spcPct val="0"/>
-              </a:spcAft>
-              <a:defRPr kumimoji="1" sz="2667">
-                <a:solidFill>
-                  <a:schemeClr val="tx1"/>
-                </a:solidFill>
-                <a:latin typeface="Arial" pitchFamily="34" charset="0"/>
-                <a:ea typeface="HGP創英角ｺﾞｼｯｸUB"/>
-                <a:cs typeface="Arial" pitchFamily="34" charset="0"/>
-              </a:defRPr>
-            </a:lvl9pPr>
-          </a:lstStyle>
-          <a:p>
-            <a:pPr marL="0" marR="0" lvl="0" indent="0" algn="l" defTabSz="609555" rtl="0" eaLnBrk="1" fontAlgn="base" latinLnBrk="0" hangingPunct="1">
-              <a:lnSpc>
-                <a:spcPct val="100000"/>
-              </a:lnSpc>
-              <a:spcBef>
-                <a:spcPct val="0"/>
-              </a:spcBef>
-              <a:spcAft>
-                <a:spcPct val="0"/>
-              </a:spcAft>
-              <a:buClrTx/>
-              <a:buSzTx/>
-              <a:buFontTx/>
-              <a:buNone/>
-              <a:tabLst/>
-              <a:defRPr/>
-            </a:pPr>
-            <a:r>
-              <a:rPr lang="ja-JP" altLang="en-US" dirty="0">
-                <a:solidFill>
-                  <a:srgbClr val="070F26"/>
-                </a:solidFill>
-                <a:latin typeface="Meiryo UI"/>
-                <a:ea typeface="Meiryo UI"/>
-              </a:rPr>
-              <a:t>バイブコーディング②</a:t>
-            </a:r>
-            <a:r>
-              <a:rPr kumimoji="1" lang="ja-JP" altLang="en-US" sz="2600" b="1" i="0" u="none" strike="noStrike" kern="1200" cap="none" spc="0" normalizeH="0" baseline="0" noProof="0" dirty="0">
-                <a:ln>
-                  <a:noFill/>
-                </a:ln>
-                <a:solidFill>
-                  <a:srgbClr val="070F26"/>
-                </a:solidFill>
-                <a:effectLst/>
-                <a:uLnTx/>
-                <a:uFillTx/>
-                <a:latin typeface="Meiryo UI"/>
-                <a:ea typeface="Meiryo UI"/>
-              </a:rPr>
-              <a:t>について</a:t>
+          <a:lstStyle/>
+          <a:p>
+            <a:r>
+              <a:rPr lang="ja-JP" altLang="en-US" dirty="0"/>
+              <a:t>バイブコーディング②について</a:t>
             </a:r>
           </a:p>
         </p:txBody>
@@ -7604,8 +8852,8 @@
         </p:nvSpPr>
         <p:spPr>
           <a:xfrm>
-            <a:off x="838200" y="914400"/>
-            <a:ext cx="7920000" cy="5241600"/>
+            <a:off x="168275" y="1073150"/>
+            <a:ext cx="11877675" cy="5103813"/>
           </a:xfrm>
         </p:spPr>
         <p:txBody>
@@ -7621,10 +8869,7 @@
             <a:endParaRPr lang="en-US" altLang="ja-JP" dirty="0"/>
           </a:p>
           <a:p>
-            <a:pPr marL="914400" lvl="1" indent="-457200">
-              <a:buFont typeface="+mj-lt"/>
-              <a:buAutoNum type="arabicPeriod"/>
-            </a:pPr>
+            <a:pPr lvl="1"/>
             <a:r>
               <a:rPr lang="ja-JP" altLang="en-US" dirty="0"/>
               <a:t>単体テスト</a:t>
@@ -7651,15 +8896,19 @@
             <a:pPr lvl="2"/>
             <a:r>
               <a:rPr lang="ja-JP" altLang="en-US" dirty="0"/>
-              <a:t>ハンズオン形式で、バイブコーディングを活用した単体テストの作成方法を学習する。</a:t>
+              <a:t>ハンズオン形式で、バイブコーディングを活用した</a:t>
+            </a:r>
+            <a:br>
+              <a:rPr lang="en-US" altLang="ja-JP" dirty="0"/>
+            </a:br>
+            <a:r>
+              <a:rPr lang="ja-JP" altLang="en-US" dirty="0"/>
+              <a:t>単体テストの実施方法を学習する。</a:t>
             </a:r>
             <a:endParaRPr lang="en-US" altLang="ja-JP" dirty="0"/>
           </a:p>
           <a:p>
-            <a:pPr marL="914400" lvl="1" indent="-457200">
-              <a:buFont typeface="+mj-lt"/>
-              <a:buAutoNum type="arabicPeriod"/>
-            </a:pPr>
+            <a:pPr lvl="1"/>
             <a:r>
               <a:rPr lang="ja-JP" altLang="en-US" dirty="0"/>
               <a:t>バイブコーディング</a:t>
@@ -7678,7 +8927,7 @@
             <a:pPr lvl="2"/>
             <a:r>
               <a:rPr lang="ja-JP" altLang="en-US" dirty="0"/>
-              <a:t>ハンズオンで学習した手順を基に、各自で残りの単体テストを作成する。</a:t>
+              <a:t>ハンズオンで学習した手順を基に、各自で残りの単体テストを実施する。</a:t>
             </a:r>
             <a:endParaRPr lang="en-US" altLang="ja-JP" dirty="0"/>
           </a:p>

--- a/00_オリエンテーション/【AI Native研修-バイブコーディング】研修の概要.pptx
+++ b/00_オリエンテーション/【AI Native研修-バイブコーディング】研修の概要.pptx
@@ -7146,7 +7146,7 @@
           <a:p>
             <a:r>
               <a:rPr lang="ja-JP" altLang="en-US" dirty="0"/>
-              <a:t>課題について</a:t>
+              <a:t>演習について</a:t>
             </a:r>
           </a:p>
         </p:txBody>
@@ -7217,7 +7217,7 @@
             </a:r>
             <a:r>
               <a:rPr lang="ja-JP" altLang="en-US" dirty="0"/>
-              <a:t>アプリケーションを作成します。</a:t>
+              <a:t>アプリケーションを作成する。</a:t>
             </a:r>
             <a:endParaRPr lang="en-US" altLang="ja-JP" dirty="0"/>
           </a:p>
@@ -7240,7 +7240,7 @@
             </a:r>
             <a:r>
               <a:rPr lang="ja-JP" altLang="en-US" dirty="0"/>
-              <a:t>アプリケーションを対象に、テスト仕様書を作成し、その内容に基づいて単体テストを実施します。</a:t>
+              <a:t>アプリケーションを対象に、テスト仕様書を作成し、その内容に基づいて単体テストを実施する。</a:t>
             </a:r>
             <a:endParaRPr lang="en-US" altLang="ja-JP" dirty="0"/>
           </a:p>
@@ -8566,7 +8566,10 @@
             <a:endParaRPr lang="en-US" altLang="ja-JP" dirty="0"/>
           </a:p>
           <a:p>
-            <a:pPr lvl="1"/>
+            <a:pPr marL="914400" lvl="1" indent="-457200">
+              <a:buFont typeface="+mj-lt"/>
+              <a:buAutoNum type="arabicPeriod"/>
+            </a:pPr>
             <a:r>
               <a:rPr lang="ja-JP" altLang="en-US" dirty="0"/>
               <a:t>バイブコーディング</a:t>
@@ -8635,12 +8638,22 @@
             </a:r>
             <a:r>
               <a:rPr lang="ja-JP" altLang="en-US" dirty="0"/>
-              <a:t>アプリケーションの作成方法を学習する。</a:t>
+              <a:t>アプリケーションの作成方法を学習し、</a:t>
+            </a:r>
+            <a:br>
+              <a:rPr lang="en-US" altLang="ja-JP" dirty="0"/>
+            </a:br>
+            <a:r>
+              <a:rPr lang="ja-JP" altLang="en-US" dirty="0"/>
+              <a:t>その後の課題作成に必要な操作や開発手順を習得する。</a:t>
             </a:r>
             <a:endParaRPr lang="en-US" altLang="ja-JP" dirty="0"/>
           </a:p>
           <a:p>
-            <a:pPr lvl="1"/>
+            <a:pPr marL="914400" lvl="1" indent="-457200">
+              <a:buFont typeface="+mj-lt"/>
+              <a:buAutoNum type="arabicPeriod"/>
+            </a:pPr>
             <a:r>
               <a:rPr lang="en-US" altLang="ja-JP" dirty="0"/>
               <a:t>Git-</a:t>
@@ -8664,7 +8677,10 @@
             <a:endParaRPr lang="en-US" altLang="ja-JP" dirty="0"/>
           </a:p>
           <a:p>
-            <a:pPr lvl="1"/>
+            <a:pPr marL="914400" lvl="1" indent="-457200">
+              <a:buFont typeface="+mj-lt"/>
+              <a:buAutoNum type="arabicPeriod"/>
+            </a:pPr>
             <a:r>
               <a:rPr lang="en-US" altLang="ja-JP" dirty="0"/>
               <a:t>Git-</a:t>
@@ -8708,7 +8724,10 @@
             <a:endParaRPr lang="en-US" altLang="ja-JP" dirty="0"/>
           </a:p>
           <a:p>
-            <a:pPr lvl="1"/>
+            <a:pPr marL="914400" lvl="1" indent="-457200">
+              <a:buFont typeface="+mj-lt"/>
+              <a:buAutoNum type="arabicPeriod"/>
+            </a:pPr>
             <a:r>
               <a:rPr lang="ja-JP" altLang="en-US" dirty="0"/>
               <a:t>バイブコーディング</a:t>
@@ -8869,7 +8888,10 @@
             <a:endParaRPr lang="en-US" altLang="ja-JP" dirty="0"/>
           </a:p>
           <a:p>
-            <a:pPr lvl="1"/>
+            <a:pPr marL="914400" lvl="1" indent="-457200">
+              <a:buFont typeface="+mj-lt"/>
+              <a:buAutoNum type="arabicPeriod"/>
+            </a:pPr>
             <a:r>
               <a:rPr lang="ja-JP" altLang="en-US" dirty="0"/>
               <a:t>単体テスト</a:t>
@@ -8903,12 +8925,22 @@
             </a:br>
             <a:r>
               <a:rPr lang="ja-JP" altLang="en-US" dirty="0"/>
-              <a:t>単体テストの実施方法を学習する。</a:t>
+              <a:t>単体テストの実施方法を学習し、</a:t>
+            </a:r>
+            <a:br>
+              <a:rPr lang="en-US" altLang="ja-JP" dirty="0"/>
+            </a:br>
+            <a:r>
+              <a:rPr lang="ja-JP" altLang="en-US" dirty="0"/>
+              <a:t>その後の課題に必要な操作や実施手順を習得する。</a:t>
             </a:r>
             <a:endParaRPr lang="en-US" altLang="ja-JP" dirty="0"/>
           </a:p>
           <a:p>
-            <a:pPr lvl="1"/>
+            <a:pPr marL="914400" lvl="1" indent="-457200">
+              <a:buFont typeface="+mj-lt"/>
+              <a:buAutoNum type="arabicPeriod"/>
+            </a:pPr>
             <a:r>
               <a:rPr lang="ja-JP" altLang="en-US" dirty="0"/>
               <a:t>バイブコーディング</a:t>

--- a/00_オリエンテーション/【AI Native研修-バイブコーディング】研修の概要.pptx
+++ b/00_オリエンテーション/【AI Native研修-バイブコーディング】研修の概要.pptx
@@ -5,7 +5,7 @@
     <p:sldMasterId id="2147483648" r:id="rId1"/>
   </p:sldMasterIdLst>
   <p:notesMasterIdLst>
-    <p:notesMasterId r:id="rId7"/>
+    <p:notesMasterId r:id="rId8"/>
   </p:notesMasterIdLst>
   <p:sldIdLst>
     <p:sldId id="256" r:id="rId2"/>
@@ -13,6 +13,7 @@
     <p:sldId id="262" r:id="rId4"/>
     <p:sldId id="259" r:id="rId5"/>
     <p:sldId id="260" r:id="rId6"/>
+    <p:sldId id="263" r:id="rId7"/>
   </p:sldIdLst>
   <p:sldSz cx="12192000" cy="6858000"/>
   <p:notesSz cx="6858000" cy="9144000"/>
@@ -899,6 +900,114 @@
     <p:extLst>
       <p:ext uri="{BB962C8B-B14F-4D97-AF65-F5344CB8AC3E}">
         <p14:creationId xmlns:p14="http://schemas.microsoft.com/office/powerpoint/2010/main" val="3311666533"/>
+      </p:ext>
+    </p:extLst>
+  </p:cSld>
+  <p:clrMapOvr>
+    <a:masterClrMapping/>
+  </p:clrMapOvr>
+</p:notes>
+</file>
+
+<file path=ppt/notesSlides/notesSlide5.xml><?xml version="1.0" encoding="utf-8"?>
+<p:notes xmlns:a="http://schemas.openxmlformats.org/drawingml/2006/main" xmlns:r="http://schemas.openxmlformats.org/officeDocument/2006/relationships" xmlns:p="http://schemas.openxmlformats.org/presentationml/2006/main">
+  <p:cSld>
+    <p:spTree>
+      <p:nvGrpSpPr>
+        <p:cNvPr id="1" name="">
+          <a:extLst>
+            <a:ext uri="{FF2B5EF4-FFF2-40B4-BE49-F238E27FC236}">
+              <a16:creationId xmlns:a16="http://schemas.microsoft.com/office/drawing/2014/main" id="{1599A43B-B2AA-C757-2339-23FF2FE2C580}"/>
+            </a:ext>
+          </a:extLst>
+        </p:cNvPr>
+        <p:cNvGrpSpPr/>
+        <p:nvPr/>
+      </p:nvGrpSpPr>
+      <p:grpSpPr>
+        <a:xfrm>
+          <a:off x="0" y="0"/>
+          <a:ext cx="0" cy="0"/>
+          <a:chOff x="0" y="0"/>
+          <a:chExt cx="0" cy="0"/>
+        </a:xfrm>
+      </p:grpSpPr>
+      <p:sp>
+        <p:nvSpPr>
+          <p:cNvPr id="2" name="スライド イメージ プレースホルダー 1">
+            <a:extLst>
+              <a:ext uri="{FF2B5EF4-FFF2-40B4-BE49-F238E27FC236}">
+                <a16:creationId xmlns:a16="http://schemas.microsoft.com/office/drawing/2014/main" id="{5C7C2043-8C99-A0F3-2830-A8AD8E8183A6}"/>
+              </a:ext>
+            </a:extLst>
+          </p:cNvPr>
+          <p:cNvSpPr>
+            <a:spLocks noGrp="1" noRot="1" noChangeAspect="1"/>
+          </p:cNvSpPr>
+          <p:nvPr>
+            <p:ph type="sldImg"/>
+          </p:nvPr>
+        </p:nvSpPr>
+        <p:spPr/>
+      </p:sp>
+      <p:sp>
+        <p:nvSpPr>
+          <p:cNvPr id="3" name="ノート プレースホルダー 2">
+            <a:extLst>
+              <a:ext uri="{FF2B5EF4-FFF2-40B4-BE49-F238E27FC236}">
+                <a16:creationId xmlns:a16="http://schemas.microsoft.com/office/drawing/2014/main" id="{07BAAAA5-52A2-CED6-91FD-680F0141BD0E}"/>
+              </a:ext>
+            </a:extLst>
+          </p:cNvPr>
+          <p:cNvSpPr>
+            <a:spLocks noGrp="1"/>
+          </p:cNvSpPr>
+          <p:nvPr>
+            <p:ph type="body" idx="1"/>
+          </p:nvPr>
+        </p:nvSpPr>
+        <p:spPr/>
+        <p:txBody>
+          <a:bodyPr/>
+          <a:lstStyle/>
+          <a:p>
+            <a:endParaRPr kumimoji="1" lang="ja-JP" altLang="en-US" dirty="0"/>
+          </a:p>
+        </p:txBody>
+      </p:sp>
+      <p:sp>
+        <p:nvSpPr>
+          <p:cNvPr id="4" name="スライド番号プレースホルダー 3">
+            <a:extLst>
+              <a:ext uri="{FF2B5EF4-FFF2-40B4-BE49-F238E27FC236}">
+                <a16:creationId xmlns:a16="http://schemas.microsoft.com/office/drawing/2014/main" id="{2A22108E-8464-887B-95A6-4CB6FF75738C}"/>
+              </a:ext>
+            </a:extLst>
+          </p:cNvPr>
+          <p:cNvSpPr>
+            <a:spLocks noGrp="1"/>
+          </p:cNvSpPr>
+          <p:nvPr>
+            <p:ph type="sldNum" sz="quarter" idx="5"/>
+          </p:nvPr>
+        </p:nvSpPr>
+        <p:spPr/>
+        <p:txBody>
+          <a:bodyPr/>
+          <a:lstStyle/>
+          <a:p>
+            <a:fld id="{A58A0B64-6D67-42B8-83A5-133498884D56}" type="slidenum">
+              <a:rPr kumimoji="1" lang="ja-JP" altLang="en-US" smtClean="0"/>
+              <a:t>6</a:t>
+            </a:fld>
+            <a:endParaRPr kumimoji="1" lang="ja-JP" altLang="en-US"/>
+          </a:p>
+        </p:txBody>
+      </p:sp>
+    </p:spTree>
+    <p:extLst>
+      <p:ext uri="{BB962C8B-B14F-4D97-AF65-F5344CB8AC3E}">
+        <p14:creationId xmlns:p14="http://schemas.microsoft.com/office/powerpoint/2010/main" val="3540506674"/>
       </p:ext>
     </p:extLst>
   </p:cSld>
@@ -4528,31 +4637,38 @@
           <p:nvPr>
             <p:extLst>
               <p:ext uri="{D42A27DB-BD31-4B8C-83A1-F6EECF244321}">
-                <p14:modId xmlns:p14="http://schemas.microsoft.com/office/powerpoint/2010/main" val="2468268616"/>
+                <p14:modId xmlns:p14="http://schemas.microsoft.com/office/powerpoint/2010/main" val="992422498"/>
               </p:ext>
             </p:extLst>
           </p:nvPr>
         </p:nvGraphicFramePr>
         <p:xfrm>
           <a:off x="172278" y="1076821"/>
-          <a:ext cx="7878678" cy="5075501"/>
+          <a:ext cx="11873541" cy="5075501"/>
         </p:xfrm>
         <a:graphic>
           <a:graphicData uri="http://schemas.openxmlformats.org/drawingml/2006/table">
             <a:tbl>
               <a:tblPr firstRow="1" bandRow="1"/>
               <a:tblGrid>
-                <a:gridCol w="3922904">
+                <a:gridCol w="3935861">
                   <a:extLst>
                     <a:ext uri="{9D8B030D-6E8A-4147-A177-3AD203B41FA5}">
                       <a16:colId xmlns:a16="http://schemas.microsoft.com/office/drawing/2014/main" val="3573493280"/>
                     </a:ext>
                   </a:extLst>
                 </a:gridCol>
-                <a:gridCol w="3955774">
+                <a:gridCol w="3968840">
                   <a:extLst>
                     <a:ext uri="{9D8B030D-6E8A-4147-A177-3AD203B41FA5}">
                       <a16:colId xmlns:a16="http://schemas.microsoft.com/office/drawing/2014/main" val="2262346922"/>
+                    </a:ext>
+                  </a:extLst>
+                </a:gridCol>
+                <a:gridCol w="3968840">
+                  <a:extLst>
+                    <a:ext uri="{9D8B030D-6E8A-4147-A177-3AD203B41FA5}">
+                      <a16:colId xmlns:a16="http://schemas.microsoft.com/office/drawing/2014/main" val="2951467705"/>
                     </a:ext>
                   </a:extLst>
                 </a:gridCol>
@@ -4777,6 +4893,71 @@
                       <a:r>
                         <a:rPr kumimoji="1" lang="ja-JP" altLang="en-US" sz="1600" dirty="0"/>
                         <a:t>２～３日目</a:t>
+                      </a:r>
+                    </a:p>
+                  </a:txBody>
+                  <a:tcPr>
+                    <a:lnL w="12700" cap="flat" cmpd="sng" algn="ctr">
+                      <a:solidFill>
+                        <a:srgbClr val="FFFFFF"/>
+                      </a:solidFill>
+                      <a:prstDash val="solid"/>
+                      <a:round/>
+                      <a:headEnd type="none" w="med" len="med"/>
+                      <a:tailEnd type="none" w="med" len="med"/>
+                    </a:lnL>
+                    <a:lnR w="12700" cap="flat" cmpd="sng" algn="ctr">
+                      <a:solidFill>
+                        <a:srgbClr val="FFFFFF"/>
+                      </a:solidFill>
+                      <a:prstDash val="solid"/>
+                      <a:round/>
+                      <a:headEnd type="none" w="med" len="med"/>
+                      <a:tailEnd type="none" w="med" len="med"/>
+                    </a:lnR>
+                    <a:lnT w="12700" cmpd="sng">
+                      <a:solidFill>
+                        <a:srgbClr val="FFFFFF"/>
+                      </a:solidFill>
+                    </a:lnT>
+                    <a:lnB w="38100" cap="flat" cmpd="sng" algn="ctr">
+                      <a:solidFill>
+                        <a:srgbClr val="FFFFFF"/>
+                      </a:solidFill>
+                      <a:prstDash val="solid"/>
+                      <a:round/>
+                      <a:headEnd type="none" w="med" len="med"/>
+                      <a:tailEnd type="none" w="med" len="med"/>
+                    </a:lnB>
+                    <a:lnTlToBr w="12700" cmpd="sng">
+                      <a:noFill/>
+                      <a:prstDash val="solid"/>
+                    </a:lnTlToBr>
+                    <a:lnBlToTr w="12700" cmpd="sng">
+                      <a:noFill/>
+                      <a:prstDash val="solid"/>
+                    </a:lnBlToTr>
+                    <a:solidFill>
+                      <a:srgbClr val="070F26"/>
+                    </a:solidFill>
+                  </a:tcPr>
+                </a:tc>
+                <a:tc>
+                  <a:txBody>
+                    <a:bodyPr/>
+                    <a:lstStyle/>
+                    <a:p>
+                      <a:pPr algn="ctr"/>
+                      <a:r>
+                        <a:rPr kumimoji="1" lang="ja-JP" altLang="en-US" sz="1600" b="1" kern="1200" dirty="0">
+                          <a:solidFill>
+                            <a:schemeClr val="lt1"/>
+                          </a:solidFill>
+                          <a:latin typeface="Arial"/>
+                          <a:ea typeface="Meiryo UI"/>
+                          <a:cs typeface="+mn-cs"/>
+                        </a:rPr>
+                        <a:t>３日目</a:t>
                       </a:r>
                     </a:p>
                   </a:txBody>
@@ -5055,6 +5236,62 @@
                       <a:headEnd type="none" w="med" len="med"/>
                       <a:tailEnd type="none" w="med" len="med"/>
                     </a:lnL>
+                    <a:lnR w="12700" cap="flat" cmpd="sng" algn="ctr">
+                      <a:solidFill>
+                        <a:srgbClr val="FFFFFF"/>
+                      </a:solidFill>
+                      <a:prstDash val="solid"/>
+                      <a:round/>
+                      <a:headEnd type="none" w="med" len="med"/>
+                      <a:tailEnd type="none" w="med" len="med"/>
+                    </a:lnR>
+                    <a:lnT w="38100" cap="flat" cmpd="sng" algn="ctr">
+                      <a:solidFill>
+                        <a:srgbClr val="FFFFFF"/>
+                      </a:solidFill>
+                      <a:prstDash val="solid"/>
+                      <a:round/>
+                      <a:headEnd type="none" w="med" len="med"/>
+                      <a:tailEnd type="none" w="med" len="med"/>
+                    </a:lnT>
+                    <a:lnB w="12700" cmpd="sng">
+                      <a:solidFill>
+                        <a:srgbClr val="FFFFFF"/>
+                      </a:solidFill>
+                    </a:lnB>
+                    <a:lnTlToBr w="12700" cmpd="sng">
+                      <a:noFill/>
+                      <a:prstDash val="solid"/>
+                    </a:lnTlToBr>
+                    <a:lnBlToTr w="12700" cmpd="sng">
+                      <a:noFill/>
+                      <a:prstDash val="solid"/>
+                    </a:lnBlToTr>
+                    <a:solidFill>
+                      <a:srgbClr val="070F26">
+                        <a:tint val="40000"/>
+                      </a:srgbClr>
+                    </a:solidFill>
+                  </a:tcPr>
+                </a:tc>
+                <a:tc>
+                  <a:txBody>
+                    <a:bodyPr/>
+                    <a:lstStyle/>
+                    <a:p>
+                      <a:endParaRPr kumimoji="1" lang="ja-JP" altLang="en-US" dirty="0"/>
+                    </a:p>
+                  </a:txBody>
+                  <a:tcPr>
+                    <a:lnL w="12700" cap="flat" cmpd="sng" algn="ctr">
+                      <a:solidFill>
+                        <a:srgbClr val="FFFFFF"/>
+                      </a:solidFill>
+                      <a:prstDash val="solid"/>
+                      <a:round/>
+                      <a:headEnd type="none" w="med" len="med"/>
+                      <a:tailEnd type="none" w="med" len="med"/>
+                    </a:lnL>
                     <a:lnR w="12700" cmpd="sng">
                       <a:solidFill>
                         <a:srgbClr val="FFFFFF"/>
@@ -6433,7 +6670,7 @@
                   <a:latin typeface="Arial"/>
                   <a:ea typeface="Meiryo UI"/>
                 </a:rPr>
-                <a:t>アプリケーション</a:t>
+                <a:t>成果物</a:t>
               </a:r>
               <a:endParaRPr kumimoji="0" lang="ja-JP" altLang="en-US" b="0" i="0" u="none" strike="noStrike" kern="0" cap="none" spc="0" normalizeH="0" baseline="0" noProof="0" dirty="0">
                 <a:ln>
@@ -6541,7 +6778,7 @@
                   <a:ea typeface="Meiryo UI"/>
                   <a:cs typeface="+mn-cs"/>
                 </a:rPr>
-                <a:t>EC</a:t>
+                <a:t>Web</a:t>
               </a:r>
               <a:r>
                 <a:rPr kumimoji="0" lang="ja-JP" altLang="en-US" sz="1200" b="0" i="0" u="none" strike="noStrike" kern="0" cap="none" spc="0" normalizeH="0" baseline="0" noProof="0" dirty="0">
@@ -6558,7 +6795,7 @@
                   <a:ea typeface="Meiryo UI"/>
                   <a:cs typeface="+mn-cs"/>
                 </a:rPr>
-                <a:t>サイト</a:t>
+                <a:t>アプリケーション</a:t>
               </a:r>
               <a:endParaRPr kumimoji="0" lang="en-US" altLang="ja-JP" sz="1200" b="0" i="0" u="none" strike="noStrike" kern="0" cap="none" spc="0" normalizeH="0" baseline="0" noProof="0" dirty="0">
                 <a:ln>
@@ -6721,7 +6958,7 @@
                   <a:latin typeface="Arial"/>
                   <a:ea typeface="Meiryo UI"/>
                 </a:rPr>
-                <a:t>アプリケーション</a:t>
+                <a:t>成果物</a:t>
               </a:r>
               <a:endParaRPr kumimoji="0" lang="ja-JP" altLang="en-US" b="0" i="0" u="none" strike="noStrike" kern="0" cap="none" spc="0" normalizeH="0" baseline="0" noProof="0" dirty="0">
                 <a:ln>
@@ -6801,7 +7038,7 @@
                   <a:latin typeface="Arial"/>
                   <a:ea typeface="Meiryo UI"/>
                 </a:rPr>
-                <a:t>EC</a:t>
+                <a:t>Web</a:t>
               </a:r>
               <a:r>
                 <a:rPr kumimoji="0" lang="ja-JP" altLang="en-US" sz="1200" kern="0" dirty="0">
@@ -6811,7 +7048,7 @@
                   <a:latin typeface="Arial"/>
                   <a:ea typeface="Meiryo UI"/>
                 </a:rPr>
-                <a:t>サイト</a:t>
+                <a:t>アプリケーション（修正後）</a:t>
               </a:r>
               <a:endParaRPr kumimoji="0" lang="en-US" altLang="ja-JP" sz="1200" kern="0" dirty="0">
                 <a:solidFill>
@@ -6983,6 +7220,500 @@
               <a:rPr lang="ja-JP" altLang="en-US" dirty="0"/>
               <a:t>研修の全体像について</a:t>
             </a:r>
+          </a:p>
+        </p:txBody>
+      </p:sp>
+      <p:grpSp>
+        <p:nvGrpSpPr>
+          <p:cNvPr id="16" name="グループ化 15">
+            <a:extLst>
+              <a:ext uri="{FF2B5EF4-FFF2-40B4-BE49-F238E27FC236}">
+                <a16:creationId xmlns:a16="http://schemas.microsoft.com/office/drawing/2014/main" id="{D0A5E10E-2B1B-7E37-ADAA-30E7F23CAF1A}"/>
+              </a:ext>
+            </a:extLst>
+          </p:cNvPr>
+          <p:cNvGrpSpPr/>
+          <p:nvPr/>
+        </p:nvGrpSpPr>
+        <p:grpSpPr>
+          <a:xfrm>
+            <a:off x="8310393" y="1642568"/>
+            <a:ext cx="3600000" cy="2140027"/>
+            <a:chOff x="946296" y="1364275"/>
+            <a:chExt cx="4359349" cy="2281953"/>
+          </a:xfrm>
+        </p:grpSpPr>
+        <p:sp>
+          <p:nvSpPr>
+            <p:cNvPr id="17" name="正方形/長方形 16">
+              <a:extLst>
+                <a:ext uri="{FF2B5EF4-FFF2-40B4-BE49-F238E27FC236}">
+                  <a16:creationId xmlns:a16="http://schemas.microsoft.com/office/drawing/2014/main" id="{A7914848-08A3-620C-9358-3FE1B817412B}"/>
+                </a:ext>
+              </a:extLst>
+            </p:cNvPr>
+            <p:cNvSpPr/>
+            <p:nvPr/>
+          </p:nvSpPr>
+          <p:spPr>
+            <a:xfrm>
+              <a:off x="946296" y="1957361"/>
+              <a:ext cx="4359349" cy="1688867"/>
+            </a:xfrm>
+            <a:prstGeom prst="rect">
+              <a:avLst/>
+            </a:prstGeom>
+            <a:solidFill>
+              <a:srgbClr val="FFFFFF"/>
+            </a:solidFill>
+            <a:ln w="3175" cap="flat" cmpd="sng" algn="ctr">
+              <a:solidFill>
+                <a:srgbClr val="000000"/>
+              </a:solidFill>
+              <a:prstDash val="solid"/>
+            </a:ln>
+            <a:effectLst/>
+          </p:spPr>
+          <p:txBody>
+            <a:bodyPr rot="0" spcFirstLastPara="0" vertOverflow="overflow" horzOverflow="overflow" vert="horz" wrap="square" lIns="36000" tIns="36000" rIns="36000" bIns="36000" numCol="1" spcCol="0" rtlCol="0" fromWordArt="0" anchor="ctr" anchorCtr="0" forceAA="0" compatLnSpc="1">
+              <a:prstTxWarp prst="textNoShape">
+                <a:avLst/>
+              </a:prstTxWarp>
+              <a:noAutofit/>
+            </a:bodyPr>
+            <a:lstStyle/>
+            <a:p>
+              <a:pPr marL="0" marR="0" lvl="0" indent="0" algn="ctr" defTabSz="914400" eaLnBrk="1" fontAlgn="auto" latinLnBrk="0" hangingPunct="1">
+                <a:lnSpc>
+                  <a:spcPct val="100000"/>
+                </a:lnSpc>
+                <a:spcBef>
+                  <a:spcPts val="0"/>
+                </a:spcBef>
+                <a:spcAft>
+                  <a:spcPts val="0"/>
+                </a:spcAft>
+                <a:buClrTx/>
+                <a:buSzTx/>
+                <a:buFontTx/>
+                <a:buNone/>
+                <a:tabLst/>
+                <a:defRPr/>
+              </a:pPr>
+              <a:endParaRPr kumimoji="0" lang="ja-JP" altLang="en-US" sz="1400" b="0" i="0" u="none" strike="noStrike" kern="0" cap="none" spc="0" normalizeH="0" baseline="0" noProof="0" dirty="0">
+                <a:ln>
+                  <a:noFill/>
+                </a:ln>
+                <a:solidFill>
+                  <a:srgbClr val="000000"/>
+                </a:solidFill>
+                <a:effectLst/>
+                <a:uLnTx/>
+                <a:uFillTx/>
+                <a:latin typeface="Arial"/>
+                <a:ea typeface="Meiryo UI"/>
+                <a:cs typeface="+mn-cs"/>
+              </a:endParaRPr>
+            </a:p>
+          </p:txBody>
+        </p:sp>
+        <p:sp>
+          <p:nvSpPr>
+            <p:cNvPr id="18" name="正方形/長方形 17">
+              <a:extLst>
+                <a:ext uri="{FF2B5EF4-FFF2-40B4-BE49-F238E27FC236}">
+                  <a16:creationId xmlns:a16="http://schemas.microsoft.com/office/drawing/2014/main" id="{AA8746D2-1726-FE19-FBB1-CB638ADC58FD}"/>
+                </a:ext>
+              </a:extLst>
+            </p:cNvPr>
+            <p:cNvSpPr/>
+            <p:nvPr/>
+          </p:nvSpPr>
+          <p:spPr>
+            <a:xfrm>
+              <a:off x="946296" y="1364275"/>
+              <a:ext cx="4359349" cy="588735"/>
+            </a:xfrm>
+            <a:prstGeom prst="rect">
+              <a:avLst/>
+            </a:prstGeom>
+            <a:solidFill>
+              <a:srgbClr val="0072BC">
+                <a:lumMod val="10000"/>
+                <a:lumOff val="90000"/>
+              </a:srgbClr>
+            </a:solidFill>
+            <a:ln w="3175" cap="flat" cmpd="sng" algn="ctr">
+              <a:solidFill>
+                <a:srgbClr val="000000"/>
+              </a:solidFill>
+              <a:prstDash val="solid"/>
+            </a:ln>
+            <a:effectLst/>
+          </p:spPr>
+          <p:txBody>
+            <a:bodyPr rot="0" spcFirstLastPara="0" vertOverflow="overflow" horzOverflow="overflow" vert="horz" wrap="square" lIns="36000" tIns="36000" rIns="36000" bIns="36000" numCol="1" spcCol="0" rtlCol="0" fromWordArt="0" anchor="ctr" anchorCtr="0" forceAA="0" compatLnSpc="1">
+              <a:prstTxWarp prst="textNoShape">
+                <a:avLst/>
+              </a:prstTxWarp>
+              <a:noAutofit/>
+            </a:bodyPr>
+            <a:lstStyle/>
+            <a:p>
+              <a:pPr algn="ctr"/>
+              <a:r>
+                <a:rPr kumimoji="0" lang="ja-JP" altLang="en-US" kern="0" dirty="0">
+                  <a:solidFill>
+                    <a:srgbClr val="000000"/>
+                  </a:solidFill>
+                  <a:latin typeface="Arial"/>
+                  <a:ea typeface="Meiryo UI"/>
+                </a:rPr>
+                <a:t>振り返り</a:t>
+              </a:r>
+              <a:endParaRPr kumimoji="0" lang="en-US" altLang="ja-JP" kern="0" dirty="0">
+                <a:solidFill>
+                  <a:srgbClr val="000000"/>
+                </a:solidFill>
+                <a:latin typeface="Arial"/>
+                <a:ea typeface="Meiryo UI"/>
+              </a:endParaRPr>
+            </a:p>
+            <a:p>
+              <a:pPr algn="ctr"/>
+              <a:r>
+                <a:rPr kumimoji="0" lang="ja-JP" altLang="en-US" sz="1200" kern="0" dirty="0">
+                  <a:solidFill>
+                    <a:srgbClr val="000000"/>
+                  </a:solidFill>
+                  <a:latin typeface="Arial"/>
+                  <a:ea typeface="Meiryo UI"/>
+                </a:rPr>
+                <a:t>アプリケーションを比較し、分析結果を共有</a:t>
+              </a:r>
+              <a:r>
+                <a:rPr kumimoji="0" lang="ja-JP" altLang="en-US" sz="1200" i="0" u="none" strike="noStrike" kern="0" cap="none" spc="0" normalizeH="0" baseline="0" noProof="0" dirty="0">
+                  <a:ln>
+                    <a:noFill/>
+                  </a:ln>
+                  <a:solidFill>
+                    <a:srgbClr val="000000"/>
+                  </a:solidFill>
+                  <a:effectLst/>
+                  <a:uLnTx/>
+                  <a:uFillTx/>
+                  <a:latin typeface="Arial"/>
+                  <a:ea typeface="Meiryo UI"/>
+                  <a:cs typeface="+mn-cs"/>
+                </a:rPr>
+                <a:t>する</a:t>
+              </a:r>
+              <a:endParaRPr kumimoji="0" lang="en-US" altLang="ja-JP" sz="1200" i="0" u="none" strike="noStrike" kern="0" cap="none" spc="0" normalizeH="0" baseline="0" noProof="0" dirty="0">
+                <a:ln>
+                  <a:noFill/>
+                </a:ln>
+                <a:solidFill>
+                  <a:srgbClr val="000000"/>
+                </a:solidFill>
+                <a:effectLst/>
+                <a:uLnTx/>
+                <a:uFillTx/>
+                <a:latin typeface="Arial"/>
+                <a:ea typeface="Meiryo UI"/>
+                <a:cs typeface="+mn-cs"/>
+              </a:endParaRPr>
+            </a:p>
+          </p:txBody>
+        </p:sp>
+      </p:grpSp>
+      <p:sp>
+        <p:nvSpPr>
+          <p:cNvPr id="19" name="四角形: 角を丸くする 18">
+            <a:extLst>
+              <a:ext uri="{FF2B5EF4-FFF2-40B4-BE49-F238E27FC236}">
+                <a16:creationId xmlns:a16="http://schemas.microsoft.com/office/drawing/2014/main" id="{CCF2AB2C-69AF-584E-836B-7A8FB75E4012}"/>
+              </a:ext>
+            </a:extLst>
+          </p:cNvPr>
+          <p:cNvSpPr/>
+          <p:nvPr/>
+        </p:nvSpPr>
+        <p:spPr>
+          <a:xfrm>
+            <a:off x="8490393" y="2793784"/>
+            <a:ext cx="3240000" cy="360000"/>
+          </a:xfrm>
+          <a:prstGeom prst="roundRect">
+            <a:avLst/>
+          </a:prstGeom>
+          <a:solidFill>
+            <a:srgbClr val="FFFFFF"/>
+          </a:solidFill>
+          <a:ln w="3175" cap="flat" cmpd="sng" algn="ctr">
+            <a:solidFill>
+              <a:srgbClr val="000000"/>
+            </a:solidFill>
+            <a:prstDash val="solid"/>
+          </a:ln>
+          <a:effectLst/>
+        </p:spPr>
+        <p:txBody>
+          <a:bodyPr rot="0" spcFirstLastPara="0" vertOverflow="overflow" horzOverflow="overflow" vert="horz" wrap="square" lIns="36000" tIns="36000" rIns="36000" bIns="36000" numCol="1" spcCol="0" rtlCol="0" fromWordArt="0" anchor="ctr" anchorCtr="0" forceAA="0" compatLnSpc="1">
+            <a:prstTxWarp prst="textNoShape">
+              <a:avLst/>
+            </a:prstTxWarp>
+            <a:noAutofit/>
+          </a:bodyPr>
+          <a:lstStyle/>
+          <a:p>
+            <a:pPr lvl="0" algn="ctr">
+              <a:defRPr/>
+            </a:pPr>
+            <a:r>
+              <a:rPr kumimoji="0" lang="ja-JP" altLang="en-US" sz="1200" kern="0" dirty="0">
+                <a:solidFill>
+                  <a:srgbClr val="000000"/>
+                </a:solidFill>
+                <a:latin typeface="Arial"/>
+                <a:ea typeface="Meiryo UI"/>
+              </a:rPr>
+              <a:t>改善点の整理</a:t>
+            </a:r>
+            <a:endParaRPr kumimoji="0" lang="en-US" altLang="ja-JP" sz="1200" kern="0" dirty="0">
+              <a:solidFill>
+                <a:srgbClr val="000000"/>
+              </a:solidFill>
+              <a:latin typeface="Arial"/>
+              <a:ea typeface="Meiryo UI"/>
+            </a:endParaRPr>
+          </a:p>
+        </p:txBody>
+      </p:sp>
+      <p:sp>
+        <p:nvSpPr>
+          <p:cNvPr id="20" name="四角形: 角を丸くする 19">
+            <a:extLst>
+              <a:ext uri="{FF2B5EF4-FFF2-40B4-BE49-F238E27FC236}">
+                <a16:creationId xmlns:a16="http://schemas.microsoft.com/office/drawing/2014/main" id="{D424CA0C-8E12-5E3A-65CE-5B55702DC99B}"/>
+              </a:ext>
+            </a:extLst>
+          </p:cNvPr>
+          <p:cNvSpPr/>
+          <p:nvPr/>
+        </p:nvSpPr>
+        <p:spPr>
+          <a:xfrm>
+            <a:off x="8490393" y="2318179"/>
+            <a:ext cx="3240000" cy="360000"/>
+          </a:xfrm>
+          <a:prstGeom prst="roundRect">
+            <a:avLst/>
+          </a:prstGeom>
+          <a:solidFill>
+            <a:srgbClr val="FFFFFF"/>
+          </a:solidFill>
+          <a:ln w="3175" cap="flat" cmpd="sng" algn="ctr">
+            <a:solidFill>
+              <a:srgbClr val="000000"/>
+            </a:solidFill>
+            <a:prstDash val="solid"/>
+          </a:ln>
+          <a:effectLst/>
+        </p:spPr>
+        <p:txBody>
+          <a:bodyPr rot="0" spcFirstLastPara="0" vertOverflow="overflow" horzOverflow="overflow" vert="horz" wrap="square" lIns="36000" tIns="36000" rIns="36000" bIns="36000" numCol="1" spcCol="0" rtlCol="0" fromWordArt="0" anchor="ctr" anchorCtr="0" forceAA="0" compatLnSpc="1">
+            <a:prstTxWarp prst="textNoShape">
+              <a:avLst/>
+            </a:prstTxWarp>
+            <a:noAutofit/>
+          </a:bodyPr>
+          <a:lstStyle/>
+          <a:p>
+            <a:pPr marL="0" marR="0" lvl="0" indent="0" algn="ctr" defTabSz="914400" eaLnBrk="1" fontAlgn="auto" latinLnBrk="0" hangingPunct="1">
+              <a:lnSpc>
+                <a:spcPct val="100000"/>
+              </a:lnSpc>
+              <a:spcBef>
+                <a:spcPts val="0"/>
+              </a:spcBef>
+              <a:spcAft>
+                <a:spcPts val="0"/>
+              </a:spcAft>
+              <a:buClrTx/>
+              <a:buSzTx/>
+              <a:buFontTx/>
+              <a:buNone/>
+              <a:tabLst/>
+              <a:defRPr/>
+            </a:pPr>
+            <a:r>
+              <a:rPr kumimoji="0" lang="ja-JP" altLang="en-US" sz="1200" b="0" i="0" u="none" strike="noStrike" kern="0" cap="none" spc="0" normalizeH="0" baseline="0" noProof="0" dirty="0">
+                <a:ln>
+                  <a:noFill/>
+                </a:ln>
+                <a:solidFill>
+                  <a:srgbClr val="000000"/>
+                </a:solidFill>
+                <a:effectLst/>
+                <a:uLnTx/>
+                <a:uFillTx/>
+                <a:latin typeface="Arial"/>
+                <a:ea typeface="Meiryo UI"/>
+                <a:cs typeface="+mn-cs"/>
+              </a:rPr>
+              <a:t>アプリケーションの比較・分析</a:t>
+            </a:r>
+            <a:endParaRPr kumimoji="0" lang="en-US" altLang="ja-JP" sz="1200" b="0" i="0" u="none" strike="noStrike" kern="0" cap="none" spc="0" normalizeH="0" baseline="0" noProof="0" dirty="0">
+              <a:ln>
+                <a:noFill/>
+              </a:ln>
+              <a:solidFill>
+                <a:srgbClr val="000000"/>
+              </a:solidFill>
+              <a:effectLst/>
+              <a:uLnTx/>
+              <a:uFillTx/>
+              <a:latin typeface="Arial"/>
+              <a:ea typeface="Meiryo UI"/>
+              <a:cs typeface="+mn-cs"/>
+            </a:endParaRPr>
+          </a:p>
+        </p:txBody>
+      </p:sp>
+      <p:sp>
+        <p:nvSpPr>
+          <p:cNvPr id="22" name="矢印: 下 21">
+            <a:extLst>
+              <a:ext uri="{FF2B5EF4-FFF2-40B4-BE49-F238E27FC236}">
+                <a16:creationId xmlns:a16="http://schemas.microsoft.com/office/drawing/2014/main" id="{C5B630DE-28DD-3C94-B623-1E29B13C72A3}"/>
+              </a:ext>
+            </a:extLst>
+          </p:cNvPr>
+          <p:cNvSpPr/>
+          <p:nvPr/>
+        </p:nvSpPr>
+        <p:spPr>
+          <a:xfrm rot="16200000">
+            <a:off x="7917161" y="2408178"/>
+            <a:ext cx="360000" cy="180000"/>
+          </a:xfrm>
+          <a:prstGeom prst="downArrow">
+            <a:avLst/>
+          </a:prstGeom>
+          <a:solidFill>
+            <a:schemeClr val="tx1"/>
+          </a:solidFill>
+          <a:ln w="3175" cap="flat" cmpd="sng" algn="ctr">
+            <a:solidFill>
+              <a:srgbClr val="000000"/>
+            </a:solidFill>
+            <a:prstDash val="solid"/>
+          </a:ln>
+          <a:effectLst/>
+        </p:spPr>
+        <p:txBody>
+          <a:bodyPr rot="0" spcFirstLastPara="0" vertOverflow="overflow" horzOverflow="overflow" vert="horz" wrap="square" lIns="36000" tIns="36000" rIns="36000" bIns="36000" numCol="1" spcCol="0" rtlCol="0" fromWordArt="0" anchor="ctr" anchorCtr="0" forceAA="0" compatLnSpc="1">
+            <a:prstTxWarp prst="textNoShape">
+              <a:avLst/>
+            </a:prstTxWarp>
+            <a:noAutofit/>
+          </a:bodyPr>
+          <a:lstStyle/>
+          <a:p>
+            <a:pPr marL="0" marR="0" lvl="0" indent="0" algn="ctr" defTabSz="914400" eaLnBrk="1" fontAlgn="auto" latinLnBrk="0" hangingPunct="1">
+              <a:lnSpc>
+                <a:spcPct val="100000"/>
+              </a:lnSpc>
+              <a:spcBef>
+                <a:spcPts val="0"/>
+              </a:spcBef>
+              <a:spcAft>
+                <a:spcPts val="0"/>
+              </a:spcAft>
+              <a:buClrTx/>
+              <a:buSzTx/>
+              <a:buFontTx/>
+              <a:buNone/>
+              <a:tabLst/>
+              <a:defRPr/>
+            </a:pPr>
+            <a:endParaRPr kumimoji="0" lang="ja-JP" altLang="en-US" sz="1400" b="0" i="0" u="none" strike="noStrike" kern="0" cap="none" spc="0" normalizeH="0" baseline="0" noProof="0" err="1">
+              <a:ln>
+                <a:noFill/>
+              </a:ln>
+              <a:solidFill>
+                <a:srgbClr val="000000"/>
+              </a:solidFill>
+              <a:effectLst/>
+              <a:uLnTx/>
+              <a:uFillTx/>
+              <a:latin typeface="Arial"/>
+              <a:ea typeface="Meiryo UI"/>
+              <a:cs typeface="+mn-cs"/>
+            </a:endParaRPr>
+          </a:p>
+        </p:txBody>
+      </p:sp>
+      <p:sp>
+        <p:nvSpPr>
+          <p:cNvPr id="23" name="四角形: 角を丸くする 22">
+            <a:extLst>
+              <a:ext uri="{FF2B5EF4-FFF2-40B4-BE49-F238E27FC236}">
+                <a16:creationId xmlns:a16="http://schemas.microsoft.com/office/drawing/2014/main" id="{A9D2BD9A-D5F2-7589-1842-299F161CEE95}"/>
+              </a:ext>
+            </a:extLst>
+          </p:cNvPr>
+          <p:cNvSpPr/>
+          <p:nvPr/>
+        </p:nvSpPr>
+        <p:spPr>
+          <a:xfrm>
+            <a:off x="8491653" y="3288793"/>
+            <a:ext cx="3240000" cy="360000"/>
+          </a:xfrm>
+          <a:prstGeom prst="roundRect">
+            <a:avLst/>
+          </a:prstGeom>
+          <a:solidFill>
+            <a:srgbClr val="FFFFFF"/>
+          </a:solidFill>
+          <a:ln w="3175" cap="flat" cmpd="sng" algn="ctr">
+            <a:solidFill>
+              <a:srgbClr val="000000"/>
+            </a:solidFill>
+            <a:prstDash val="solid"/>
+          </a:ln>
+          <a:effectLst/>
+        </p:spPr>
+        <p:txBody>
+          <a:bodyPr rot="0" spcFirstLastPara="0" vertOverflow="overflow" horzOverflow="overflow" vert="horz" wrap="square" lIns="36000" tIns="36000" rIns="36000" bIns="36000" numCol="1" spcCol="0" rtlCol="0" fromWordArt="0" anchor="ctr" anchorCtr="0" forceAA="0" compatLnSpc="1">
+            <a:prstTxWarp prst="textNoShape">
+              <a:avLst/>
+            </a:prstTxWarp>
+            <a:noAutofit/>
+          </a:bodyPr>
+          <a:lstStyle/>
+          <a:p>
+            <a:pPr lvl="0" algn="ctr">
+              <a:defRPr/>
+            </a:pPr>
+            <a:r>
+              <a:rPr kumimoji="0" lang="ja-JP" altLang="en-US" sz="1200" kern="0" dirty="0">
+                <a:solidFill>
+                  <a:srgbClr val="000000"/>
+                </a:solidFill>
+                <a:latin typeface="Arial"/>
+                <a:ea typeface="Meiryo UI"/>
+              </a:rPr>
+              <a:t>比較・分析結果の共有</a:t>
+            </a:r>
+            <a:endParaRPr kumimoji="0" lang="en-US" altLang="ja-JP" sz="1200" kern="0" dirty="0">
+              <a:solidFill>
+                <a:srgbClr val="000000"/>
+              </a:solidFill>
+              <a:latin typeface="Arial"/>
+              <a:ea typeface="Meiryo UI"/>
+            </a:endParaRPr>
           </a:p>
         </p:txBody>
       </p:sp>
@@ -8713,6 +9444,9 @@
               <a:rPr lang="ja-JP" altLang="en-US" dirty="0"/>
               <a:t>を利用した</a:t>
             </a:r>
+            <a:br>
+              <a:rPr lang="en-US" altLang="ja-JP" dirty="0"/>
+            </a:br>
             <a:r>
               <a:rPr lang="en-US" altLang="ja-JP" dirty="0"/>
               <a:t>Git</a:t>
@@ -8754,10 +9488,10 @@
       </p:sp>
       <p:pic>
         <p:nvPicPr>
-          <p:cNvPr id="7" name="図 6">
-            <a:extLst>
-              <a:ext uri="{FF2B5EF4-FFF2-40B4-BE49-F238E27FC236}">
-                <a16:creationId xmlns:a16="http://schemas.microsoft.com/office/drawing/2014/main" id="{A0234CF0-E1C7-467B-B3BD-DA674E8CE111}"/>
+          <p:cNvPr id="5" name="図 4">
+            <a:extLst>
+              <a:ext uri="{FF2B5EF4-FFF2-40B4-BE49-F238E27FC236}">
+                <a16:creationId xmlns:a16="http://schemas.microsoft.com/office/drawing/2014/main" id="{7EE1383F-6BB1-6426-18A2-5BBA545C899C}"/>
               </a:ext>
             </a:extLst>
           </p:cNvPr>
@@ -8774,8 +9508,8 @@
         </p:blipFill>
         <p:spPr>
           <a:xfrm>
-            <a:off x="9298800" y="730800"/>
-            <a:ext cx="2520000" cy="2922529"/>
+            <a:off x="8360035" y="1073020"/>
+            <a:ext cx="3664014" cy="4249280"/>
           </a:xfrm>
           <a:prstGeom prst="rect">
             <a:avLst/>
@@ -8959,7 +9693,33 @@
             <a:pPr lvl="2"/>
             <a:r>
               <a:rPr lang="ja-JP" altLang="en-US" dirty="0"/>
-              <a:t>ハンズオンで学習した手順を基に、各自で残りの単体テストを実施する。</a:t>
+              <a:t>ハンズオンで学習した手順を基に、</a:t>
+            </a:r>
+            <a:br>
+              <a:rPr lang="en-US" altLang="ja-JP" dirty="0"/>
+            </a:br>
+            <a:r>
+              <a:rPr lang="ja-JP" altLang="en-US" dirty="0"/>
+              <a:t>各自で残りの単体テストを実施する。</a:t>
+            </a:r>
+            <a:endParaRPr lang="en-US" altLang="ja-JP" dirty="0"/>
+          </a:p>
+          <a:p>
+            <a:pPr lvl="2"/>
+            <a:r>
+              <a:rPr lang="ja-JP" altLang="en-US" dirty="0"/>
+              <a:t>不具合が発生した場合、</a:t>
+            </a:r>
+            <a:br>
+              <a:rPr lang="en-US" altLang="ja-JP" dirty="0"/>
+            </a:br>
+            <a:r>
+              <a:rPr lang="en-US" altLang="ja-JP" dirty="0"/>
+              <a:t>Web</a:t>
+            </a:r>
+            <a:r>
+              <a:rPr lang="ja-JP" altLang="en-US" dirty="0"/>
+              <a:t>アプリケーションを修正する。</a:t>
             </a:r>
             <a:endParaRPr lang="en-US" altLang="ja-JP" dirty="0"/>
           </a:p>
@@ -8967,10 +9727,10 @@
       </p:sp>
       <p:pic>
         <p:nvPicPr>
-          <p:cNvPr id="4" name="図 3">
-            <a:extLst>
-              <a:ext uri="{FF2B5EF4-FFF2-40B4-BE49-F238E27FC236}">
-                <a16:creationId xmlns:a16="http://schemas.microsoft.com/office/drawing/2014/main" id="{DC06E452-AE76-3796-CC78-8A017D70A216}"/>
+          <p:cNvPr id="6" name="図 5">
+            <a:extLst>
+              <a:ext uri="{FF2B5EF4-FFF2-40B4-BE49-F238E27FC236}">
+                <a16:creationId xmlns:a16="http://schemas.microsoft.com/office/drawing/2014/main" id="{273090A3-582E-448D-E6B4-C72FD3F1EABB}"/>
               </a:ext>
             </a:extLst>
           </p:cNvPr>
@@ -8987,8 +9747,8 @@
         </p:blipFill>
         <p:spPr>
           <a:xfrm>
-            <a:off x="9298800" y="730800"/>
-            <a:ext cx="2520000" cy="2293577"/>
+            <a:off x="8359711" y="1073150"/>
+            <a:ext cx="3664014" cy="3334801"/>
           </a:xfrm>
           <a:prstGeom prst="rect">
             <a:avLst/>
@@ -8999,6 +9759,255 @@
     <p:extLst>
       <p:ext uri="{BB962C8B-B14F-4D97-AF65-F5344CB8AC3E}">
         <p14:creationId xmlns:p14="http://schemas.microsoft.com/office/powerpoint/2010/main" val="3033250276"/>
+      </p:ext>
+    </p:extLst>
+  </p:cSld>
+  <p:clrMapOvr>
+    <a:masterClrMapping/>
+  </p:clrMapOvr>
+</p:sld>
+</file>
+
+<file path=ppt/slides/slide6.xml><?xml version="1.0" encoding="utf-8"?>
+<p:sld xmlns:a="http://schemas.openxmlformats.org/drawingml/2006/main" xmlns:r="http://schemas.openxmlformats.org/officeDocument/2006/relationships" xmlns:p="http://schemas.openxmlformats.org/presentationml/2006/main">
+  <p:cSld>
+    <p:spTree>
+      <p:nvGrpSpPr>
+        <p:cNvPr id="1" name="">
+          <a:extLst>
+            <a:ext uri="{FF2B5EF4-FFF2-40B4-BE49-F238E27FC236}">
+              <a16:creationId xmlns:a16="http://schemas.microsoft.com/office/drawing/2014/main" id="{7CC4E6F9-BB03-9858-6DA4-2D8EB9A7820C}"/>
+            </a:ext>
+          </a:extLst>
+        </p:cNvPr>
+        <p:cNvGrpSpPr/>
+        <p:nvPr/>
+      </p:nvGrpSpPr>
+      <p:grpSpPr>
+        <a:xfrm>
+          <a:off x="0" y="0"/>
+          <a:ext cx="0" cy="0"/>
+          <a:chOff x="0" y="0"/>
+          <a:chExt cx="0" cy="0"/>
+        </a:xfrm>
+      </p:grpSpPr>
+      <p:sp>
+        <p:nvSpPr>
+          <p:cNvPr id="5" name="タイトル 4">
+            <a:extLst>
+              <a:ext uri="{FF2B5EF4-FFF2-40B4-BE49-F238E27FC236}">
+                <a16:creationId xmlns:a16="http://schemas.microsoft.com/office/drawing/2014/main" id="{9129C64F-BDE7-3CDF-E6DB-E1532E4EDA2D}"/>
+              </a:ext>
+            </a:extLst>
+          </p:cNvPr>
+          <p:cNvSpPr>
+            <a:spLocks noGrp="1"/>
+          </p:cNvSpPr>
+          <p:nvPr>
+            <p:ph type="title"/>
+          </p:nvPr>
+        </p:nvSpPr>
+        <p:spPr>
+          <a:xfrm>
+            <a:off x="167951" y="365124"/>
+            <a:ext cx="11877869" cy="540000"/>
+          </a:xfrm>
+        </p:spPr>
+        <p:txBody>
+          <a:bodyPr>
+            <a:normAutofit/>
+          </a:bodyPr>
+          <a:lstStyle/>
+          <a:p>
+            <a:r>
+              <a:rPr lang="ja-JP" altLang="en-US" dirty="0"/>
+              <a:t>振り返りについて</a:t>
+            </a:r>
+          </a:p>
+        </p:txBody>
+      </p:sp>
+      <p:sp>
+        <p:nvSpPr>
+          <p:cNvPr id="3" name="コンテンツ プレースホルダー 2">
+            <a:extLst>
+              <a:ext uri="{FF2B5EF4-FFF2-40B4-BE49-F238E27FC236}">
+                <a16:creationId xmlns:a16="http://schemas.microsoft.com/office/drawing/2014/main" id="{FF7A5F1C-30DC-5005-CE6C-CF9813BA7FDD}"/>
+              </a:ext>
+            </a:extLst>
+          </p:cNvPr>
+          <p:cNvSpPr>
+            <a:spLocks noGrp="1"/>
+          </p:cNvSpPr>
+          <p:nvPr>
+            <p:ph idx="1"/>
+          </p:nvPr>
+        </p:nvSpPr>
+        <p:spPr>
+          <a:xfrm>
+            <a:off x="168275" y="1073150"/>
+            <a:ext cx="11877675" cy="5103813"/>
+          </a:xfrm>
+        </p:spPr>
+        <p:txBody>
+          <a:bodyPr>
+            <a:normAutofit/>
+          </a:bodyPr>
+          <a:lstStyle/>
+          <a:p>
+            <a:r>
+              <a:rPr lang="ja-JP" altLang="en-US" dirty="0"/>
+              <a:t>振り返りの流れ</a:t>
+            </a:r>
+            <a:endParaRPr lang="en-US" altLang="ja-JP" dirty="0"/>
+          </a:p>
+          <a:p>
+            <a:pPr marL="914400" lvl="1" indent="-457200">
+              <a:buFont typeface="+mj-lt"/>
+              <a:buAutoNum type="arabicPeriod"/>
+            </a:pPr>
+            <a:r>
+              <a:rPr lang="ja-JP" altLang="en-US" dirty="0"/>
+              <a:t>アプリケーションの比較・分析</a:t>
+            </a:r>
+            <a:endParaRPr lang="en-US" altLang="ja-JP" dirty="0"/>
+          </a:p>
+          <a:p>
+            <a:pPr lvl="2"/>
+            <a:r>
+              <a:rPr lang="ja-JP" altLang="en-US" dirty="0"/>
+              <a:t>自身が作成したアプリケーションと</a:t>
+            </a:r>
+            <a:br>
+              <a:rPr lang="en-US" altLang="ja-JP" dirty="0"/>
+            </a:br>
+            <a:r>
+              <a:rPr lang="ja-JP" altLang="en-US" dirty="0"/>
+              <a:t>講師配布のアプリケーションを比較する。</a:t>
+            </a:r>
+            <a:endParaRPr lang="en-US" altLang="ja-JP" dirty="0"/>
+          </a:p>
+          <a:p>
+            <a:pPr lvl="3"/>
+            <a:r>
+              <a:rPr lang="ja-JP" altLang="en-US" dirty="0"/>
+              <a:t>実装方法</a:t>
+            </a:r>
+            <a:endParaRPr lang="en-US" altLang="ja-JP" dirty="0"/>
+          </a:p>
+          <a:p>
+            <a:pPr lvl="3"/>
+            <a:r>
+              <a:rPr lang="ja-JP" altLang="en-US" dirty="0"/>
+              <a:t>画面構成</a:t>
+            </a:r>
+            <a:endParaRPr lang="en-US" altLang="ja-JP" dirty="0"/>
+          </a:p>
+          <a:p>
+            <a:pPr lvl="3"/>
+            <a:r>
+              <a:rPr lang="ja-JP" altLang="en-US" dirty="0"/>
+              <a:t>コードの記述方法など</a:t>
+            </a:r>
+            <a:endParaRPr lang="en-US" altLang="ja-JP" dirty="0"/>
+          </a:p>
+          <a:p>
+            <a:pPr marL="914400" lvl="1" indent="-457200">
+              <a:buFont typeface="+mj-lt"/>
+              <a:buAutoNum type="arabicPeriod"/>
+            </a:pPr>
+            <a:r>
+              <a:rPr lang="ja-JP" altLang="en-US" dirty="0"/>
+              <a:t>改善点の整理</a:t>
+            </a:r>
+            <a:endParaRPr lang="en-US" altLang="ja-JP" dirty="0"/>
+          </a:p>
+          <a:p>
+            <a:pPr lvl="2"/>
+            <a:r>
+              <a:rPr lang="ja-JP" altLang="en-US" dirty="0"/>
+              <a:t>比較・分析した結果をもとに、自身のアプリケーションの改善点を整理する。</a:t>
+            </a:r>
+            <a:endParaRPr lang="en-US" altLang="ja-JP" dirty="0"/>
+          </a:p>
+          <a:p>
+            <a:pPr lvl="3"/>
+            <a:r>
+              <a:rPr lang="ja-JP" altLang="en-US" dirty="0"/>
+              <a:t>実装方法</a:t>
+            </a:r>
+            <a:endParaRPr lang="en-US" altLang="ja-JP" dirty="0"/>
+          </a:p>
+          <a:p>
+            <a:pPr lvl="3"/>
+            <a:r>
+              <a:rPr lang="ja-JP" altLang="en-US" dirty="0"/>
+              <a:t>可読性</a:t>
+            </a:r>
+            <a:endParaRPr lang="en-US" altLang="ja-JP" dirty="0"/>
+          </a:p>
+          <a:p>
+            <a:pPr lvl="3"/>
+            <a:r>
+              <a:rPr lang="ja-JP" altLang="en-US" dirty="0"/>
+              <a:t>保守性など</a:t>
+            </a:r>
+            <a:endParaRPr lang="en-US" altLang="ja-JP" dirty="0"/>
+          </a:p>
+          <a:p>
+            <a:pPr marL="914400" lvl="1" indent="-457200">
+              <a:buFont typeface="+mj-lt"/>
+              <a:buAutoNum type="arabicPeriod"/>
+            </a:pPr>
+            <a:r>
+              <a:rPr lang="ja-JP" altLang="en-US" dirty="0"/>
+              <a:t>比較・分析結果の共有</a:t>
+            </a:r>
+            <a:endParaRPr lang="en-US" altLang="ja-JP" dirty="0"/>
+          </a:p>
+          <a:p>
+            <a:pPr lvl="2"/>
+            <a:r>
+              <a:rPr lang="ja-JP" altLang="en-US" dirty="0"/>
+              <a:t>比較・分析した結果や改善点をチーム内で共有する。</a:t>
+            </a:r>
+            <a:endParaRPr lang="en-US" altLang="ja-JP" dirty="0"/>
+          </a:p>
+        </p:txBody>
+      </p:sp>
+      <p:pic>
+        <p:nvPicPr>
+          <p:cNvPr id="9" name="図 8">
+            <a:extLst>
+              <a:ext uri="{FF2B5EF4-FFF2-40B4-BE49-F238E27FC236}">
+                <a16:creationId xmlns:a16="http://schemas.microsoft.com/office/drawing/2014/main" id="{00A0A1D1-3352-6216-4793-0D5317F01303}"/>
+              </a:ext>
+            </a:extLst>
+          </p:cNvPr>
+          <p:cNvPicPr>
+            <a:picLocks noChangeAspect="1"/>
+          </p:cNvPicPr>
+          <p:nvPr/>
+        </p:nvPicPr>
+        <p:blipFill>
+          <a:blip r:embed="rId3"/>
+          <a:stretch>
+            <a:fillRect/>
+          </a:stretch>
+        </p:blipFill>
+        <p:spPr>
+          <a:xfrm>
+            <a:off x="8414580" y="1073150"/>
+            <a:ext cx="3609145" cy="2182557"/>
+          </a:xfrm>
+          <a:prstGeom prst="rect">
+            <a:avLst/>
+          </a:prstGeom>
+        </p:spPr>
+      </p:pic>
+    </p:spTree>
+    <p:extLst>
+      <p:ext uri="{BB962C8B-B14F-4D97-AF65-F5344CB8AC3E}">
+        <p14:creationId xmlns:p14="http://schemas.microsoft.com/office/powerpoint/2010/main" val="181301465"/>
       </p:ext>
     </p:extLst>
   </p:cSld>

--- a/00_オリエンテーション/【AI Native研修-バイブコーディング】研修の概要.pptx
+++ b/00_オリエンテーション/【AI Native研修-バイブコーディング】研修の概要.pptx
@@ -7912,7 +7912,7 @@
           <a:p>
             <a:r>
               <a:rPr lang="ja-JP" altLang="en-US" dirty="0"/>
-              <a:t>課題①</a:t>
+              <a:t>課題１</a:t>
             </a:r>
             <a:endParaRPr lang="en-US" altLang="ja-JP" dirty="0"/>
           </a:p>
@@ -7955,7 +7955,7 @@
           <a:p>
             <a:r>
               <a:rPr lang="ja-JP" altLang="en-US" dirty="0"/>
-              <a:t>課題②</a:t>
+              <a:t>課題２</a:t>
             </a:r>
             <a:endParaRPr lang="en-US" altLang="ja-JP" dirty="0"/>
           </a:p>
@@ -7963,7 +7963,7 @@
             <a:pPr lvl="1"/>
             <a:r>
               <a:rPr lang="ja-JP" altLang="en-US" dirty="0"/>
-              <a:t>課題①で作成した</a:t>
+              <a:t>課題１で作成した</a:t>
             </a:r>
             <a:r>
               <a:rPr lang="en-US" altLang="ja-JP" dirty="0"/>
@@ -8128,7 +8128,7 @@
                   <a:schemeClr val="tx1"/>
                 </a:solidFill>
               </a:rPr>
-              <a:t>課題①</a:t>
+              <a:t>課題１</a:t>
             </a:r>
           </a:p>
         </p:txBody>
@@ -8284,21 +8284,8 @@
                   <a:schemeClr val="tx1"/>
                 </a:solidFill>
               </a:rPr>
-              <a:t>課題</a:t>
-            </a:r>
-            <a:r>
-              <a:rPr lang="ja-JP" altLang="en-US" b="1" dirty="0">
-                <a:solidFill>
-                  <a:schemeClr val="tx1"/>
-                </a:solidFill>
-              </a:rPr>
-              <a:t>②</a:t>
-            </a:r>
-            <a:endParaRPr kumimoji="1" lang="ja-JP" altLang="en-US" b="1" dirty="0">
-              <a:solidFill>
-                <a:schemeClr val="tx1"/>
-              </a:solidFill>
-            </a:endParaRPr>
+              <a:t>課題２</a:t>
+            </a:r>
           </a:p>
         </p:txBody>
       </p:sp>

--- a/00_オリエンテーション/【AI Native研修-バイブコーディング】研修の概要.pptx
+++ b/00_オリエンテーション/【AI Native研修-バイブコーディング】研修の概要.pptx
@@ -5,15 +5,14 @@
     <p:sldMasterId id="2147483648" r:id="rId1"/>
   </p:sldMasterIdLst>
   <p:notesMasterIdLst>
-    <p:notesMasterId r:id="rId8"/>
+    <p:notesMasterId r:id="rId7"/>
   </p:notesMasterIdLst>
   <p:sldIdLst>
     <p:sldId id="256" r:id="rId2"/>
     <p:sldId id="257" r:id="rId3"/>
-    <p:sldId id="262" r:id="rId4"/>
-    <p:sldId id="259" r:id="rId5"/>
-    <p:sldId id="260" r:id="rId6"/>
-    <p:sldId id="263" r:id="rId7"/>
+    <p:sldId id="259" r:id="rId4"/>
+    <p:sldId id="260" r:id="rId5"/>
+    <p:sldId id="263" r:id="rId6"/>
   </p:sldIdLst>
   <p:sldSz cx="12192000" cy="6858000"/>
   <p:notesSz cx="6858000" cy="9144000"/>
@@ -593,114 +592,6 @@
         <p:cNvPr id="1" name="">
           <a:extLst>
             <a:ext uri="{FF2B5EF4-FFF2-40B4-BE49-F238E27FC236}">
-              <a16:creationId xmlns:a16="http://schemas.microsoft.com/office/drawing/2014/main" id="{481AA336-75C3-CD9B-DD81-FDF8321B71BF}"/>
-            </a:ext>
-          </a:extLst>
-        </p:cNvPr>
-        <p:cNvGrpSpPr/>
-        <p:nvPr/>
-      </p:nvGrpSpPr>
-      <p:grpSpPr>
-        <a:xfrm>
-          <a:off x="0" y="0"/>
-          <a:ext cx="0" cy="0"/>
-          <a:chOff x="0" y="0"/>
-          <a:chExt cx="0" cy="0"/>
-        </a:xfrm>
-      </p:grpSpPr>
-      <p:sp>
-        <p:nvSpPr>
-          <p:cNvPr id="2" name="スライド イメージ プレースホルダー 1">
-            <a:extLst>
-              <a:ext uri="{FF2B5EF4-FFF2-40B4-BE49-F238E27FC236}">
-                <a16:creationId xmlns:a16="http://schemas.microsoft.com/office/drawing/2014/main" id="{7F3BBA8C-384A-3178-FDF8-B082A5EF4449}"/>
-              </a:ext>
-            </a:extLst>
-          </p:cNvPr>
-          <p:cNvSpPr>
-            <a:spLocks noGrp="1" noRot="1" noChangeAspect="1"/>
-          </p:cNvSpPr>
-          <p:nvPr>
-            <p:ph type="sldImg"/>
-          </p:nvPr>
-        </p:nvSpPr>
-        <p:spPr/>
-      </p:sp>
-      <p:sp>
-        <p:nvSpPr>
-          <p:cNvPr id="3" name="ノート プレースホルダー 2">
-            <a:extLst>
-              <a:ext uri="{FF2B5EF4-FFF2-40B4-BE49-F238E27FC236}">
-                <a16:creationId xmlns:a16="http://schemas.microsoft.com/office/drawing/2014/main" id="{CEA09C0A-0869-4E79-1C96-C64810BA662B}"/>
-              </a:ext>
-            </a:extLst>
-          </p:cNvPr>
-          <p:cNvSpPr>
-            <a:spLocks noGrp="1"/>
-          </p:cNvSpPr>
-          <p:nvPr>
-            <p:ph type="body" idx="1"/>
-          </p:nvPr>
-        </p:nvSpPr>
-        <p:spPr/>
-        <p:txBody>
-          <a:bodyPr/>
-          <a:lstStyle/>
-          <a:p>
-            <a:endParaRPr kumimoji="1" lang="ja-JP" altLang="en-US" dirty="0"/>
-          </a:p>
-        </p:txBody>
-      </p:sp>
-      <p:sp>
-        <p:nvSpPr>
-          <p:cNvPr id="4" name="スライド番号プレースホルダー 3">
-            <a:extLst>
-              <a:ext uri="{FF2B5EF4-FFF2-40B4-BE49-F238E27FC236}">
-                <a16:creationId xmlns:a16="http://schemas.microsoft.com/office/drawing/2014/main" id="{71E7B48C-5AB3-9943-9970-20FAF701AEF5}"/>
-              </a:ext>
-            </a:extLst>
-          </p:cNvPr>
-          <p:cNvSpPr>
-            <a:spLocks noGrp="1"/>
-          </p:cNvSpPr>
-          <p:nvPr>
-            <p:ph type="sldNum" sz="quarter" idx="5"/>
-          </p:nvPr>
-        </p:nvSpPr>
-        <p:spPr/>
-        <p:txBody>
-          <a:bodyPr/>
-          <a:lstStyle/>
-          <a:p>
-            <a:fld id="{A58A0B64-6D67-42B8-83A5-133498884D56}" type="slidenum">
-              <a:rPr kumimoji="1" lang="ja-JP" altLang="en-US" smtClean="0"/>
-              <a:t>3</a:t>
-            </a:fld>
-            <a:endParaRPr kumimoji="1" lang="ja-JP" altLang="en-US"/>
-          </a:p>
-        </p:txBody>
-      </p:sp>
-    </p:spTree>
-    <p:extLst>
-      <p:ext uri="{BB962C8B-B14F-4D97-AF65-F5344CB8AC3E}">
-        <p14:creationId xmlns:p14="http://schemas.microsoft.com/office/powerpoint/2010/main" val="829269738"/>
-      </p:ext>
-    </p:extLst>
-  </p:cSld>
-  <p:clrMapOvr>
-    <a:masterClrMapping/>
-  </p:clrMapOvr>
-</p:notes>
-</file>
-
-<file path=ppt/notesSlides/notesSlide3.xml><?xml version="1.0" encoding="utf-8"?>
-<p:notes xmlns:a="http://schemas.openxmlformats.org/drawingml/2006/main" xmlns:r="http://schemas.openxmlformats.org/officeDocument/2006/relationships" xmlns:p="http://schemas.openxmlformats.org/presentationml/2006/main">
-  <p:cSld>
-    <p:spTree>
-      <p:nvGrpSpPr>
-        <p:cNvPr id="1" name="">
-          <a:extLst>
-            <a:ext uri="{FF2B5EF4-FFF2-40B4-BE49-F238E27FC236}">
               <a16:creationId xmlns:a16="http://schemas.microsoft.com/office/drawing/2014/main" id="{EBD93ED5-9666-7F1B-85EF-FF6C29A43EB8}"/>
             </a:ext>
           </a:extLst>
@@ -782,7 +673,7 @@
           <a:p>
             <a:fld id="{A58A0B64-6D67-42B8-83A5-133498884D56}" type="slidenum">
               <a:rPr kumimoji="1" lang="ja-JP" altLang="en-US" smtClean="0"/>
-              <a:t>4</a:t>
+              <a:t>3</a:t>
             </a:fld>
             <a:endParaRPr kumimoji="1" lang="ja-JP" altLang="en-US"/>
           </a:p>
@@ -801,7 +692,7 @@
 </p:notes>
 </file>
 
-<file path=ppt/notesSlides/notesSlide4.xml><?xml version="1.0" encoding="utf-8"?>
+<file path=ppt/notesSlides/notesSlide3.xml><?xml version="1.0" encoding="utf-8"?>
 <p:notes xmlns:a="http://schemas.openxmlformats.org/drawingml/2006/main" xmlns:r="http://schemas.openxmlformats.org/officeDocument/2006/relationships" xmlns:p="http://schemas.openxmlformats.org/presentationml/2006/main">
   <p:cSld>
     <p:spTree>
@@ -890,7 +781,7 @@
           <a:p>
             <a:fld id="{A58A0B64-6D67-42B8-83A5-133498884D56}" type="slidenum">
               <a:rPr kumimoji="1" lang="ja-JP" altLang="en-US" smtClean="0"/>
-              <a:t>5</a:t>
+              <a:t>4</a:t>
             </a:fld>
             <a:endParaRPr kumimoji="1" lang="ja-JP" altLang="en-US"/>
           </a:p>
@@ -909,7 +800,7 @@
 </p:notes>
 </file>
 
-<file path=ppt/notesSlides/notesSlide5.xml><?xml version="1.0" encoding="utf-8"?>
+<file path=ppt/notesSlides/notesSlide4.xml><?xml version="1.0" encoding="utf-8"?>
 <p:notes xmlns:a="http://schemas.openxmlformats.org/drawingml/2006/main" xmlns:r="http://schemas.openxmlformats.org/officeDocument/2006/relationships" xmlns:p="http://schemas.openxmlformats.org/presentationml/2006/main">
   <p:cSld>
     <p:spTree>
@@ -998,7 +889,7 @@
           <a:p>
             <a:fld id="{A58A0B64-6D67-42B8-83A5-133498884D56}" type="slidenum">
               <a:rPr kumimoji="1" lang="ja-JP" altLang="en-US" smtClean="0"/>
-              <a:t>6</a:t>
+              <a:t>5</a:t>
             </a:fld>
             <a:endParaRPr kumimoji="1" lang="ja-JP" altLang="en-US"/>
           </a:p>
@@ -7738,1260 +7629,6 @@
         <p:cNvPr id="1" name="">
           <a:extLst>
             <a:ext uri="{FF2B5EF4-FFF2-40B4-BE49-F238E27FC236}">
-              <a16:creationId xmlns:a16="http://schemas.microsoft.com/office/drawing/2014/main" id="{64037E58-8B60-786B-44B9-0C5D8487152A}"/>
-            </a:ext>
-          </a:extLst>
-        </p:cNvPr>
-        <p:cNvGrpSpPr/>
-        <p:nvPr/>
-      </p:nvGrpSpPr>
-      <p:grpSpPr>
-        <a:xfrm>
-          <a:off x="0" y="0"/>
-          <a:ext cx="0" cy="0"/>
-          <a:chOff x="0" y="0"/>
-          <a:chExt cx="0" cy="0"/>
-        </a:xfrm>
-      </p:grpSpPr>
-      <p:pic>
-        <p:nvPicPr>
-          <p:cNvPr id="59" name="Picture 8" descr="ウェブブラウザーのアイコン | フリーのアイコンイラスト素材 icon-pit">
-            <a:extLst>
-              <a:ext uri="{FF2B5EF4-FFF2-40B4-BE49-F238E27FC236}">
-                <a16:creationId xmlns:a16="http://schemas.microsoft.com/office/drawing/2014/main" id="{FE5E833F-75B4-D73C-6039-DACC4C583ECB}"/>
-              </a:ext>
-            </a:extLst>
-          </p:cNvPr>
-          <p:cNvPicPr>
-            <a:picLocks noChangeAspect="1" noChangeArrowheads="1"/>
-          </p:cNvPicPr>
-          <p:nvPr/>
-        </p:nvPicPr>
-        <p:blipFill>
-          <a:blip r:embed="rId3">
-            <a:extLst>
-              <a:ext uri="{28A0092B-C50C-407E-A947-70E740481C1C}">
-                <a14:useLocalDpi xmlns:a14="http://schemas.microsoft.com/office/drawing/2010/main" val="0"/>
-              </a:ext>
-            </a:extLst>
-          </a:blip>
-          <a:srcRect/>
-          <a:stretch>
-            <a:fillRect/>
-          </a:stretch>
-        </p:blipFill>
-        <p:spPr bwMode="auto">
-          <a:xfrm>
-            <a:off x="8729196" y="4611453"/>
-            <a:ext cx="1531777" cy="1531777"/>
-          </a:xfrm>
-          <a:prstGeom prst="rect">
-            <a:avLst/>
-          </a:prstGeom>
-          <a:noFill/>
-          <a:extLst>
-            <a:ext uri="{909E8E84-426E-40DD-AFC4-6F175D3DCCD1}">
-              <a14:hiddenFill xmlns:a14="http://schemas.microsoft.com/office/drawing/2010/main">
-                <a:solidFill>
-                  <a:srgbClr val="FFFFFF"/>
-                </a:solidFill>
-              </a14:hiddenFill>
-            </a:ext>
-          </a:extLst>
-        </p:spPr>
-      </p:pic>
-      <p:pic>
-        <p:nvPicPr>
-          <p:cNvPr id="1032" name="Picture 8" descr="ウェブブラウザーのアイコン | フリーのアイコンイラスト素材 icon-pit">
-            <a:extLst>
-              <a:ext uri="{FF2B5EF4-FFF2-40B4-BE49-F238E27FC236}">
-                <a16:creationId xmlns:a16="http://schemas.microsoft.com/office/drawing/2014/main" id="{E6A23D2A-D3FB-5249-04D3-BB137F42E6EB}"/>
-              </a:ext>
-            </a:extLst>
-          </p:cNvPr>
-          <p:cNvPicPr>
-            <a:picLocks noChangeAspect="1" noChangeArrowheads="1"/>
-          </p:cNvPicPr>
-          <p:nvPr/>
-        </p:nvPicPr>
-        <p:blipFill>
-          <a:blip r:embed="rId3">
-            <a:extLst>
-              <a:ext uri="{28A0092B-C50C-407E-A947-70E740481C1C}">
-                <a14:useLocalDpi xmlns:a14="http://schemas.microsoft.com/office/drawing/2010/main" val="0"/>
-              </a:ext>
-            </a:extLst>
-          </a:blip>
-          <a:srcRect/>
-          <a:stretch>
-            <a:fillRect/>
-          </a:stretch>
-        </p:blipFill>
-        <p:spPr bwMode="auto">
-          <a:xfrm>
-            <a:off x="1058434" y="5564312"/>
-            <a:ext cx="991427" cy="991427"/>
-          </a:xfrm>
-          <a:prstGeom prst="rect">
-            <a:avLst/>
-          </a:prstGeom>
-          <a:noFill/>
-          <a:extLst>
-            <a:ext uri="{909E8E84-426E-40DD-AFC4-6F175D3DCCD1}">
-              <a14:hiddenFill xmlns:a14="http://schemas.microsoft.com/office/drawing/2010/main">
-                <a:solidFill>
-                  <a:srgbClr val="FFFFFF"/>
-                </a:solidFill>
-              </a14:hiddenFill>
-            </a:ext>
-          </a:extLst>
-        </p:spPr>
-      </p:pic>
-      <p:sp>
-        <p:nvSpPr>
-          <p:cNvPr id="13" name="タイトル 12">
-            <a:extLst>
-              <a:ext uri="{FF2B5EF4-FFF2-40B4-BE49-F238E27FC236}">
-                <a16:creationId xmlns:a16="http://schemas.microsoft.com/office/drawing/2014/main" id="{0289634B-65D7-3B24-C52F-C76CB8E19700}"/>
-              </a:ext>
-            </a:extLst>
-          </p:cNvPr>
-          <p:cNvSpPr>
-            <a:spLocks noGrp="1"/>
-          </p:cNvSpPr>
-          <p:nvPr>
-            <p:ph type="title"/>
-          </p:nvPr>
-        </p:nvSpPr>
-        <p:spPr>
-          <a:xfrm>
-            <a:off x="167951" y="365124"/>
-            <a:ext cx="11877869" cy="540000"/>
-          </a:xfrm>
-        </p:spPr>
-        <p:txBody>
-          <a:bodyPr>
-            <a:normAutofit/>
-          </a:bodyPr>
-          <a:lstStyle/>
-          <a:p>
-            <a:r>
-              <a:rPr lang="ja-JP" altLang="en-US" dirty="0"/>
-              <a:t>演習について</a:t>
-            </a:r>
-          </a:p>
-        </p:txBody>
-      </p:sp>
-      <p:sp>
-        <p:nvSpPr>
-          <p:cNvPr id="14" name="コンテンツ プレースホルダー 13">
-            <a:extLst>
-              <a:ext uri="{FF2B5EF4-FFF2-40B4-BE49-F238E27FC236}">
-                <a16:creationId xmlns:a16="http://schemas.microsoft.com/office/drawing/2014/main" id="{A6119A6B-0C81-0313-4CFC-EDD3139BA480}"/>
-              </a:ext>
-            </a:extLst>
-          </p:cNvPr>
-          <p:cNvSpPr>
-            <a:spLocks noGrp="1"/>
-          </p:cNvSpPr>
-          <p:nvPr>
-            <p:ph idx="1"/>
-          </p:nvPr>
-        </p:nvSpPr>
-        <p:spPr>
-          <a:xfrm>
-            <a:off x="168275" y="1073150"/>
-            <a:ext cx="11877675" cy="5103813"/>
-          </a:xfrm>
-        </p:spPr>
-        <p:txBody>
-          <a:bodyPr>
-            <a:normAutofit/>
-          </a:bodyPr>
-          <a:lstStyle/>
-          <a:p>
-            <a:r>
-              <a:rPr lang="ja-JP" altLang="en-US" dirty="0"/>
-              <a:t>課題１</a:t>
-            </a:r>
-            <a:endParaRPr lang="en-US" altLang="ja-JP" dirty="0"/>
-          </a:p>
-          <a:p>
-            <a:pPr lvl="1"/>
-            <a:r>
-              <a:rPr lang="en-US" altLang="ja-JP" dirty="0"/>
-              <a:t>Java</a:t>
-            </a:r>
-            <a:r>
-              <a:rPr lang="ja-JP" altLang="en-US" dirty="0"/>
-              <a:t>、</a:t>
-            </a:r>
-            <a:r>
-              <a:rPr lang="en-US" altLang="ja-JP" dirty="0"/>
-              <a:t>Spring</a:t>
-            </a:r>
-            <a:r>
-              <a:rPr lang="ja-JP" altLang="en-US" dirty="0"/>
-              <a:t>、</a:t>
-            </a:r>
-            <a:r>
-              <a:rPr lang="en-US" altLang="ja-JP" dirty="0"/>
-              <a:t>DB</a:t>
-            </a:r>
-            <a:r>
-              <a:rPr lang="ja-JP" altLang="en-US" dirty="0"/>
-              <a:t>を用いて、</a:t>
-            </a:r>
-            <a:r>
-              <a:rPr lang="en-US" altLang="ja-JP" dirty="0"/>
-              <a:t>Web</a:t>
-            </a:r>
-            <a:r>
-              <a:rPr lang="ja-JP" altLang="en-US" dirty="0"/>
-              <a:t>アプリケーションを作成する。</a:t>
-            </a:r>
-            <a:endParaRPr lang="en-US" altLang="ja-JP" dirty="0"/>
-          </a:p>
-          <a:p>
-            <a:r>
-              <a:rPr lang="ja-JP" altLang="en-US" dirty="0"/>
-              <a:t>課題２</a:t>
-            </a:r>
-            <a:endParaRPr lang="en-US" altLang="ja-JP" dirty="0"/>
-          </a:p>
-          <a:p>
-            <a:pPr lvl="1"/>
-            <a:r>
-              <a:rPr lang="ja-JP" altLang="en-US" dirty="0"/>
-              <a:t>課題１で作成した</a:t>
-            </a:r>
-            <a:r>
-              <a:rPr lang="en-US" altLang="ja-JP" dirty="0"/>
-              <a:t>Web</a:t>
-            </a:r>
-            <a:r>
-              <a:rPr lang="ja-JP" altLang="en-US" dirty="0"/>
-              <a:t>アプリケーションを対象に、テスト仕様書を作成し、その内容に基づいて単体テストを実施する。</a:t>
-            </a:r>
-            <a:endParaRPr lang="en-US" altLang="ja-JP" dirty="0"/>
-          </a:p>
-        </p:txBody>
-      </p:sp>
-      <p:sp>
-        <p:nvSpPr>
-          <p:cNvPr id="17" name="正方形/長方形 16">
-            <a:extLst>
-              <a:ext uri="{FF2B5EF4-FFF2-40B4-BE49-F238E27FC236}">
-                <a16:creationId xmlns:a16="http://schemas.microsoft.com/office/drawing/2014/main" id="{24B6AE76-DE29-4093-B356-B2FA8EBAB3EA}"/>
-              </a:ext>
-            </a:extLst>
-          </p:cNvPr>
-          <p:cNvSpPr/>
-          <p:nvPr/>
-        </p:nvSpPr>
-        <p:spPr>
-          <a:xfrm>
-            <a:off x="654644" y="4114799"/>
-            <a:ext cx="5364373" cy="2525086"/>
-          </a:xfrm>
-          <a:prstGeom prst="rect">
-            <a:avLst/>
-          </a:prstGeom>
-          <a:noFill/>
-          <a:ln w="38100">
-            <a:solidFill>
-              <a:schemeClr val="tx1"/>
-            </a:solidFill>
-          </a:ln>
-          <a:effectLst/>
-        </p:spPr>
-        <p:style>
-          <a:lnRef idx="1">
-            <a:schemeClr val="accent1"/>
-          </a:lnRef>
-          <a:fillRef idx="3">
-            <a:schemeClr val="accent1"/>
-          </a:fillRef>
-          <a:effectRef idx="2">
-            <a:schemeClr val="accent1"/>
-          </a:effectRef>
-          <a:fontRef idx="minor">
-            <a:schemeClr val="lt1"/>
-          </a:fontRef>
-        </p:style>
-        <p:txBody>
-          <a:bodyPr rot="0" spcFirstLastPara="0" vert="horz" wrap="square" lIns="36000" tIns="36000" rIns="36000" bIns="36000" numCol="1" spcCol="0" rtlCol="0" fromWordArt="0" anchor="t" anchorCtr="0" forceAA="0" compatLnSpc="1">
-            <a:prstTxWarp prst="textNoShape">
-              <a:avLst/>
-            </a:prstTxWarp>
-            <a:noAutofit/>
-          </a:bodyPr>
-          <a:lstStyle>
-            <a:defPPr>
-              <a:defRPr lang="ja-JP"/>
-            </a:defPPr>
-            <a:lvl1pPr marL="0" algn="l" defTabSz="914400" rtl="0" eaLnBrk="1" latinLnBrk="0" hangingPunct="1">
-              <a:defRPr kumimoji="1" sz="1800" kern="1200">
-                <a:solidFill>
-                  <a:schemeClr val="lt1"/>
-                </a:solidFill>
-                <a:latin typeface="+mn-lt"/>
-                <a:ea typeface="+mn-ea"/>
-                <a:cs typeface="+mn-cs"/>
-              </a:defRPr>
-            </a:lvl1pPr>
-            <a:lvl2pPr marL="457200" algn="l" defTabSz="914400" rtl="0" eaLnBrk="1" latinLnBrk="0" hangingPunct="1">
-              <a:defRPr kumimoji="1" sz="1800" kern="1200">
-                <a:solidFill>
-                  <a:schemeClr val="lt1"/>
-                </a:solidFill>
-                <a:latin typeface="+mn-lt"/>
-                <a:ea typeface="+mn-ea"/>
-                <a:cs typeface="+mn-cs"/>
-              </a:defRPr>
-            </a:lvl2pPr>
-            <a:lvl3pPr marL="914400" algn="l" defTabSz="914400" rtl="0" eaLnBrk="1" latinLnBrk="0" hangingPunct="1">
-              <a:defRPr kumimoji="1" sz="1800" kern="1200">
-                <a:solidFill>
-                  <a:schemeClr val="lt1"/>
-                </a:solidFill>
-                <a:latin typeface="+mn-lt"/>
-                <a:ea typeface="+mn-ea"/>
-                <a:cs typeface="+mn-cs"/>
-              </a:defRPr>
-            </a:lvl3pPr>
-            <a:lvl4pPr marL="1371600" algn="l" defTabSz="914400" rtl="0" eaLnBrk="1" latinLnBrk="0" hangingPunct="1">
-              <a:defRPr kumimoji="1" sz="1800" kern="1200">
-                <a:solidFill>
-                  <a:schemeClr val="lt1"/>
-                </a:solidFill>
-                <a:latin typeface="+mn-lt"/>
-                <a:ea typeface="+mn-ea"/>
-                <a:cs typeface="+mn-cs"/>
-              </a:defRPr>
-            </a:lvl4pPr>
-            <a:lvl5pPr marL="1828800" algn="l" defTabSz="914400" rtl="0" eaLnBrk="1" latinLnBrk="0" hangingPunct="1">
-              <a:defRPr kumimoji="1" sz="1800" kern="1200">
-                <a:solidFill>
-                  <a:schemeClr val="lt1"/>
-                </a:solidFill>
-                <a:latin typeface="+mn-lt"/>
-                <a:ea typeface="+mn-ea"/>
-                <a:cs typeface="+mn-cs"/>
-              </a:defRPr>
-            </a:lvl5pPr>
-            <a:lvl6pPr marL="2286000" algn="l" defTabSz="914400" rtl="0" eaLnBrk="1" latinLnBrk="0" hangingPunct="1">
-              <a:defRPr kumimoji="1" sz="1800" kern="1200">
-                <a:solidFill>
-                  <a:schemeClr val="lt1"/>
-                </a:solidFill>
-                <a:latin typeface="+mn-lt"/>
-                <a:ea typeface="+mn-ea"/>
-                <a:cs typeface="+mn-cs"/>
-              </a:defRPr>
-            </a:lvl6pPr>
-            <a:lvl7pPr marL="2743200" algn="l" defTabSz="914400" rtl="0" eaLnBrk="1" latinLnBrk="0" hangingPunct="1">
-              <a:defRPr kumimoji="1" sz="1800" kern="1200">
-                <a:solidFill>
-                  <a:schemeClr val="lt1"/>
-                </a:solidFill>
-                <a:latin typeface="+mn-lt"/>
-                <a:ea typeface="+mn-ea"/>
-                <a:cs typeface="+mn-cs"/>
-              </a:defRPr>
-            </a:lvl7pPr>
-            <a:lvl8pPr marL="3200400" algn="l" defTabSz="914400" rtl="0" eaLnBrk="1" latinLnBrk="0" hangingPunct="1">
-              <a:defRPr kumimoji="1" sz="1800" kern="1200">
-                <a:solidFill>
-                  <a:schemeClr val="lt1"/>
-                </a:solidFill>
-                <a:latin typeface="+mn-lt"/>
-                <a:ea typeface="+mn-ea"/>
-                <a:cs typeface="+mn-cs"/>
-              </a:defRPr>
-            </a:lvl8pPr>
-            <a:lvl9pPr marL="3657600" algn="l" defTabSz="914400" rtl="0" eaLnBrk="1" latinLnBrk="0" hangingPunct="1">
-              <a:defRPr kumimoji="1" sz="1800" kern="1200">
-                <a:solidFill>
-                  <a:schemeClr val="lt1"/>
-                </a:solidFill>
-                <a:latin typeface="+mn-lt"/>
-                <a:ea typeface="+mn-ea"/>
-                <a:cs typeface="+mn-cs"/>
-              </a:defRPr>
-            </a:lvl9pPr>
-          </a:lstStyle>
-          <a:p>
-            <a:r>
-              <a:rPr kumimoji="1" lang="ja-JP" altLang="en-US" b="1" dirty="0">
-                <a:solidFill>
-                  <a:schemeClr val="tx1"/>
-                </a:solidFill>
-              </a:rPr>
-              <a:t>課題１</a:t>
-            </a:r>
-          </a:p>
-        </p:txBody>
-      </p:sp>
-      <p:sp>
-        <p:nvSpPr>
-          <p:cNvPr id="19" name="正方形/長方形 18">
-            <a:extLst>
-              <a:ext uri="{FF2B5EF4-FFF2-40B4-BE49-F238E27FC236}">
-                <a16:creationId xmlns:a16="http://schemas.microsoft.com/office/drawing/2014/main" id="{7AB07655-88F8-4026-B433-91F9105203F0}"/>
-              </a:ext>
-            </a:extLst>
-          </p:cNvPr>
-          <p:cNvSpPr/>
-          <p:nvPr/>
-        </p:nvSpPr>
-        <p:spPr>
-          <a:xfrm>
-            <a:off x="6781410" y="4114799"/>
-            <a:ext cx="4795702" cy="2525086"/>
-          </a:xfrm>
-          <a:prstGeom prst="rect">
-            <a:avLst/>
-          </a:prstGeom>
-          <a:noFill/>
-          <a:ln w="38100">
-            <a:solidFill>
-              <a:schemeClr val="tx1"/>
-            </a:solidFill>
-          </a:ln>
-          <a:effectLst/>
-        </p:spPr>
-        <p:style>
-          <a:lnRef idx="1">
-            <a:schemeClr val="accent1"/>
-          </a:lnRef>
-          <a:fillRef idx="3">
-            <a:schemeClr val="accent1"/>
-          </a:fillRef>
-          <a:effectRef idx="2">
-            <a:schemeClr val="accent1"/>
-          </a:effectRef>
-          <a:fontRef idx="minor">
-            <a:schemeClr val="lt1"/>
-          </a:fontRef>
-        </p:style>
-        <p:txBody>
-          <a:bodyPr rot="0" spcFirstLastPara="0" vert="horz" wrap="square" lIns="36000" tIns="36000" rIns="36000" bIns="36000" numCol="1" spcCol="0" rtlCol="0" fromWordArt="0" anchor="t" anchorCtr="0" forceAA="0" compatLnSpc="1">
-            <a:prstTxWarp prst="textNoShape">
-              <a:avLst/>
-            </a:prstTxWarp>
-            <a:noAutofit/>
-          </a:bodyPr>
-          <a:lstStyle>
-            <a:defPPr>
-              <a:defRPr lang="ja-JP"/>
-            </a:defPPr>
-            <a:lvl1pPr marL="0" algn="l" defTabSz="914400" rtl="0" eaLnBrk="1" latinLnBrk="0" hangingPunct="1">
-              <a:defRPr kumimoji="1" sz="1800" kern="1200">
-                <a:solidFill>
-                  <a:schemeClr val="lt1"/>
-                </a:solidFill>
-                <a:latin typeface="+mn-lt"/>
-                <a:ea typeface="+mn-ea"/>
-                <a:cs typeface="+mn-cs"/>
-              </a:defRPr>
-            </a:lvl1pPr>
-            <a:lvl2pPr marL="457200" algn="l" defTabSz="914400" rtl="0" eaLnBrk="1" latinLnBrk="0" hangingPunct="1">
-              <a:defRPr kumimoji="1" sz="1800" kern="1200">
-                <a:solidFill>
-                  <a:schemeClr val="lt1"/>
-                </a:solidFill>
-                <a:latin typeface="+mn-lt"/>
-                <a:ea typeface="+mn-ea"/>
-                <a:cs typeface="+mn-cs"/>
-              </a:defRPr>
-            </a:lvl2pPr>
-            <a:lvl3pPr marL="914400" algn="l" defTabSz="914400" rtl="0" eaLnBrk="1" latinLnBrk="0" hangingPunct="1">
-              <a:defRPr kumimoji="1" sz="1800" kern="1200">
-                <a:solidFill>
-                  <a:schemeClr val="lt1"/>
-                </a:solidFill>
-                <a:latin typeface="+mn-lt"/>
-                <a:ea typeface="+mn-ea"/>
-                <a:cs typeface="+mn-cs"/>
-              </a:defRPr>
-            </a:lvl3pPr>
-            <a:lvl4pPr marL="1371600" algn="l" defTabSz="914400" rtl="0" eaLnBrk="1" latinLnBrk="0" hangingPunct="1">
-              <a:defRPr kumimoji="1" sz="1800" kern="1200">
-                <a:solidFill>
-                  <a:schemeClr val="lt1"/>
-                </a:solidFill>
-                <a:latin typeface="+mn-lt"/>
-                <a:ea typeface="+mn-ea"/>
-                <a:cs typeface="+mn-cs"/>
-              </a:defRPr>
-            </a:lvl4pPr>
-            <a:lvl5pPr marL="1828800" algn="l" defTabSz="914400" rtl="0" eaLnBrk="1" latinLnBrk="0" hangingPunct="1">
-              <a:defRPr kumimoji="1" sz="1800" kern="1200">
-                <a:solidFill>
-                  <a:schemeClr val="lt1"/>
-                </a:solidFill>
-                <a:latin typeface="+mn-lt"/>
-                <a:ea typeface="+mn-ea"/>
-                <a:cs typeface="+mn-cs"/>
-              </a:defRPr>
-            </a:lvl5pPr>
-            <a:lvl6pPr marL="2286000" algn="l" defTabSz="914400" rtl="0" eaLnBrk="1" latinLnBrk="0" hangingPunct="1">
-              <a:defRPr kumimoji="1" sz="1800" kern="1200">
-                <a:solidFill>
-                  <a:schemeClr val="lt1"/>
-                </a:solidFill>
-                <a:latin typeface="+mn-lt"/>
-                <a:ea typeface="+mn-ea"/>
-                <a:cs typeface="+mn-cs"/>
-              </a:defRPr>
-            </a:lvl6pPr>
-            <a:lvl7pPr marL="2743200" algn="l" defTabSz="914400" rtl="0" eaLnBrk="1" latinLnBrk="0" hangingPunct="1">
-              <a:defRPr kumimoji="1" sz="1800" kern="1200">
-                <a:solidFill>
-                  <a:schemeClr val="lt1"/>
-                </a:solidFill>
-                <a:latin typeface="+mn-lt"/>
-                <a:ea typeface="+mn-ea"/>
-                <a:cs typeface="+mn-cs"/>
-              </a:defRPr>
-            </a:lvl7pPr>
-            <a:lvl8pPr marL="3200400" algn="l" defTabSz="914400" rtl="0" eaLnBrk="1" latinLnBrk="0" hangingPunct="1">
-              <a:defRPr kumimoji="1" sz="1800" kern="1200">
-                <a:solidFill>
-                  <a:schemeClr val="lt1"/>
-                </a:solidFill>
-                <a:latin typeface="+mn-lt"/>
-                <a:ea typeface="+mn-ea"/>
-                <a:cs typeface="+mn-cs"/>
-              </a:defRPr>
-            </a:lvl8pPr>
-            <a:lvl9pPr marL="3657600" algn="l" defTabSz="914400" rtl="0" eaLnBrk="1" latinLnBrk="0" hangingPunct="1">
-              <a:defRPr kumimoji="1" sz="1800" kern="1200">
-                <a:solidFill>
-                  <a:schemeClr val="lt1"/>
-                </a:solidFill>
-                <a:latin typeface="+mn-lt"/>
-                <a:ea typeface="+mn-ea"/>
-                <a:cs typeface="+mn-cs"/>
-              </a:defRPr>
-            </a:lvl9pPr>
-          </a:lstStyle>
-          <a:p>
-            <a:r>
-              <a:rPr kumimoji="1" lang="ja-JP" altLang="en-US" b="1" dirty="0">
-                <a:solidFill>
-                  <a:schemeClr val="tx1"/>
-                </a:solidFill>
-              </a:rPr>
-              <a:t>課題２</a:t>
-            </a:r>
-          </a:p>
-        </p:txBody>
-      </p:sp>
-      <p:pic>
-        <p:nvPicPr>
-          <p:cNvPr id="20" name="グラフィックス 18" descr="拡大鏡 単色塗りつぶし">
-            <a:extLst>
-              <a:ext uri="{FF2B5EF4-FFF2-40B4-BE49-F238E27FC236}">
-                <a16:creationId xmlns:a16="http://schemas.microsoft.com/office/drawing/2014/main" id="{382C8686-E55F-1B52-FD04-5E0EFF6CE13C}"/>
-              </a:ext>
-            </a:extLst>
-          </p:cNvPr>
-          <p:cNvPicPr>
-            <a:picLocks noChangeAspect="1"/>
-          </p:cNvPicPr>
-          <p:nvPr/>
-        </p:nvPicPr>
-        <p:blipFill>
-          <a:blip r:embed="rId4">
-            <a:extLst>
-              <a:ext uri="{96DAC541-7B7A-43D3-8B79-37D633B846F1}">
-                <asvg:svgBlip xmlns:asvg="http://schemas.microsoft.com/office/drawing/2016/SVG/main" r:embed="rId5"/>
-              </a:ext>
-            </a:extLst>
-          </a:blip>
-          <a:stretch>
-            <a:fillRect/>
-          </a:stretch>
-        </p:blipFill>
-        <p:spPr>
-          <a:xfrm>
-            <a:off x="10520279" y="4256234"/>
-            <a:ext cx="914400" cy="914400"/>
-          </a:xfrm>
-          <a:prstGeom prst="rect">
-            <a:avLst/>
-          </a:prstGeom>
-        </p:spPr>
-      </p:pic>
-      <p:sp>
-        <p:nvSpPr>
-          <p:cNvPr id="22" name="フローチャート: 結合子 21">
-            <a:extLst>
-              <a:ext uri="{FF2B5EF4-FFF2-40B4-BE49-F238E27FC236}">
-                <a16:creationId xmlns:a16="http://schemas.microsoft.com/office/drawing/2014/main" id="{39945E82-EB28-A483-6CB0-0D38E9357B7C}"/>
-              </a:ext>
-            </a:extLst>
-          </p:cNvPr>
-          <p:cNvSpPr/>
-          <p:nvPr/>
-        </p:nvSpPr>
-        <p:spPr>
-          <a:xfrm>
-            <a:off x="8595085" y="4477342"/>
-            <a:ext cx="1800000" cy="1800000"/>
-          </a:xfrm>
-          <a:prstGeom prst="flowChartConnector">
-            <a:avLst/>
-          </a:prstGeom>
-          <a:noFill/>
-          <a:ln w="19050">
-            <a:solidFill>
-              <a:schemeClr val="accent3"/>
-            </a:solidFill>
-          </a:ln>
-          <a:effectLst/>
-        </p:spPr>
-        <p:style>
-          <a:lnRef idx="1">
-            <a:schemeClr val="accent1"/>
-          </a:lnRef>
-          <a:fillRef idx="3">
-            <a:schemeClr val="accent1"/>
-          </a:fillRef>
-          <a:effectRef idx="2">
-            <a:schemeClr val="accent1"/>
-          </a:effectRef>
-          <a:fontRef idx="minor">
-            <a:schemeClr val="lt1"/>
-          </a:fontRef>
-        </p:style>
-        <p:txBody>
-          <a:bodyPr rot="0" spcFirstLastPara="0" vert="horz" wrap="square" lIns="36000" tIns="36000" rIns="36000" bIns="36000" numCol="1" spcCol="0" rtlCol="0" fromWordArt="0" anchor="ctr" anchorCtr="0" forceAA="0" compatLnSpc="1">
-            <a:prstTxWarp prst="textNoShape">
-              <a:avLst/>
-            </a:prstTxWarp>
-            <a:noAutofit/>
-          </a:bodyPr>
-          <a:lstStyle>
-            <a:defPPr>
-              <a:defRPr lang="ja-JP"/>
-            </a:defPPr>
-            <a:lvl1pPr marL="0" algn="l" defTabSz="914400" rtl="0" eaLnBrk="1" latinLnBrk="0" hangingPunct="1">
-              <a:defRPr kumimoji="1" sz="1800" kern="1200">
-                <a:solidFill>
-                  <a:schemeClr val="lt1"/>
-                </a:solidFill>
-                <a:latin typeface="+mn-lt"/>
-                <a:ea typeface="+mn-ea"/>
-                <a:cs typeface="+mn-cs"/>
-              </a:defRPr>
-            </a:lvl1pPr>
-            <a:lvl2pPr marL="457200" algn="l" defTabSz="914400" rtl="0" eaLnBrk="1" latinLnBrk="0" hangingPunct="1">
-              <a:defRPr kumimoji="1" sz="1800" kern="1200">
-                <a:solidFill>
-                  <a:schemeClr val="lt1"/>
-                </a:solidFill>
-                <a:latin typeface="+mn-lt"/>
-                <a:ea typeface="+mn-ea"/>
-                <a:cs typeface="+mn-cs"/>
-              </a:defRPr>
-            </a:lvl2pPr>
-            <a:lvl3pPr marL="914400" algn="l" defTabSz="914400" rtl="0" eaLnBrk="1" latinLnBrk="0" hangingPunct="1">
-              <a:defRPr kumimoji="1" sz="1800" kern="1200">
-                <a:solidFill>
-                  <a:schemeClr val="lt1"/>
-                </a:solidFill>
-                <a:latin typeface="+mn-lt"/>
-                <a:ea typeface="+mn-ea"/>
-                <a:cs typeface="+mn-cs"/>
-              </a:defRPr>
-            </a:lvl3pPr>
-            <a:lvl4pPr marL="1371600" algn="l" defTabSz="914400" rtl="0" eaLnBrk="1" latinLnBrk="0" hangingPunct="1">
-              <a:defRPr kumimoji="1" sz="1800" kern="1200">
-                <a:solidFill>
-                  <a:schemeClr val="lt1"/>
-                </a:solidFill>
-                <a:latin typeface="+mn-lt"/>
-                <a:ea typeface="+mn-ea"/>
-                <a:cs typeface="+mn-cs"/>
-              </a:defRPr>
-            </a:lvl4pPr>
-            <a:lvl5pPr marL="1828800" algn="l" defTabSz="914400" rtl="0" eaLnBrk="1" latinLnBrk="0" hangingPunct="1">
-              <a:defRPr kumimoji="1" sz="1800" kern="1200">
-                <a:solidFill>
-                  <a:schemeClr val="lt1"/>
-                </a:solidFill>
-                <a:latin typeface="+mn-lt"/>
-                <a:ea typeface="+mn-ea"/>
-                <a:cs typeface="+mn-cs"/>
-              </a:defRPr>
-            </a:lvl5pPr>
-            <a:lvl6pPr marL="2286000" algn="l" defTabSz="914400" rtl="0" eaLnBrk="1" latinLnBrk="0" hangingPunct="1">
-              <a:defRPr kumimoji="1" sz="1800" kern="1200">
-                <a:solidFill>
-                  <a:schemeClr val="lt1"/>
-                </a:solidFill>
-                <a:latin typeface="+mn-lt"/>
-                <a:ea typeface="+mn-ea"/>
-                <a:cs typeface="+mn-cs"/>
-              </a:defRPr>
-            </a:lvl6pPr>
-            <a:lvl7pPr marL="2743200" algn="l" defTabSz="914400" rtl="0" eaLnBrk="1" latinLnBrk="0" hangingPunct="1">
-              <a:defRPr kumimoji="1" sz="1800" kern="1200">
-                <a:solidFill>
-                  <a:schemeClr val="lt1"/>
-                </a:solidFill>
-                <a:latin typeface="+mn-lt"/>
-                <a:ea typeface="+mn-ea"/>
-                <a:cs typeface="+mn-cs"/>
-              </a:defRPr>
-            </a:lvl7pPr>
-            <a:lvl8pPr marL="3200400" algn="l" defTabSz="914400" rtl="0" eaLnBrk="1" latinLnBrk="0" hangingPunct="1">
-              <a:defRPr kumimoji="1" sz="1800" kern="1200">
-                <a:solidFill>
-                  <a:schemeClr val="lt1"/>
-                </a:solidFill>
-                <a:latin typeface="+mn-lt"/>
-                <a:ea typeface="+mn-ea"/>
-                <a:cs typeface="+mn-cs"/>
-              </a:defRPr>
-            </a:lvl8pPr>
-            <a:lvl9pPr marL="3657600" algn="l" defTabSz="914400" rtl="0" eaLnBrk="1" latinLnBrk="0" hangingPunct="1">
-              <a:defRPr kumimoji="1" sz="1800" kern="1200">
-                <a:solidFill>
-                  <a:schemeClr val="lt1"/>
-                </a:solidFill>
-                <a:latin typeface="+mn-lt"/>
-                <a:ea typeface="+mn-ea"/>
-                <a:cs typeface="+mn-cs"/>
-              </a:defRPr>
-            </a:lvl9pPr>
-          </a:lstStyle>
-          <a:p>
-            <a:pPr algn="ctr"/>
-            <a:endParaRPr kumimoji="1" lang="ja-JP" altLang="en-US" sz="1400" err="1">
-              <a:solidFill>
-                <a:schemeClr val="tx1"/>
-              </a:solidFill>
-            </a:endParaRPr>
-          </a:p>
-        </p:txBody>
-      </p:sp>
-      <p:pic>
-        <p:nvPicPr>
-          <p:cNvPr id="23" name="グラフィックス 23" descr="クリップボード: 混合 単色塗りつぶし">
-            <a:extLst>
-              <a:ext uri="{FF2B5EF4-FFF2-40B4-BE49-F238E27FC236}">
-                <a16:creationId xmlns:a16="http://schemas.microsoft.com/office/drawing/2014/main" id="{D8657E05-43F4-54E6-20EB-989CC3C24F02}"/>
-              </a:ext>
-            </a:extLst>
-          </p:cNvPr>
-          <p:cNvPicPr>
-            <a:picLocks noChangeAspect="1"/>
-          </p:cNvPicPr>
-          <p:nvPr/>
-        </p:nvPicPr>
-        <p:blipFill>
-          <a:blip r:embed="rId6">
-            <a:extLst>
-              <a:ext uri="{96DAC541-7B7A-43D3-8B79-37D633B846F1}">
-                <asvg:svgBlip xmlns:asvg="http://schemas.microsoft.com/office/drawing/2016/SVG/main" r:embed="rId7"/>
-              </a:ext>
-            </a:extLst>
-          </a:blip>
-          <a:stretch>
-            <a:fillRect/>
-          </a:stretch>
-        </p:blipFill>
-        <p:spPr>
-          <a:xfrm>
-            <a:off x="7117756" y="4690233"/>
-            <a:ext cx="1374218" cy="1374218"/>
-          </a:xfrm>
-          <a:prstGeom prst="rect">
-            <a:avLst/>
-          </a:prstGeom>
-        </p:spPr>
-      </p:pic>
-      <p:cxnSp>
-        <p:nvCxnSpPr>
-          <p:cNvPr id="24" name="直線コネクタ 23">
-            <a:extLst>
-              <a:ext uri="{FF2B5EF4-FFF2-40B4-BE49-F238E27FC236}">
-                <a16:creationId xmlns:a16="http://schemas.microsoft.com/office/drawing/2014/main" id="{5DC46E5B-CFA9-A41B-91A1-F732C30D3B31}"/>
-              </a:ext>
-            </a:extLst>
-          </p:cNvPr>
-          <p:cNvCxnSpPr>
-            <a:cxnSpLocks/>
-            <a:stCxn id="22" idx="0"/>
-          </p:cNvCxnSpPr>
-          <p:nvPr/>
-        </p:nvCxnSpPr>
-        <p:spPr>
-          <a:xfrm flipV="1">
-            <a:off x="9495085" y="4427151"/>
-            <a:ext cx="1191197" cy="50191"/>
-          </a:xfrm>
-          <a:prstGeom prst="line">
-            <a:avLst/>
-          </a:prstGeom>
-          <a:ln w="19050">
-            <a:solidFill>
-              <a:schemeClr val="accent3"/>
-            </a:solidFill>
-          </a:ln>
-          <a:effectLst/>
-        </p:spPr>
-        <p:style>
-          <a:lnRef idx="2">
-            <a:schemeClr val="accent1"/>
-          </a:lnRef>
-          <a:fillRef idx="0">
-            <a:schemeClr val="accent1"/>
-          </a:fillRef>
-          <a:effectRef idx="1">
-            <a:schemeClr val="accent1"/>
-          </a:effectRef>
-          <a:fontRef idx="minor">
-            <a:schemeClr val="tx1"/>
-          </a:fontRef>
-        </p:style>
-      </p:cxnSp>
-      <p:cxnSp>
-        <p:nvCxnSpPr>
-          <p:cNvPr id="25" name="直線コネクタ 24">
-            <a:extLst>
-              <a:ext uri="{FF2B5EF4-FFF2-40B4-BE49-F238E27FC236}">
-                <a16:creationId xmlns:a16="http://schemas.microsoft.com/office/drawing/2014/main" id="{E49AA7CD-8C90-471C-6F68-5D0CF44C7743}"/>
-              </a:ext>
-            </a:extLst>
-          </p:cNvPr>
-          <p:cNvCxnSpPr>
-            <a:cxnSpLocks/>
-          </p:cNvCxnSpPr>
-          <p:nvPr/>
-        </p:nvCxnSpPr>
-        <p:spPr>
-          <a:xfrm flipV="1">
-            <a:off x="10229082" y="4956450"/>
-            <a:ext cx="715913" cy="965038"/>
-          </a:xfrm>
-          <a:prstGeom prst="line">
-            <a:avLst/>
-          </a:prstGeom>
-          <a:ln w="19050">
-            <a:solidFill>
-              <a:schemeClr val="accent3"/>
-            </a:solidFill>
-          </a:ln>
-          <a:effectLst/>
-        </p:spPr>
-        <p:style>
-          <a:lnRef idx="2">
-            <a:schemeClr val="accent1"/>
-          </a:lnRef>
-          <a:fillRef idx="0">
-            <a:schemeClr val="accent1"/>
-          </a:fillRef>
-          <a:effectRef idx="1">
-            <a:schemeClr val="accent1"/>
-          </a:effectRef>
-          <a:fontRef idx="minor">
-            <a:schemeClr val="tx1"/>
-          </a:fontRef>
-        </p:style>
-      </p:cxnSp>
-      <p:sp>
-        <p:nvSpPr>
-          <p:cNvPr id="34" name="矢印: 下 33">
-            <a:extLst>
-              <a:ext uri="{FF2B5EF4-FFF2-40B4-BE49-F238E27FC236}">
-                <a16:creationId xmlns:a16="http://schemas.microsoft.com/office/drawing/2014/main" id="{83C7652C-8730-6792-1408-7B30375B9687}"/>
-              </a:ext>
-            </a:extLst>
-          </p:cNvPr>
-          <p:cNvSpPr/>
-          <p:nvPr/>
-        </p:nvSpPr>
-        <p:spPr>
-          <a:xfrm rot="16200000">
-            <a:off x="6220213" y="5287343"/>
-            <a:ext cx="360000" cy="180000"/>
-          </a:xfrm>
-          <a:prstGeom prst="downArrow">
-            <a:avLst/>
-          </a:prstGeom>
-          <a:solidFill>
-            <a:schemeClr val="tx1"/>
-          </a:solidFill>
-          <a:ln w="3175" cap="flat" cmpd="sng" algn="ctr">
-            <a:solidFill>
-              <a:srgbClr val="000000"/>
-            </a:solidFill>
-            <a:prstDash val="solid"/>
-          </a:ln>
-          <a:effectLst/>
-        </p:spPr>
-        <p:txBody>
-          <a:bodyPr rot="0" spcFirstLastPara="0" vertOverflow="overflow" horzOverflow="overflow" vert="horz" wrap="square" lIns="36000" tIns="36000" rIns="36000" bIns="36000" numCol="1" spcCol="0" rtlCol="0" fromWordArt="0" anchor="ctr" anchorCtr="0" forceAA="0" compatLnSpc="1">
-            <a:prstTxWarp prst="textNoShape">
-              <a:avLst/>
-            </a:prstTxWarp>
-            <a:noAutofit/>
-          </a:bodyPr>
-          <a:lstStyle/>
-          <a:p>
-            <a:pPr marL="0" marR="0" lvl="0" indent="0" algn="ctr" defTabSz="914400" eaLnBrk="1" fontAlgn="auto" latinLnBrk="0" hangingPunct="1">
-              <a:lnSpc>
-                <a:spcPct val="100000"/>
-              </a:lnSpc>
-              <a:spcBef>
-                <a:spcPts val="0"/>
-              </a:spcBef>
-              <a:spcAft>
-                <a:spcPts val="0"/>
-              </a:spcAft>
-              <a:buClrTx/>
-              <a:buSzTx/>
-              <a:buFontTx/>
-              <a:buNone/>
-              <a:tabLst/>
-              <a:defRPr/>
-            </a:pPr>
-            <a:endParaRPr kumimoji="0" lang="ja-JP" altLang="en-US" sz="1400" b="0" i="0" u="none" strike="noStrike" kern="0" cap="none" spc="0" normalizeH="0" baseline="0" noProof="0" err="1">
-              <a:ln>
-                <a:noFill/>
-              </a:ln>
-              <a:solidFill>
-                <a:srgbClr val="000000"/>
-              </a:solidFill>
-              <a:effectLst/>
-              <a:uLnTx/>
-              <a:uFillTx/>
-              <a:latin typeface="Arial"/>
-              <a:ea typeface="Meiryo UI"/>
-              <a:cs typeface="+mn-cs"/>
-            </a:endParaRPr>
-          </a:p>
-        </p:txBody>
-      </p:sp>
-      <p:pic>
-        <p:nvPicPr>
-          <p:cNvPr id="50" name="図 49">
-            <a:extLst>
-              <a:ext uri="{FF2B5EF4-FFF2-40B4-BE49-F238E27FC236}">
-                <a16:creationId xmlns:a16="http://schemas.microsoft.com/office/drawing/2014/main" id="{23121F06-DDC4-9336-E9FB-C7AAAE9B4529}"/>
-              </a:ext>
-            </a:extLst>
-          </p:cNvPr>
-          <p:cNvPicPr>
-            <a:picLocks noChangeAspect="1"/>
-          </p:cNvPicPr>
-          <p:nvPr/>
-        </p:nvPicPr>
-        <p:blipFill>
-          <a:blip r:embed="rId8">
-            <a:extLst>
-              <a:ext uri="{28A0092B-C50C-407E-A947-70E740481C1C}">
-                <a14:useLocalDpi xmlns:a14="http://schemas.microsoft.com/office/drawing/2010/main" val="0"/>
-              </a:ext>
-            </a:extLst>
-          </a:blip>
-          <a:stretch>
-            <a:fillRect/>
-          </a:stretch>
-        </p:blipFill>
-        <p:spPr>
-          <a:xfrm>
-            <a:off x="4417233" y="4529486"/>
-            <a:ext cx="523364" cy="523364"/>
-          </a:xfrm>
-          <a:prstGeom prst="rect">
-            <a:avLst/>
-          </a:prstGeom>
-        </p:spPr>
-      </p:pic>
-      <p:sp>
-        <p:nvSpPr>
-          <p:cNvPr id="51" name="テキスト ボックス 50">
-            <a:extLst>
-              <a:ext uri="{FF2B5EF4-FFF2-40B4-BE49-F238E27FC236}">
-                <a16:creationId xmlns:a16="http://schemas.microsoft.com/office/drawing/2014/main" id="{95D4BC6D-C730-9ECD-0C06-666951057564}"/>
-              </a:ext>
-            </a:extLst>
-          </p:cNvPr>
-          <p:cNvSpPr txBox="1"/>
-          <p:nvPr/>
-        </p:nvSpPr>
-        <p:spPr>
-          <a:xfrm>
-            <a:off x="4430289" y="5109519"/>
-            <a:ext cx="497252" cy="369332"/>
-          </a:xfrm>
-          <a:prstGeom prst="rect">
-            <a:avLst/>
-          </a:prstGeom>
-          <a:noFill/>
-        </p:spPr>
-        <p:txBody>
-          <a:bodyPr wrap="none" rtlCol="0">
-            <a:spAutoFit/>
-          </a:bodyPr>
-          <a:lstStyle/>
-          <a:p>
-            <a:r>
-              <a:rPr kumimoji="1" lang="en-US" altLang="ja-JP" b="1" dirty="0"/>
-              <a:t>H2</a:t>
-            </a:r>
-            <a:endParaRPr kumimoji="1" lang="ja-JP" altLang="en-US" b="1" dirty="0"/>
-          </a:p>
-        </p:txBody>
-      </p:sp>
-      <p:pic>
-        <p:nvPicPr>
-          <p:cNvPr id="1028" name="Picture 4" descr="Spring プロジェクト一覧 - リファレンスドキュメント">
-            <a:extLst>
-              <a:ext uri="{FF2B5EF4-FFF2-40B4-BE49-F238E27FC236}">
-                <a16:creationId xmlns:a16="http://schemas.microsoft.com/office/drawing/2014/main" id="{7347444A-97CA-BE25-FCC7-E175DC3ECF01}"/>
-              </a:ext>
-            </a:extLst>
-          </p:cNvPr>
-          <p:cNvPicPr>
-            <a:picLocks noChangeAspect="1" noChangeArrowheads="1"/>
-          </p:cNvPicPr>
-          <p:nvPr/>
-        </p:nvPicPr>
-        <p:blipFill>
-          <a:blip r:embed="rId9">
-            <a:extLst>
-              <a:ext uri="{28A0092B-C50C-407E-A947-70E740481C1C}">
-                <a14:useLocalDpi xmlns:a14="http://schemas.microsoft.com/office/drawing/2010/main" val="0"/>
-              </a:ext>
-            </a:extLst>
-          </a:blip>
-          <a:srcRect/>
-          <a:stretch>
-            <a:fillRect/>
-          </a:stretch>
-        </p:blipFill>
-        <p:spPr bwMode="auto">
-          <a:xfrm>
-            <a:off x="3344476" y="4554816"/>
-            <a:ext cx="562384" cy="492583"/>
-          </a:xfrm>
-          <a:prstGeom prst="rect">
-            <a:avLst/>
-          </a:prstGeom>
-          <a:noFill/>
-          <a:extLst>
-            <a:ext uri="{909E8E84-426E-40DD-AFC4-6F175D3DCCD1}">
-              <a14:hiddenFill xmlns:a14="http://schemas.microsoft.com/office/drawing/2010/main">
-                <a:solidFill>
-                  <a:srgbClr val="FFFFFF"/>
-                </a:solidFill>
-              </a14:hiddenFill>
-            </a:ext>
-          </a:extLst>
-        </p:spPr>
-      </p:pic>
-      <p:pic>
-        <p:nvPicPr>
-          <p:cNvPr id="1030" name="Picture 6" descr="Java アイコン、ロゴ、シンボル – 無料ダウンロード PNG、SVG">
-            <a:extLst>
-              <a:ext uri="{FF2B5EF4-FFF2-40B4-BE49-F238E27FC236}">
-                <a16:creationId xmlns:a16="http://schemas.microsoft.com/office/drawing/2014/main" id="{1F1A5D85-4453-9F62-8DFF-6EFF2049D274}"/>
-              </a:ext>
-            </a:extLst>
-          </p:cNvPr>
-          <p:cNvPicPr>
-            <a:picLocks noChangeAspect="1" noChangeArrowheads="1"/>
-          </p:cNvPicPr>
-          <p:nvPr/>
-        </p:nvPicPr>
-        <p:blipFill>
-          <a:blip r:embed="rId10">
-            <a:extLst>
-              <a:ext uri="{28A0092B-C50C-407E-A947-70E740481C1C}">
-                <a14:useLocalDpi xmlns:a14="http://schemas.microsoft.com/office/drawing/2010/main" val="0"/>
-              </a:ext>
-            </a:extLst>
-          </a:blip>
-          <a:srcRect/>
-          <a:stretch>
-            <a:fillRect/>
-          </a:stretch>
-        </p:blipFill>
-        <p:spPr bwMode="auto">
-          <a:xfrm>
-            <a:off x="2198753" y="4485168"/>
-            <a:ext cx="612000" cy="612000"/>
-          </a:xfrm>
-          <a:prstGeom prst="rect">
-            <a:avLst/>
-          </a:prstGeom>
-          <a:noFill/>
-          <a:extLst>
-            <a:ext uri="{909E8E84-426E-40DD-AFC4-6F175D3DCCD1}">
-              <a14:hiddenFill xmlns:a14="http://schemas.microsoft.com/office/drawing/2010/main">
-                <a:solidFill>
-                  <a:srgbClr val="FFFFFF"/>
-                </a:solidFill>
-              </a14:hiddenFill>
-            </a:ext>
-          </a:extLst>
-        </p:spPr>
-      </p:pic>
-      <p:sp>
-        <p:nvSpPr>
-          <p:cNvPr id="53" name="テキスト ボックス 52">
-            <a:extLst>
-              <a:ext uri="{FF2B5EF4-FFF2-40B4-BE49-F238E27FC236}">
-                <a16:creationId xmlns:a16="http://schemas.microsoft.com/office/drawing/2014/main" id="{6C03C138-170D-1597-7660-E30141051223}"/>
-              </a:ext>
-            </a:extLst>
-          </p:cNvPr>
-          <p:cNvSpPr txBox="1"/>
-          <p:nvPr/>
-        </p:nvSpPr>
-        <p:spPr>
-          <a:xfrm>
-            <a:off x="2167161" y="5109519"/>
-            <a:ext cx="675185" cy="369332"/>
-          </a:xfrm>
-          <a:prstGeom prst="rect">
-            <a:avLst/>
-          </a:prstGeom>
-          <a:noFill/>
-        </p:spPr>
-        <p:txBody>
-          <a:bodyPr wrap="none" rtlCol="0">
-            <a:spAutoFit/>
-          </a:bodyPr>
-          <a:lstStyle/>
-          <a:p>
-            <a:r>
-              <a:rPr kumimoji="1" lang="en-US" altLang="ja-JP" b="1" dirty="0"/>
-              <a:t>Java</a:t>
-            </a:r>
-            <a:endParaRPr kumimoji="1" lang="ja-JP" altLang="en-US" b="1" dirty="0"/>
-          </a:p>
-        </p:txBody>
-      </p:sp>
-      <p:sp>
-        <p:nvSpPr>
-          <p:cNvPr id="55" name="テキスト ボックス 54">
-            <a:extLst>
-              <a:ext uri="{FF2B5EF4-FFF2-40B4-BE49-F238E27FC236}">
-                <a16:creationId xmlns:a16="http://schemas.microsoft.com/office/drawing/2014/main" id="{2F5F44CC-DAE5-07AC-6607-F3CA9BAFB7CE}"/>
-              </a:ext>
-            </a:extLst>
-          </p:cNvPr>
-          <p:cNvSpPr txBox="1"/>
-          <p:nvPr/>
-        </p:nvSpPr>
-        <p:spPr>
-          <a:xfrm>
-            <a:off x="3170255" y="5076118"/>
-            <a:ext cx="910827" cy="369332"/>
-          </a:xfrm>
-          <a:prstGeom prst="rect">
-            <a:avLst/>
-          </a:prstGeom>
-          <a:noFill/>
-        </p:spPr>
-        <p:txBody>
-          <a:bodyPr wrap="none" rtlCol="0">
-            <a:spAutoFit/>
-          </a:bodyPr>
-          <a:lstStyle/>
-          <a:p>
-            <a:r>
-              <a:rPr lang="en-US" altLang="ja-JP" b="1" dirty="0"/>
-              <a:t>Spring</a:t>
-            </a:r>
-            <a:endParaRPr kumimoji="1" lang="ja-JP" altLang="en-US" b="1" dirty="0"/>
-          </a:p>
-        </p:txBody>
-      </p:sp>
-      <p:sp>
-        <p:nvSpPr>
-          <p:cNvPr id="57" name="吹き出し: 四角形 56">
-            <a:extLst>
-              <a:ext uri="{FF2B5EF4-FFF2-40B4-BE49-F238E27FC236}">
-                <a16:creationId xmlns:a16="http://schemas.microsoft.com/office/drawing/2014/main" id="{828805BD-8C23-AA91-2832-4223D636C516}"/>
-              </a:ext>
-            </a:extLst>
-          </p:cNvPr>
-          <p:cNvSpPr/>
-          <p:nvPr/>
-        </p:nvSpPr>
-        <p:spPr>
-          <a:xfrm>
-            <a:off x="1831903" y="4374415"/>
-            <a:ext cx="3508513" cy="1104436"/>
-          </a:xfrm>
-          <a:prstGeom prst="wedgeRectCallout">
-            <a:avLst>
-              <a:gd name="adj1" fmla="val -43534"/>
-              <a:gd name="adj2" fmla="val 79599"/>
-            </a:avLst>
-          </a:prstGeom>
-          <a:noFill/>
-          <a:ln w="28575">
-            <a:solidFill>
-              <a:schemeClr val="tx1"/>
-            </a:solidFill>
-          </a:ln>
-        </p:spPr>
-        <p:style>
-          <a:lnRef idx="2">
-            <a:schemeClr val="accent1">
-              <a:shade val="15000"/>
-            </a:schemeClr>
-          </a:lnRef>
-          <a:fillRef idx="1">
-            <a:schemeClr val="accent1"/>
-          </a:fillRef>
-          <a:effectRef idx="0">
-            <a:schemeClr val="accent1"/>
-          </a:effectRef>
-          <a:fontRef idx="minor">
-            <a:schemeClr val="lt1"/>
-          </a:fontRef>
-        </p:style>
-        <p:txBody>
-          <a:bodyPr rtlCol="0" anchor="ctr"/>
-          <a:lstStyle/>
-          <a:p>
-            <a:pPr algn="ctr"/>
-            <a:endParaRPr kumimoji="1" lang="ja-JP" altLang="en-US" dirty="0"/>
-          </a:p>
-        </p:txBody>
-      </p:sp>
-    </p:spTree>
-    <p:extLst>
-      <p:ext uri="{BB962C8B-B14F-4D97-AF65-F5344CB8AC3E}">
-        <p14:creationId xmlns:p14="http://schemas.microsoft.com/office/powerpoint/2010/main" val="13863217"/>
-      </p:ext>
-    </p:extLst>
-  </p:cSld>
-  <p:clrMapOvr>
-    <a:masterClrMapping/>
-  </p:clrMapOvr>
-</p:sld>
-</file>
-
-<file path=ppt/slides/slide4.xml><?xml version="1.0" encoding="utf-8"?>
-<p:sld xmlns:a="http://schemas.openxmlformats.org/drawingml/2006/main" xmlns:r="http://schemas.openxmlformats.org/officeDocument/2006/relationships" xmlns:p="http://schemas.openxmlformats.org/presentationml/2006/main">
-  <p:cSld>
-    <p:spTree>
-      <p:nvGrpSpPr>
-        <p:cNvPr id="1" name="">
-          <a:extLst>
-            <a:ext uri="{FF2B5EF4-FFF2-40B4-BE49-F238E27FC236}">
               <a16:creationId xmlns:a16="http://schemas.microsoft.com/office/drawing/2014/main" id="{05790C8F-A814-5143-E51E-E848FD662770}"/>
             </a:ext>
           </a:extLst>
@@ -9516,7 +8153,7 @@
 </p:sld>
 </file>
 
-<file path=ppt/slides/slide5.xml><?xml version="1.0" encoding="utf-8"?>
+<file path=ppt/slides/slide4.xml><?xml version="1.0" encoding="utf-8"?>
 <p:sld xmlns:a="http://schemas.openxmlformats.org/drawingml/2006/main" xmlns:r="http://schemas.openxmlformats.org/officeDocument/2006/relationships" xmlns:p="http://schemas.openxmlformats.org/presentationml/2006/main">
   <p:cSld>
     <p:spTree>
@@ -9755,7 +8392,7 @@
 </p:sld>
 </file>
 
-<file path=ppt/slides/slide6.xml><?xml version="1.0" encoding="utf-8"?>
+<file path=ppt/slides/slide5.xml><?xml version="1.0" encoding="utf-8"?>
 <p:sld xmlns:a="http://schemas.openxmlformats.org/drawingml/2006/main" xmlns:r="http://schemas.openxmlformats.org/officeDocument/2006/relationships" xmlns:p="http://schemas.openxmlformats.org/presentationml/2006/main">
   <p:cSld>
     <p:spTree>

--- a/00_オリエンテーション/【AI Native研修-バイブコーディング】研修の概要.pptx
+++ b/00_オリエンテーション/【AI Native研修-バイブコーディング】研修の概要.pptx
@@ -8,11 +8,11 @@
     <p:notesMasterId r:id="rId7"/>
   </p:notesMasterIdLst>
   <p:sldIdLst>
-    <p:sldId id="256" r:id="rId2"/>
-    <p:sldId id="257" r:id="rId3"/>
-    <p:sldId id="259" r:id="rId4"/>
-    <p:sldId id="260" r:id="rId5"/>
-    <p:sldId id="263" r:id="rId6"/>
+    <p:sldId id="262" r:id="rId2"/>
+    <p:sldId id="263" r:id="rId3"/>
+    <p:sldId id="264" r:id="rId4"/>
+    <p:sldId id="265" r:id="rId5"/>
+    <p:sldId id="266" r:id="rId6"/>
   </p:sldIdLst>
   <p:sldSz cx="12192000" cy="6858000"/>
   <p:notesSz cx="6858000" cy="9144000"/>
@@ -1034,64 +1034,10 @@
       </p:sp>
       <p:sp>
         <p:nvSpPr>
-          <p:cNvPr id="4" name="日付プレースホルダー 3">
+          <p:cNvPr id="9" name="スライド番号プレースホルダー 8">
             <a:extLst>
               <a:ext uri="{FF2B5EF4-FFF2-40B4-BE49-F238E27FC236}">
-                <a16:creationId xmlns:a16="http://schemas.microsoft.com/office/drawing/2014/main" id="{FFE4C389-7303-F6E2-A905-B7D704D1F620}"/>
-              </a:ext>
-            </a:extLst>
-          </p:cNvPr>
-          <p:cNvSpPr>
-            <a:spLocks noGrp="1"/>
-          </p:cNvSpPr>
-          <p:nvPr>
-            <p:ph type="dt" sz="half" idx="10"/>
-          </p:nvPr>
-        </p:nvSpPr>
-        <p:spPr/>
-        <p:txBody>
-          <a:bodyPr/>
-          <a:lstStyle/>
-          <a:p>
-            <a:fld id="{E3EFBC31-9ECA-48C0-910F-E09377915FB8}" type="datetimeFigureOut">
-              <a:rPr kumimoji="1" lang="ja-JP" altLang="en-US" smtClean="0"/>
-              <a:t>2026/7/5</a:t>
-            </a:fld>
-            <a:endParaRPr kumimoji="1" lang="ja-JP" altLang="en-US"/>
-          </a:p>
-        </p:txBody>
-      </p:sp>
-      <p:sp>
-        <p:nvSpPr>
-          <p:cNvPr id="5" name="フッター プレースホルダー 4">
-            <a:extLst>
-              <a:ext uri="{FF2B5EF4-FFF2-40B4-BE49-F238E27FC236}">
-                <a16:creationId xmlns:a16="http://schemas.microsoft.com/office/drawing/2014/main" id="{2CA5D6D8-D495-753D-963F-D2031F5490DC}"/>
-              </a:ext>
-            </a:extLst>
-          </p:cNvPr>
-          <p:cNvSpPr>
-            <a:spLocks noGrp="1"/>
-          </p:cNvSpPr>
-          <p:nvPr>
-            <p:ph type="ftr" sz="quarter" idx="11"/>
-          </p:nvPr>
-        </p:nvSpPr>
-        <p:spPr/>
-        <p:txBody>
-          <a:bodyPr/>
-          <a:lstStyle/>
-          <a:p>
-            <a:endParaRPr kumimoji="1" lang="ja-JP" altLang="en-US"/>
-          </a:p>
-        </p:txBody>
-      </p:sp>
-      <p:sp>
-        <p:nvSpPr>
-          <p:cNvPr id="6" name="スライド番号プレースホルダー 5">
-            <a:extLst>
-              <a:ext uri="{FF2B5EF4-FFF2-40B4-BE49-F238E27FC236}">
-                <a16:creationId xmlns:a16="http://schemas.microsoft.com/office/drawing/2014/main" id="{06B97719-44F6-07B6-2299-44CDBEF7F25E}"/>
+                <a16:creationId xmlns:a16="http://schemas.microsoft.com/office/drawing/2014/main" id="{7B0E450B-CE2B-C31B-FDFE-065FEE3F092C}"/>
               </a:ext>
             </a:extLst>
           </p:cNvPr>
@@ -1102,16 +1048,26 @@
             <p:ph type="sldNum" sz="quarter" idx="12"/>
           </p:nvPr>
         </p:nvSpPr>
-        <p:spPr/>
+        <p:spPr>
+          <a:xfrm>
+            <a:off x="8610600" y="6421667"/>
+            <a:ext cx="2743200" cy="365125"/>
+          </a:xfrm>
+        </p:spPr>
         <p:txBody>
           <a:bodyPr/>
-          <a:lstStyle/>
+          <a:lstStyle>
+            <a:lvl1pPr>
+              <a:defRPr sz="800"/>
+            </a:lvl1pPr>
+          </a:lstStyle>
           <a:p>
             <a:fld id="{9EBFBC76-F46F-4ADD-8228-9529630895ED}" type="slidenum">
-              <a:rPr kumimoji="1" lang="ja-JP" altLang="en-US" smtClean="0"/>
+              <a:rPr lang="ja-JP" altLang="en-US" smtClean="0"/>
+              <a:pPr/>
               <a:t>‹#›</a:t>
             </a:fld>
-            <a:endParaRPr kumimoji="1" lang="ja-JP" altLang="en-US"/>
+            <a:endParaRPr lang="ja-JP" altLang="en-US" dirty="0"/>
           </a:p>
         </p:txBody>
       </p:sp>
@@ -1119,476 +1075,6 @@
     <p:extLst>
       <p:ext uri="{BB962C8B-B14F-4D97-AF65-F5344CB8AC3E}">
         <p14:creationId xmlns:p14="http://schemas.microsoft.com/office/powerpoint/2010/main" val="2975453224"/>
-      </p:ext>
-    </p:extLst>
-  </p:cSld>
-  <p:clrMapOvr>
-    <a:masterClrMapping/>
-  </p:clrMapOvr>
-</p:sldLayout>
-</file>
-
-<file path=ppt/slideLayouts/slideLayout10.xml><?xml version="1.0" encoding="utf-8"?>
-<p:sldLayout xmlns:a="http://schemas.openxmlformats.org/drawingml/2006/main" xmlns:r="http://schemas.openxmlformats.org/officeDocument/2006/relationships" xmlns:p="http://schemas.openxmlformats.org/presentationml/2006/main" type="vertTx" preserve="1">
-  <p:cSld name="タイトルと縦書きテキスト">
-    <p:spTree>
-      <p:nvGrpSpPr>
-        <p:cNvPr id="1" name=""/>
-        <p:cNvGrpSpPr/>
-        <p:nvPr/>
-      </p:nvGrpSpPr>
-      <p:grpSpPr>
-        <a:xfrm>
-          <a:off x="0" y="0"/>
-          <a:ext cx="0" cy="0"/>
-          <a:chOff x="0" y="0"/>
-          <a:chExt cx="0" cy="0"/>
-        </a:xfrm>
-      </p:grpSpPr>
-      <p:sp>
-        <p:nvSpPr>
-          <p:cNvPr id="2" name="タイトル 1">
-            <a:extLst>
-              <a:ext uri="{FF2B5EF4-FFF2-40B4-BE49-F238E27FC236}">
-                <a16:creationId xmlns:a16="http://schemas.microsoft.com/office/drawing/2014/main" id="{B3D948F8-A898-A22B-7EF3-84E85241D754}"/>
-              </a:ext>
-            </a:extLst>
-          </p:cNvPr>
-          <p:cNvSpPr>
-            <a:spLocks noGrp="1"/>
-          </p:cNvSpPr>
-          <p:nvPr>
-            <p:ph type="title"/>
-          </p:nvPr>
-        </p:nvSpPr>
-        <p:spPr/>
-        <p:txBody>
-          <a:bodyPr/>
-          <a:lstStyle/>
-          <a:p>
-            <a:r>
-              <a:rPr kumimoji="1" lang="ja-JP" altLang="en-US"/>
-              <a:t>マスター タイトルの書式設定</a:t>
-            </a:r>
-          </a:p>
-        </p:txBody>
-      </p:sp>
-      <p:sp>
-        <p:nvSpPr>
-          <p:cNvPr id="3" name="縦書きテキスト プレースホルダー 2">
-            <a:extLst>
-              <a:ext uri="{FF2B5EF4-FFF2-40B4-BE49-F238E27FC236}">
-                <a16:creationId xmlns:a16="http://schemas.microsoft.com/office/drawing/2014/main" id="{EDB9CE3F-DD4B-FBB0-0358-E359990CFAE5}"/>
-              </a:ext>
-            </a:extLst>
-          </p:cNvPr>
-          <p:cNvSpPr>
-            <a:spLocks noGrp="1"/>
-          </p:cNvSpPr>
-          <p:nvPr>
-            <p:ph type="body" orient="vert" idx="1"/>
-          </p:nvPr>
-        </p:nvSpPr>
-        <p:spPr/>
-        <p:txBody>
-          <a:bodyPr vert="eaVert"/>
-          <a:lstStyle/>
-          <a:p>
-            <a:pPr lvl="0"/>
-            <a:r>
-              <a:rPr kumimoji="1" lang="ja-JP" altLang="en-US"/>
-              <a:t>マスター テキストの書式設定</a:t>
-            </a:r>
-          </a:p>
-          <a:p>
-            <a:pPr lvl="1"/>
-            <a:r>
-              <a:rPr kumimoji="1" lang="ja-JP" altLang="en-US"/>
-              <a:t>第 </a:t>
-            </a:r>
-            <a:r>
-              <a:rPr kumimoji="1" lang="en-US" altLang="ja-JP"/>
-              <a:t>2 </a:t>
-            </a:r>
-            <a:r>
-              <a:rPr kumimoji="1" lang="ja-JP" altLang="en-US"/>
-              <a:t>レベル</a:t>
-            </a:r>
-          </a:p>
-          <a:p>
-            <a:pPr lvl="2"/>
-            <a:r>
-              <a:rPr kumimoji="1" lang="ja-JP" altLang="en-US"/>
-              <a:t>第 </a:t>
-            </a:r>
-            <a:r>
-              <a:rPr kumimoji="1" lang="en-US" altLang="ja-JP"/>
-              <a:t>3 </a:t>
-            </a:r>
-            <a:r>
-              <a:rPr kumimoji="1" lang="ja-JP" altLang="en-US"/>
-              <a:t>レベル</a:t>
-            </a:r>
-          </a:p>
-          <a:p>
-            <a:pPr lvl="3"/>
-            <a:r>
-              <a:rPr kumimoji="1" lang="ja-JP" altLang="en-US"/>
-              <a:t>第 </a:t>
-            </a:r>
-            <a:r>
-              <a:rPr kumimoji="1" lang="en-US" altLang="ja-JP"/>
-              <a:t>4 </a:t>
-            </a:r>
-            <a:r>
-              <a:rPr kumimoji="1" lang="ja-JP" altLang="en-US"/>
-              <a:t>レベル</a:t>
-            </a:r>
-          </a:p>
-          <a:p>
-            <a:pPr lvl="4"/>
-            <a:r>
-              <a:rPr kumimoji="1" lang="ja-JP" altLang="en-US"/>
-              <a:t>第 </a:t>
-            </a:r>
-            <a:r>
-              <a:rPr kumimoji="1" lang="en-US" altLang="ja-JP"/>
-              <a:t>5 </a:t>
-            </a:r>
-            <a:r>
-              <a:rPr kumimoji="1" lang="ja-JP" altLang="en-US"/>
-              <a:t>レベル</a:t>
-            </a:r>
-          </a:p>
-        </p:txBody>
-      </p:sp>
-      <p:sp>
-        <p:nvSpPr>
-          <p:cNvPr id="4" name="日付プレースホルダー 3">
-            <a:extLst>
-              <a:ext uri="{FF2B5EF4-FFF2-40B4-BE49-F238E27FC236}">
-                <a16:creationId xmlns:a16="http://schemas.microsoft.com/office/drawing/2014/main" id="{D8A1EFE8-83F8-C673-6466-09628A8801F9}"/>
-              </a:ext>
-            </a:extLst>
-          </p:cNvPr>
-          <p:cNvSpPr>
-            <a:spLocks noGrp="1"/>
-          </p:cNvSpPr>
-          <p:nvPr>
-            <p:ph type="dt" sz="half" idx="10"/>
-          </p:nvPr>
-        </p:nvSpPr>
-        <p:spPr/>
-        <p:txBody>
-          <a:bodyPr/>
-          <a:lstStyle/>
-          <a:p>
-            <a:fld id="{E3EFBC31-9ECA-48C0-910F-E09377915FB8}" type="datetimeFigureOut">
-              <a:rPr kumimoji="1" lang="ja-JP" altLang="en-US" smtClean="0"/>
-              <a:t>2026/7/5</a:t>
-            </a:fld>
-            <a:endParaRPr kumimoji="1" lang="ja-JP" altLang="en-US"/>
-          </a:p>
-        </p:txBody>
-      </p:sp>
-      <p:sp>
-        <p:nvSpPr>
-          <p:cNvPr id="5" name="フッター プレースホルダー 4">
-            <a:extLst>
-              <a:ext uri="{FF2B5EF4-FFF2-40B4-BE49-F238E27FC236}">
-                <a16:creationId xmlns:a16="http://schemas.microsoft.com/office/drawing/2014/main" id="{18A29062-6AC9-DD4E-C20C-3568B001C141}"/>
-              </a:ext>
-            </a:extLst>
-          </p:cNvPr>
-          <p:cNvSpPr>
-            <a:spLocks noGrp="1"/>
-          </p:cNvSpPr>
-          <p:nvPr>
-            <p:ph type="ftr" sz="quarter" idx="11"/>
-          </p:nvPr>
-        </p:nvSpPr>
-        <p:spPr/>
-        <p:txBody>
-          <a:bodyPr/>
-          <a:lstStyle/>
-          <a:p>
-            <a:endParaRPr kumimoji="1" lang="ja-JP" altLang="en-US"/>
-          </a:p>
-        </p:txBody>
-      </p:sp>
-      <p:sp>
-        <p:nvSpPr>
-          <p:cNvPr id="6" name="スライド番号プレースホルダー 5">
-            <a:extLst>
-              <a:ext uri="{FF2B5EF4-FFF2-40B4-BE49-F238E27FC236}">
-                <a16:creationId xmlns:a16="http://schemas.microsoft.com/office/drawing/2014/main" id="{6FC21EC4-135A-AB14-091E-CA0A0AA389BF}"/>
-              </a:ext>
-            </a:extLst>
-          </p:cNvPr>
-          <p:cNvSpPr>
-            <a:spLocks noGrp="1"/>
-          </p:cNvSpPr>
-          <p:nvPr>
-            <p:ph type="sldNum" sz="quarter" idx="12"/>
-          </p:nvPr>
-        </p:nvSpPr>
-        <p:spPr/>
-        <p:txBody>
-          <a:bodyPr/>
-          <a:lstStyle/>
-          <a:p>
-            <a:fld id="{9EBFBC76-F46F-4ADD-8228-9529630895ED}" type="slidenum">
-              <a:rPr kumimoji="1" lang="ja-JP" altLang="en-US" smtClean="0"/>
-              <a:t>‹#›</a:t>
-            </a:fld>
-            <a:endParaRPr kumimoji="1" lang="ja-JP" altLang="en-US"/>
-          </a:p>
-        </p:txBody>
-      </p:sp>
-    </p:spTree>
-    <p:extLst>
-      <p:ext uri="{BB962C8B-B14F-4D97-AF65-F5344CB8AC3E}">
-        <p14:creationId xmlns:p14="http://schemas.microsoft.com/office/powerpoint/2010/main" val="2011069350"/>
-      </p:ext>
-    </p:extLst>
-  </p:cSld>
-  <p:clrMapOvr>
-    <a:masterClrMapping/>
-  </p:clrMapOvr>
-</p:sldLayout>
-</file>
-
-<file path=ppt/slideLayouts/slideLayout11.xml><?xml version="1.0" encoding="utf-8"?>
-<p:sldLayout xmlns:a="http://schemas.openxmlformats.org/drawingml/2006/main" xmlns:r="http://schemas.openxmlformats.org/officeDocument/2006/relationships" xmlns:p="http://schemas.openxmlformats.org/presentationml/2006/main" type="vertTitleAndTx" preserve="1">
-  <p:cSld name="縦書きタイトルと&#10;縦書きテキスト">
-    <p:spTree>
-      <p:nvGrpSpPr>
-        <p:cNvPr id="1" name=""/>
-        <p:cNvGrpSpPr/>
-        <p:nvPr/>
-      </p:nvGrpSpPr>
-      <p:grpSpPr>
-        <a:xfrm>
-          <a:off x="0" y="0"/>
-          <a:ext cx="0" cy="0"/>
-          <a:chOff x="0" y="0"/>
-          <a:chExt cx="0" cy="0"/>
-        </a:xfrm>
-      </p:grpSpPr>
-      <p:sp>
-        <p:nvSpPr>
-          <p:cNvPr id="2" name="縦書きタイトル 1">
-            <a:extLst>
-              <a:ext uri="{FF2B5EF4-FFF2-40B4-BE49-F238E27FC236}">
-                <a16:creationId xmlns:a16="http://schemas.microsoft.com/office/drawing/2014/main" id="{28A78528-6686-7717-9395-A6791781DC1D}"/>
-              </a:ext>
-            </a:extLst>
-          </p:cNvPr>
-          <p:cNvSpPr>
-            <a:spLocks noGrp="1"/>
-          </p:cNvSpPr>
-          <p:nvPr>
-            <p:ph type="title" orient="vert"/>
-          </p:nvPr>
-        </p:nvSpPr>
-        <p:spPr>
-          <a:xfrm>
-            <a:off x="8724900" y="365125"/>
-            <a:ext cx="2628900" cy="5811838"/>
-          </a:xfrm>
-        </p:spPr>
-        <p:txBody>
-          <a:bodyPr vert="eaVert"/>
-          <a:lstStyle/>
-          <a:p>
-            <a:r>
-              <a:rPr kumimoji="1" lang="ja-JP" altLang="en-US"/>
-              <a:t>マスター タイトルの書式設定</a:t>
-            </a:r>
-          </a:p>
-        </p:txBody>
-      </p:sp>
-      <p:sp>
-        <p:nvSpPr>
-          <p:cNvPr id="3" name="縦書きテキスト プレースホルダー 2">
-            <a:extLst>
-              <a:ext uri="{FF2B5EF4-FFF2-40B4-BE49-F238E27FC236}">
-                <a16:creationId xmlns:a16="http://schemas.microsoft.com/office/drawing/2014/main" id="{A8779115-C3F1-5580-1C82-172ACF121ED1}"/>
-              </a:ext>
-            </a:extLst>
-          </p:cNvPr>
-          <p:cNvSpPr>
-            <a:spLocks noGrp="1"/>
-          </p:cNvSpPr>
-          <p:nvPr>
-            <p:ph type="body" orient="vert" idx="1"/>
-          </p:nvPr>
-        </p:nvSpPr>
-        <p:spPr>
-          <a:xfrm>
-            <a:off x="838200" y="365125"/>
-            <a:ext cx="7734300" cy="5811838"/>
-          </a:xfrm>
-        </p:spPr>
-        <p:txBody>
-          <a:bodyPr vert="eaVert"/>
-          <a:lstStyle/>
-          <a:p>
-            <a:pPr lvl="0"/>
-            <a:r>
-              <a:rPr kumimoji="1" lang="ja-JP" altLang="en-US"/>
-              <a:t>マスター テキストの書式設定</a:t>
-            </a:r>
-          </a:p>
-          <a:p>
-            <a:pPr lvl="1"/>
-            <a:r>
-              <a:rPr kumimoji="1" lang="ja-JP" altLang="en-US"/>
-              <a:t>第 </a:t>
-            </a:r>
-            <a:r>
-              <a:rPr kumimoji="1" lang="en-US" altLang="ja-JP"/>
-              <a:t>2 </a:t>
-            </a:r>
-            <a:r>
-              <a:rPr kumimoji="1" lang="ja-JP" altLang="en-US"/>
-              <a:t>レベル</a:t>
-            </a:r>
-          </a:p>
-          <a:p>
-            <a:pPr lvl="2"/>
-            <a:r>
-              <a:rPr kumimoji="1" lang="ja-JP" altLang="en-US"/>
-              <a:t>第 </a:t>
-            </a:r>
-            <a:r>
-              <a:rPr kumimoji="1" lang="en-US" altLang="ja-JP"/>
-              <a:t>3 </a:t>
-            </a:r>
-            <a:r>
-              <a:rPr kumimoji="1" lang="ja-JP" altLang="en-US"/>
-              <a:t>レベル</a:t>
-            </a:r>
-          </a:p>
-          <a:p>
-            <a:pPr lvl="3"/>
-            <a:r>
-              <a:rPr kumimoji="1" lang="ja-JP" altLang="en-US"/>
-              <a:t>第 </a:t>
-            </a:r>
-            <a:r>
-              <a:rPr kumimoji="1" lang="en-US" altLang="ja-JP"/>
-              <a:t>4 </a:t>
-            </a:r>
-            <a:r>
-              <a:rPr kumimoji="1" lang="ja-JP" altLang="en-US"/>
-              <a:t>レベル</a:t>
-            </a:r>
-          </a:p>
-          <a:p>
-            <a:pPr lvl="4"/>
-            <a:r>
-              <a:rPr kumimoji="1" lang="ja-JP" altLang="en-US"/>
-              <a:t>第 </a:t>
-            </a:r>
-            <a:r>
-              <a:rPr kumimoji="1" lang="en-US" altLang="ja-JP"/>
-              <a:t>5 </a:t>
-            </a:r>
-            <a:r>
-              <a:rPr kumimoji="1" lang="ja-JP" altLang="en-US"/>
-              <a:t>レベル</a:t>
-            </a:r>
-          </a:p>
-        </p:txBody>
-      </p:sp>
-      <p:sp>
-        <p:nvSpPr>
-          <p:cNvPr id="4" name="日付プレースホルダー 3">
-            <a:extLst>
-              <a:ext uri="{FF2B5EF4-FFF2-40B4-BE49-F238E27FC236}">
-                <a16:creationId xmlns:a16="http://schemas.microsoft.com/office/drawing/2014/main" id="{7227D618-FA30-2F16-A3BA-1C48127BFE97}"/>
-              </a:ext>
-            </a:extLst>
-          </p:cNvPr>
-          <p:cNvSpPr>
-            <a:spLocks noGrp="1"/>
-          </p:cNvSpPr>
-          <p:nvPr>
-            <p:ph type="dt" sz="half" idx="10"/>
-          </p:nvPr>
-        </p:nvSpPr>
-        <p:spPr/>
-        <p:txBody>
-          <a:bodyPr/>
-          <a:lstStyle/>
-          <a:p>
-            <a:fld id="{E3EFBC31-9ECA-48C0-910F-E09377915FB8}" type="datetimeFigureOut">
-              <a:rPr kumimoji="1" lang="ja-JP" altLang="en-US" smtClean="0"/>
-              <a:t>2026/7/5</a:t>
-            </a:fld>
-            <a:endParaRPr kumimoji="1" lang="ja-JP" altLang="en-US"/>
-          </a:p>
-        </p:txBody>
-      </p:sp>
-      <p:sp>
-        <p:nvSpPr>
-          <p:cNvPr id="5" name="フッター プレースホルダー 4">
-            <a:extLst>
-              <a:ext uri="{FF2B5EF4-FFF2-40B4-BE49-F238E27FC236}">
-                <a16:creationId xmlns:a16="http://schemas.microsoft.com/office/drawing/2014/main" id="{0C6D16EA-23E0-4DB0-E96D-371B623EEC34}"/>
-              </a:ext>
-            </a:extLst>
-          </p:cNvPr>
-          <p:cNvSpPr>
-            <a:spLocks noGrp="1"/>
-          </p:cNvSpPr>
-          <p:nvPr>
-            <p:ph type="ftr" sz="quarter" idx="11"/>
-          </p:nvPr>
-        </p:nvSpPr>
-        <p:spPr/>
-        <p:txBody>
-          <a:bodyPr/>
-          <a:lstStyle/>
-          <a:p>
-            <a:endParaRPr kumimoji="1" lang="ja-JP" altLang="en-US"/>
-          </a:p>
-        </p:txBody>
-      </p:sp>
-      <p:sp>
-        <p:nvSpPr>
-          <p:cNvPr id="6" name="スライド番号プレースホルダー 5">
-            <a:extLst>
-              <a:ext uri="{FF2B5EF4-FFF2-40B4-BE49-F238E27FC236}">
-                <a16:creationId xmlns:a16="http://schemas.microsoft.com/office/drawing/2014/main" id="{1F350307-06A9-2F31-4E2F-74756A586547}"/>
-              </a:ext>
-            </a:extLst>
-          </p:cNvPr>
-          <p:cNvSpPr>
-            <a:spLocks noGrp="1"/>
-          </p:cNvSpPr>
-          <p:nvPr>
-            <p:ph type="sldNum" sz="quarter" idx="12"/>
-          </p:nvPr>
-        </p:nvSpPr>
-        <p:spPr/>
-        <p:txBody>
-          <a:bodyPr/>
-          <a:lstStyle/>
-          <a:p>
-            <a:fld id="{9EBFBC76-F46F-4ADD-8228-9529630895ED}" type="slidenum">
-              <a:rPr kumimoji="1" lang="ja-JP" altLang="en-US" smtClean="0"/>
-              <a:t>‹#›</a:t>
-            </a:fld>
-            <a:endParaRPr kumimoji="1" lang="ja-JP" altLang="en-US"/>
-          </a:p>
-        </p:txBody>
-      </p:sp>
-    </p:spTree>
-    <p:extLst>
-      <p:ext uri="{BB962C8B-B14F-4D97-AF65-F5344CB8AC3E}">
-        <p14:creationId xmlns:p14="http://schemas.microsoft.com/office/powerpoint/2010/main" val="1693637340"/>
       </p:ext>
     </p:extLst>
   </p:cSld>
@@ -1617,93 +1103,10 @@
       </p:grpSpPr>
       <p:sp>
         <p:nvSpPr>
-          <p:cNvPr id="4" name="日付プレースホルダー 3">
-            <a:extLst>
-              <a:ext uri="{FF2B5EF4-FFF2-40B4-BE49-F238E27FC236}">
-                <a16:creationId xmlns:a16="http://schemas.microsoft.com/office/drawing/2014/main" id="{311DBD3B-56FD-917A-7F5A-3015D9774F18}"/>
-              </a:ext>
-            </a:extLst>
-          </p:cNvPr>
-          <p:cNvSpPr>
-            <a:spLocks noGrp="1"/>
-          </p:cNvSpPr>
-          <p:nvPr>
-            <p:ph type="dt" sz="half" idx="10"/>
-          </p:nvPr>
-        </p:nvSpPr>
-        <p:spPr/>
-        <p:txBody>
-          <a:bodyPr/>
-          <a:lstStyle/>
-          <a:p>
-            <a:fld id="{E3EFBC31-9ECA-48C0-910F-E09377915FB8}" type="datetimeFigureOut">
-              <a:rPr kumimoji="1" lang="ja-JP" altLang="en-US" smtClean="0"/>
-              <a:t>2026/7/5</a:t>
-            </a:fld>
-            <a:endParaRPr kumimoji="1" lang="ja-JP" altLang="en-US"/>
-          </a:p>
-        </p:txBody>
-      </p:sp>
-      <p:sp>
-        <p:nvSpPr>
-          <p:cNvPr id="5" name="フッター プレースホルダー 4">
-            <a:extLst>
-              <a:ext uri="{FF2B5EF4-FFF2-40B4-BE49-F238E27FC236}">
-                <a16:creationId xmlns:a16="http://schemas.microsoft.com/office/drawing/2014/main" id="{8F2DC64E-F29E-D854-BEF0-3070C545D5CA}"/>
-              </a:ext>
-            </a:extLst>
-          </p:cNvPr>
-          <p:cNvSpPr>
-            <a:spLocks noGrp="1"/>
-          </p:cNvSpPr>
-          <p:nvPr>
-            <p:ph type="ftr" sz="quarter" idx="11"/>
-          </p:nvPr>
-        </p:nvSpPr>
-        <p:spPr/>
-        <p:txBody>
-          <a:bodyPr/>
-          <a:lstStyle/>
-          <a:p>
-            <a:endParaRPr kumimoji="1" lang="ja-JP" altLang="en-US"/>
-          </a:p>
-        </p:txBody>
-      </p:sp>
-      <p:sp>
-        <p:nvSpPr>
-          <p:cNvPr id="6" name="スライド番号プレースホルダー 5">
-            <a:extLst>
-              <a:ext uri="{FF2B5EF4-FFF2-40B4-BE49-F238E27FC236}">
-                <a16:creationId xmlns:a16="http://schemas.microsoft.com/office/drawing/2014/main" id="{7548F59C-A5D5-E9EE-6BFB-1E812ECDBA45}"/>
-              </a:ext>
-            </a:extLst>
-          </p:cNvPr>
-          <p:cNvSpPr>
-            <a:spLocks noGrp="1"/>
-          </p:cNvSpPr>
-          <p:nvPr>
-            <p:ph type="sldNum" sz="quarter" idx="12"/>
-          </p:nvPr>
-        </p:nvSpPr>
-        <p:spPr/>
-        <p:txBody>
-          <a:bodyPr/>
-          <a:lstStyle/>
-          <a:p>
-            <a:fld id="{9EBFBC76-F46F-4ADD-8228-9529630895ED}" type="slidenum">
-              <a:rPr kumimoji="1" lang="ja-JP" altLang="en-US" smtClean="0"/>
-              <a:t>‹#›</a:t>
-            </a:fld>
-            <a:endParaRPr kumimoji="1" lang="ja-JP" altLang="en-US"/>
-          </a:p>
-        </p:txBody>
-      </p:sp>
-      <p:sp>
-        <p:nvSpPr>
           <p:cNvPr id="7" name="タイトル 1">
             <a:extLst>
               <a:ext uri="{FF2B5EF4-FFF2-40B4-BE49-F238E27FC236}">
-                <a16:creationId xmlns:a16="http://schemas.microsoft.com/office/drawing/2014/main" id="{3268BB7D-DBD7-1713-CFE8-36DAC54A4B03}"/>
+                <a16:creationId xmlns:a16="http://schemas.microsoft.com/office/drawing/2014/main" id="{01664F20-F7C0-E482-4CCD-A50874056B4D}"/>
               </a:ext>
             </a:extLst>
           </p:cNvPr>
@@ -1745,7 +1148,7 @@
           <p:cNvPr id="8" name="コンテンツ プレースホルダー 2">
             <a:extLst>
               <a:ext uri="{FF2B5EF4-FFF2-40B4-BE49-F238E27FC236}">
-                <a16:creationId xmlns:a16="http://schemas.microsoft.com/office/drawing/2014/main" id="{FB81DDD8-40FD-B704-081F-F14E6F08899A}"/>
+                <a16:creationId xmlns:a16="http://schemas.microsoft.com/office/drawing/2014/main" id="{759E38C0-9660-9A49-7A90-097EDCC0796E}"/>
               </a:ext>
             </a:extLst>
           </p:cNvPr>
@@ -1764,7 +1167,13 @@
         </p:spPr>
         <p:txBody>
           <a:bodyPr/>
-          <a:lstStyle/>
+          <a:lstStyle>
+            <a:lvl2pPr marL="914400" indent="-457200">
+              <a:buFont typeface="+mj-lt"/>
+              <a:buAutoNum type="arabicPeriod"/>
+              <a:defRPr/>
+            </a:lvl2pPr>
+          </a:lstStyle>
           <a:p>
             <a:pPr lvl="0"/>
             <a:r>
@@ -1831,6 +1240,45 @@
               <a:rPr kumimoji="1" lang="ja-JP" altLang="en-US" dirty="0"/>
               <a:t>レベル</a:t>
             </a:r>
+          </a:p>
+        </p:txBody>
+      </p:sp>
+      <p:sp>
+        <p:nvSpPr>
+          <p:cNvPr id="10" name="スライド番号プレースホルダー 8">
+            <a:extLst>
+              <a:ext uri="{FF2B5EF4-FFF2-40B4-BE49-F238E27FC236}">
+                <a16:creationId xmlns:a16="http://schemas.microsoft.com/office/drawing/2014/main" id="{22D7A308-0628-F881-8567-86E4E9532F9D}"/>
+              </a:ext>
+            </a:extLst>
+          </p:cNvPr>
+          <p:cNvSpPr>
+            <a:spLocks noGrp="1"/>
+          </p:cNvSpPr>
+          <p:nvPr>
+            <p:ph type="sldNum" sz="quarter" idx="12"/>
+          </p:nvPr>
+        </p:nvSpPr>
+        <p:spPr>
+          <a:xfrm>
+            <a:off x="8610600" y="6421667"/>
+            <a:ext cx="2743200" cy="365125"/>
+          </a:xfrm>
+        </p:spPr>
+        <p:txBody>
+          <a:bodyPr/>
+          <a:lstStyle>
+            <a:lvl1pPr>
+              <a:defRPr sz="800"/>
+            </a:lvl1pPr>
+          </a:lstStyle>
+          <a:p>
+            <a:fld id="{9EBFBC76-F46F-4ADD-8228-9529630895ED}" type="slidenum">
+              <a:rPr lang="ja-JP" altLang="en-US" smtClean="0"/>
+              <a:pPr/>
+              <a:t>‹#›</a:t>
+            </a:fld>
+            <a:endParaRPr lang="ja-JP" altLang="en-US" dirty="0"/>
           </a:p>
         </p:txBody>
       </p:sp>
@@ -1848,6 +1296,217 @@
 </file>
 
 <file path=ppt/slideLayouts/slideLayout3.xml><?xml version="1.0" encoding="utf-8"?>
+<p:sldLayout xmlns:a="http://schemas.openxmlformats.org/drawingml/2006/main" xmlns:r="http://schemas.openxmlformats.org/officeDocument/2006/relationships" xmlns:p="http://schemas.openxmlformats.org/presentationml/2006/main" preserve="1" userDrawn="1">
+  <p:cSld name="1_タイトルとコンテンツ">
+    <p:spTree>
+      <p:nvGrpSpPr>
+        <p:cNvPr id="1" name=""/>
+        <p:cNvGrpSpPr/>
+        <p:nvPr/>
+      </p:nvGrpSpPr>
+      <p:grpSpPr>
+        <a:xfrm>
+          <a:off x="0" y="0"/>
+          <a:ext cx="0" cy="0"/>
+          <a:chOff x="0" y="0"/>
+          <a:chExt cx="0" cy="0"/>
+        </a:xfrm>
+      </p:grpSpPr>
+      <p:sp>
+        <p:nvSpPr>
+          <p:cNvPr id="7" name="タイトル 1">
+            <a:extLst>
+              <a:ext uri="{FF2B5EF4-FFF2-40B4-BE49-F238E27FC236}">
+                <a16:creationId xmlns:a16="http://schemas.microsoft.com/office/drawing/2014/main" id="{01664F20-F7C0-E482-4CCD-A50874056B4D}"/>
+              </a:ext>
+            </a:extLst>
+          </p:cNvPr>
+          <p:cNvSpPr>
+            <a:spLocks noGrp="1"/>
+          </p:cNvSpPr>
+          <p:nvPr>
+            <p:ph type="title"/>
+          </p:nvPr>
+        </p:nvSpPr>
+        <p:spPr>
+          <a:xfrm>
+            <a:off x="167951" y="365124"/>
+            <a:ext cx="11877869" cy="540000"/>
+          </a:xfrm>
+        </p:spPr>
+        <p:txBody>
+          <a:bodyPr>
+            <a:normAutofit/>
+          </a:bodyPr>
+          <a:lstStyle>
+            <a:lvl1pPr>
+              <a:defRPr sz="2400" b="1">
+                <a:latin typeface="Meiryo UI" panose="020B0604030504040204" pitchFamily="50" charset="-128"/>
+                <a:ea typeface="Meiryo UI" panose="020B0604030504040204" pitchFamily="50" charset="-128"/>
+              </a:defRPr>
+            </a:lvl1pPr>
+          </a:lstStyle>
+          <a:p>
+            <a:r>
+              <a:rPr kumimoji="1" lang="ja-JP" altLang="en-US" dirty="0"/>
+              <a:t>マスター タイトルの書式設定</a:t>
+            </a:r>
+          </a:p>
+        </p:txBody>
+      </p:sp>
+      <p:sp>
+        <p:nvSpPr>
+          <p:cNvPr id="8" name="コンテンツ プレースホルダー 2">
+            <a:extLst>
+              <a:ext uri="{FF2B5EF4-FFF2-40B4-BE49-F238E27FC236}">
+                <a16:creationId xmlns:a16="http://schemas.microsoft.com/office/drawing/2014/main" id="{759E38C0-9660-9A49-7A90-097EDCC0796E}"/>
+              </a:ext>
+            </a:extLst>
+          </p:cNvPr>
+          <p:cNvSpPr>
+            <a:spLocks noGrp="1"/>
+          </p:cNvSpPr>
+          <p:nvPr>
+            <p:ph idx="1"/>
+          </p:nvPr>
+        </p:nvSpPr>
+        <p:spPr>
+          <a:xfrm>
+            <a:off x="167951" y="1073020"/>
+            <a:ext cx="11877869" cy="5103943"/>
+          </a:xfrm>
+        </p:spPr>
+        <p:txBody>
+          <a:bodyPr/>
+          <a:lstStyle>
+            <a:lvl2pPr marL="914400" indent="-457200">
+              <a:buFont typeface="Arial" panose="020B0604020202020204" pitchFamily="34" charset="0"/>
+              <a:buChar char="•"/>
+              <a:defRPr/>
+            </a:lvl2pPr>
+          </a:lstStyle>
+          <a:p>
+            <a:pPr lvl="0"/>
+            <a:r>
+              <a:rPr kumimoji="1" lang="ja-JP" altLang="en-US" dirty="0"/>
+              <a:t>マスター テキストの書式設定</a:t>
+            </a:r>
+          </a:p>
+          <a:p>
+            <a:pPr lvl="1"/>
+            <a:r>
+              <a:rPr kumimoji="1" lang="ja-JP" altLang="en-US" dirty="0"/>
+              <a:t>第 </a:t>
+            </a:r>
+            <a:r>
+              <a:rPr kumimoji="1" lang="en-US" altLang="ja-JP" dirty="0"/>
+              <a:t>2 </a:t>
+            </a:r>
+            <a:r>
+              <a:rPr kumimoji="1" lang="ja-JP" altLang="en-US" dirty="0"/>
+              <a:t>レベル</a:t>
+            </a:r>
+          </a:p>
+          <a:p>
+            <a:pPr lvl="2"/>
+            <a:r>
+              <a:rPr kumimoji="1" lang="ja-JP" altLang="en-US" dirty="0"/>
+              <a:t>第 </a:t>
+            </a:r>
+            <a:r>
+              <a:rPr kumimoji="1" lang="en-US" altLang="ja-JP" dirty="0"/>
+              <a:t>3 </a:t>
+            </a:r>
+            <a:r>
+              <a:rPr kumimoji="1" lang="ja-JP" altLang="en-US" dirty="0"/>
+              <a:t>レベル</a:t>
+            </a:r>
+          </a:p>
+          <a:p>
+            <a:pPr lvl="3"/>
+            <a:r>
+              <a:rPr kumimoji="1" lang="ja-JP" altLang="en-US" dirty="0"/>
+              <a:t>第 </a:t>
+            </a:r>
+            <a:r>
+              <a:rPr kumimoji="1" lang="en-US" altLang="ja-JP" dirty="0"/>
+              <a:t>4 </a:t>
+            </a:r>
+            <a:r>
+              <a:rPr kumimoji="1" lang="ja-JP" altLang="en-US" dirty="0"/>
+              <a:t>レベル</a:t>
+            </a:r>
+          </a:p>
+          <a:p>
+            <a:pPr lvl="4"/>
+            <a:r>
+              <a:rPr kumimoji="1" lang="ja-JP" altLang="en-US" dirty="0"/>
+              <a:t>第 </a:t>
+            </a:r>
+            <a:r>
+              <a:rPr kumimoji="1" lang="en-US" altLang="ja-JP" dirty="0"/>
+              <a:t>5 </a:t>
+            </a:r>
+            <a:r>
+              <a:rPr kumimoji="1" lang="ja-JP" altLang="en-US" dirty="0"/>
+              <a:t>レベル</a:t>
+            </a:r>
+          </a:p>
+        </p:txBody>
+      </p:sp>
+      <p:sp>
+        <p:nvSpPr>
+          <p:cNvPr id="10" name="スライド番号プレースホルダー 8">
+            <a:extLst>
+              <a:ext uri="{FF2B5EF4-FFF2-40B4-BE49-F238E27FC236}">
+                <a16:creationId xmlns:a16="http://schemas.microsoft.com/office/drawing/2014/main" id="{22D7A308-0628-F881-8567-86E4E9532F9D}"/>
+              </a:ext>
+            </a:extLst>
+          </p:cNvPr>
+          <p:cNvSpPr>
+            <a:spLocks noGrp="1"/>
+          </p:cNvSpPr>
+          <p:nvPr>
+            <p:ph type="sldNum" sz="quarter" idx="12"/>
+          </p:nvPr>
+        </p:nvSpPr>
+        <p:spPr>
+          <a:xfrm>
+            <a:off x="8610600" y="6421667"/>
+            <a:ext cx="2743200" cy="365125"/>
+          </a:xfrm>
+        </p:spPr>
+        <p:txBody>
+          <a:bodyPr/>
+          <a:lstStyle>
+            <a:lvl1pPr>
+              <a:defRPr sz="800"/>
+            </a:lvl1pPr>
+          </a:lstStyle>
+          <a:p>
+            <a:fld id="{9EBFBC76-F46F-4ADD-8228-9529630895ED}" type="slidenum">
+              <a:rPr lang="ja-JP" altLang="en-US" smtClean="0"/>
+              <a:pPr/>
+              <a:t>‹#›</a:t>
+            </a:fld>
+            <a:endParaRPr lang="ja-JP" altLang="en-US" dirty="0"/>
+          </a:p>
+        </p:txBody>
+      </p:sp>
+    </p:spTree>
+    <p:extLst>
+      <p:ext uri="{BB962C8B-B14F-4D97-AF65-F5344CB8AC3E}">
+        <p14:creationId xmlns:p14="http://schemas.microsoft.com/office/powerpoint/2010/main" val="2384987877"/>
+      </p:ext>
+    </p:extLst>
+  </p:cSld>
+  <p:clrMapOvr>
+    <a:masterClrMapping/>
+  </p:clrMapOvr>
+</p:sldLayout>
+</file>
+
+<file path=ppt/slideLayouts/slideLayout4.xml><?xml version="1.0" encoding="utf-8"?>
 <p:sldLayout xmlns:a="http://schemas.openxmlformats.org/drawingml/2006/main" xmlns:r="http://schemas.openxmlformats.org/officeDocument/2006/relationships" xmlns:p="http://schemas.openxmlformats.org/presentationml/2006/main" type="secHead" preserve="1">
   <p:cSld name="セクション見出し">
     <p:spTree>
@@ -2028,64 +1687,10 @@
       </p:sp>
       <p:sp>
         <p:nvSpPr>
-          <p:cNvPr id="4" name="日付プレースホルダー 3">
+          <p:cNvPr id="7" name="スライド番号プレースホルダー 8">
             <a:extLst>
               <a:ext uri="{FF2B5EF4-FFF2-40B4-BE49-F238E27FC236}">
-                <a16:creationId xmlns:a16="http://schemas.microsoft.com/office/drawing/2014/main" id="{2AC23C55-8327-924C-2B72-D685D3026055}"/>
-              </a:ext>
-            </a:extLst>
-          </p:cNvPr>
-          <p:cNvSpPr>
-            <a:spLocks noGrp="1"/>
-          </p:cNvSpPr>
-          <p:nvPr>
-            <p:ph type="dt" sz="half" idx="10"/>
-          </p:nvPr>
-        </p:nvSpPr>
-        <p:spPr/>
-        <p:txBody>
-          <a:bodyPr/>
-          <a:lstStyle/>
-          <a:p>
-            <a:fld id="{E3EFBC31-9ECA-48C0-910F-E09377915FB8}" type="datetimeFigureOut">
-              <a:rPr kumimoji="1" lang="ja-JP" altLang="en-US" smtClean="0"/>
-              <a:t>2026/7/5</a:t>
-            </a:fld>
-            <a:endParaRPr kumimoji="1" lang="ja-JP" altLang="en-US"/>
-          </a:p>
-        </p:txBody>
-      </p:sp>
-      <p:sp>
-        <p:nvSpPr>
-          <p:cNvPr id="5" name="フッター プレースホルダー 4">
-            <a:extLst>
-              <a:ext uri="{FF2B5EF4-FFF2-40B4-BE49-F238E27FC236}">
-                <a16:creationId xmlns:a16="http://schemas.microsoft.com/office/drawing/2014/main" id="{AB1B9B42-5325-6348-7A2E-823A20CCF2C1}"/>
-              </a:ext>
-            </a:extLst>
-          </p:cNvPr>
-          <p:cNvSpPr>
-            <a:spLocks noGrp="1"/>
-          </p:cNvSpPr>
-          <p:nvPr>
-            <p:ph type="ftr" sz="quarter" idx="11"/>
-          </p:nvPr>
-        </p:nvSpPr>
-        <p:spPr/>
-        <p:txBody>
-          <a:bodyPr/>
-          <a:lstStyle/>
-          <a:p>
-            <a:endParaRPr kumimoji="1" lang="ja-JP" altLang="en-US"/>
-          </a:p>
-        </p:txBody>
-      </p:sp>
-      <p:sp>
-        <p:nvSpPr>
-          <p:cNvPr id="6" name="スライド番号プレースホルダー 5">
-            <a:extLst>
-              <a:ext uri="{FF2B5EF4-FFF2-40B4-BE49-F238E27FC236}">
-                <a16:creationId xmlns:a16="http://schemas.microsoft.com/office/drawing/2014/main" id="{0B0BB805-FA2B-03EC-E53A-E3CA558927B4}"/>
+                <a16:creationId xmlns:a16="http://schemas.microsoft.com/office/drawing/2014/main" id="{51D98275-5521-9186-79B1-A367B515DB90}"/>
               </a:ext>
             </a:extLst>
           </p:cNvPr>
@@ -2096,16 +1701,26 @@
             <p:ph type="sldNum" sz="quarter" idx="12"/>
           </p:nvPr>
         </p:nvSpPr>
-        <p:spPr/>
+        <p:spPr>
+          <a:xfrm>
+            <a:off x="8610600" y="6421667"/>
+            <a:ext cx="2743200" cy="365125"/>
+          </a:xfrm>
+        </p:spPr>
         <p:txBody>
           <a:bodyPr/>
-          <a:lstStyle/>
+          <a:lstStyle>
+            <a:lvl1pPr>
+              <a:defRPr sz="800"/>
+            </a:lvl1pPr>
+          </a:lstStyle>
           <a:p>
             <a:fld id="{9EBFBC76-F46F-4ADD-8228-9529630895ED}" type="slidenum">
-              <a:rPr kumimoji="1" lang="ja-JP" altLang="en-US" smtClean="0"/>
+              <a:rPr lang="ja-JP" altLang="en-US" smtClean="0"/>
+              <a:pPr/>
               <a:t>‹#›</a:t>
             </a:fld>
-            <a:endParaRPr kumimoji="1" lang="ja-JP" altLang="en-US"/>
+            <a:endParaRPr lang="ja-JP" altLang="en-US" dirty="0"/>
           </a:p>
         </p:txBody>
       </p:sp>
@@ -2113,1696 +1728,6 @@
     <p:extLst>
       <p:ext uri="{BB962C8B-B14F-4D97-AF65-F5344CB8AC3E}">
         <p14:creationId xmlns:p14="http://schemas.microsoft.com/office/powerpoint/2010/main" val="3841387114"/>
-      </p:ext>
-    </p:extLst>
-  </p:cSld>
-  <p:clrMapOvr>
-    <a:masterClrMapping/>
-  </p:clrMapOvr>
-</p:sldLayout>
-</file>
-
-<file path=ppt/slideLayouts/slideLayout4.xml><?xml version="1.0" encoding="utf-8"?>
-<p:sldLayout xmlns:a="http://schemas.openxmlformats.org/drawingml/2006/main" xmlns:r="http://schemas.openxmlformats.org/officeDocument/2006/relationships" xmlns:p="http://schemas.openxmlformats.org/presentationml/2006/main" type="twoObj" preserve="1">
-  <p:cSld name="2 つのコンテンツ">
-    <p:spTree>
-      <p:nvGrpSpPr>
-        <p:cNvPr id="1" name=""/>
-        <p:cNvGrpSpPr/>
-        <p:nvPr/>
-      </p:nvGrpSpPr>
-      <p:grpSpPr>
-        <a:xfrm>
-          <a:off x="0" y="0"/>
-          <a:ext cx="0" cy="0"/>
-          <a:chOff x="0" y="0"/>
-          <a:chExt cx="0" cy="0"/>
-        </a:xfrm>
-      </p:grpSpPr>
-      <p:sp>
-        <p:nvSpPr>
-          <p:cNvPr id="2" name="タイトル 1">
-            <a:extLst>
-              <a:ext uri="{FF2B5EF4-FFF2-40B4-BE49-F238E27FC236}">
-                <a16:creationId xmlns:a16="http://schemas.microsoft.com/office/drawing/2014/main" id="{C82A8F03-F9A4-C9E1-8930-9B9AF0D34BE7}"/>
-              </a:ext>
-            </a:extLst>
-          </p:cNvPr>
-          <p:cNvSpPr>
-            <a:spLocks noGrp="1"/>
-          </p:cNvSpPr>
-          <p:nvPr>
-            <p:ph type="title"/>
-          </p:nvPr>
-        </p:nvSpPr>
-        <p:spPr/>
-        <p:txBody>
-          <a:bodyPr/>
-          <a:lstStyle/>
-          <a:p>
-            <a:r>
-              <a:rPr kumimoji="1" lang="ja-JP" altLang="en-US"/>
-              <a:t>マスター タイトルの書式設定</a:t>
-            </a:r>
-          </a:p>
-        </p:txBody>
-      </p:sp>
-      <p:sp>
-        <p:nvSpPr>
-          <p:cNvPr id="3" name="コンテンツ プレースホルダー 2">
-            <a:extLst>
-              <a:ext uri="{FF2B5EF4-FFF2-40B4-BE49-F238E27FC236}">
-                <a16:creationId xmlns:a16="http://schemas.microsoft.com/office/drawing/2014/main" id="{AE9B11C5-849D-9104-8534-05B157123DC0}"/>
-              </a:ext>
-            </a:extLst>
-          </p:cNvPr>
-          <p:cNvSpPr>
-            <a:spLocks noGrp="1"/>
-          </p:cNvSpPr>
-          <p:nvPr>
-            <p:ph sz="half" idx="1"/>
-          </p:nvPr>
-        </p:nvSpPr>
-        <p:spPr>
-          <a:xfrm>
-            <a:off x="838200" y="1825625"/>
-            <a:ext cx="5181600" cy="4351338"/>
-          </a:xfrm>
-        </p:spPr>
-        <p:txBody>
-          <a:bodyPr/>
-          <a:lstStyle/>
-          <a:p>
-            <a:pPr lvl="0"/>
-            <a:r>
-              <a:rPr kumimoji="1" lang="ja-JP" altLang="en-US"/>
-              <a:t>マスター テキストの書式設定</a:t>
-            </a:r>
-          </a:p>
-          <a:p>
-            <a:pPr lvl="1"/>
-            <a:r>
-              <a:rPr kumimoji="1" lang="ja-JP" altLang="en-US"/>
-              <a:t>第 </a:t>
-            </a:r>
-            <a:r>
-              <a:rPr kumimoji="1" lang="en-US" altLang="ja-JP"/>
-              <a:t>2 </a:t>
-            </a:r>
-            <a:r>
-              <a:rPr kumimoji="1" lang="ja-JP" altLang="en-US"/>
-              <a:t>レベル</a:t>
-            </a:r>
-          </a:p>
-          <a:p>
-            <a:pPr lvl="2"/>
-            <a:r>
-              <a:rPr kumimoji="1" lang="ja-JP" altLang="en-US"/>
-              <a:t>第 </a:t>
-            </a:r>
-            <a:r>
-              <a:rPr kumimoji="1" lang="en-US" altLang="ja-JP"/>
-              <a:t>3 </a:t>
-            </a:r>
-            <a:r>
-              <a:rPr kumimoji="1" lang="ja-JP" altLang="en-US"/>
-              <a:t>レベル</a:t>
-            </a:r>
-          </a:p>
-          <a:p>
-            <a:pPr lvl="3"/>
-            <a:r>
-              <a:rPr kumimoji="1" lang="ja-JP" altLang="en-US"/>
-              <a:t>第 </a:t>
-            </a:r>
-            <a:r>
-              <a:rPr kumimoji="1" lang="en-US" altLang="ja-JP"/>
-              <a:t>4 </a:t>
-            </a:r>
-            <a:r>
-              <a:rPr kumimoji="1" lang="ja-JP" altLang="en-US"/>
-              <a:t>レベル</a:t>
-            </a:r>
-          </a:p>
-          <a:p>
-            <a:pPr lvl="4"/>
-            <a:r>
-              <a:rPr kumimoji="1" lang="ja-JP" altLang="en-US"/>
-              <a:t>第 </a:t>
-            </a:r>
-            <a:r>
-              <a:rPr kumimoji="1" lang="en-US" altLang="ja-JP"/>
-              <a:t>5 </a:t>
-            </a:r>
-            <a:r>
-              <a:rPr kumimoji="1" lang="ja-JP" altLang="en-US"/>
-              <a:t>レベル</a:t>
-            </a:r>
-          </a:p>
-        </p:txBody>
-      </p:sp>
-      <p:sp>
-        <p:nvSpPr>
-          <p:cNvPr id="4" name="コンテンツ プレースホルダー 3">
-            <a:extLst>
-              <a:ext uri="{FF2B5EF4-FFF2-40B4-BE49-F238E27FC236}">
-                <a16:creationId xmlns:a16="http://schemas.microsoft.com/office/drawing/2014/main" id="{1E1E799F-E1CC-CC44-0753-6D7D0C923800}"/>
-              </a:ext>
-            </a:extLst>
-          </p:cNvPr>
-          <p:cNvSpPr>
-            <a:spLocks noGrp="1"/>
-          </p:cNvSpPr>
-          <p:nvPr>
-            <p:ph sz="half" idx="2"/>
-          </p:nvPr>
-        </p:nvSpPr>
-        <p:spPr>
-          <a:xfrm>
-            <a:off x="6172200" y="1825625"/>
-            <a:ext cx="5181600" cy="4351338"/>
-          </a:xfrm>
-        </p:spPr>
-        <p:txBody>
-          <a:bodyPr/>
-          <a:lstStyle/>
-          <a:p>
-            <a:pPr lvl="0"/>
-            <a:r>
-              <a:rPr kumimoji="1" lang="ja-JP" altLang="en-US"/>
-              <a:t>マスター テキストの書式設定</a:t>
-            </a:r>
-          </a:p>
-          <a:p>
-            <a:pPr lvl="1"/>
-            <a:r>
-              <a:rPr kumimoji="1" lang="ja-JP" altLang="en-US"/>
-              <a:t>第 </a:t>
-            </a:r>
-            <a:r>
-              <a:rPr kumimoji="1" lang="en-US" altLang="ja-JP"/>
-              <a:t>2 </a:t>
-            </a:r>
-            <a:r>
-              <a:rPr kumimoji="1" lang="ja-JP" altLang="en-US"/>
-              <a:t>レベル</a:t>
-            </a:r>
-          </a:p>
-          <a:p>
-            <a:pPr lvl="2"/>
-            <a:r>
-              <a:rPr kumimoji="1" lang="ja-JP" altLang="en-US"/>
-              <a:t>第 </a:t>
-            </a:r>
-            <a:r>
-              <a:rPr kumimoji="1" lang="en-US" altLang="ja-JP"/>
-              <a:t>3 </a:t>
-            </a:r>
-            <a:r>
-              <a:rPr kumimoji="1" lang="ja-JP" altLang="en-US"/>
-              <a:t>レベル</a:t>
-            </a:r>
-          </a:p>
-          <a:p>
-            <a:pPr lvl="3"/>
-            <a:r>
-              <a:rPr kumimoji="1" lang="ja-JP" altLang="en-US"/>
-              <a:t>第 </a:t>
-            </a:r>
-            <a:r>
-              <a:rPr kumimoji="1" lang="en-US" altLang="ja-JP"/>
-              <a:t>4 </a:t>
-            </a:r>
-            <a:r>
-              <a:rPr kumimoji="1" lang="ja-JP" altLang="en-US"/>
-              <a:t>レベル</a:t>
-            </a:r>
-          </a:p>
-          <a:p>
-            <a:pPr lvl="4"/>
-            <a:r>
-              <a:rPr kumimoji="1" lang="ja-JP" altLang="en-US"/>
-              <a:t>第 </a:t>
-            </a:r>
-            <a:r>
-              <a:rPr kumimoji="1" lang="en-US" altLang="ja-JP"/>
-              <a:t>5 </a:t>
-            </a:r>
-            <a:r>
-              <a:rPr kumimoji="1" lang="ja-JP" altLang="en-US"/>
-              <a:t>レベル</a:t>
-            </a:r>
-          </a:p>
-        </p:txBody>
-      </p:sp>
-      <p:sp>
-        <p:nvSpPr>
-          <p:cNvPr id="5" name="日付プレースホルダー 4">
-            <a:extLst>
-              <a:ext uri="{FF2B5EF4-FFF2-40B4-BE49-F238E27FC236}">
-                <a16:creationId xmlns:a16="http://schemas.microsoft.com/office/drawing/2014/main" id="{F4315350-56EC-072A-EE57-7D7FD671B06C}"/>
-              </a:ext>
-            </a:extLst>
-          </p:cNvPr>
-          <p:cNvSpPr>
-            <a:spLocks noGrp="1"/>
-          </p:cNvSpPr>
-          <p:nvPr>
-            <p:ph type="dt" sz="half" idx="10"/>
-          </p:nvPr>
-        </p:nvSpPr>
-        <p:spPr/>
-        <p:txBody>
-          <a:bodyPr/>
-          <a:lstStyle/>
-          <a:p>
-            <a:fld id="{E3EFBC31-9ECA-48C0-910F-E09377915FB8}" type="datetimeFigureOut">
-              <a:rPr kumimoji="1" lang="ja-JP" altLang="en-US" smtClean="0"/>
-              <a:t>2026/7/5</a:t>
-            </a:fld>
-            <a:endParaRPr kumimoji="1" lang="ja-JP" altLang="en-US"/>
-          </a:p>
-        </p:txBody>
-      </p:sp>
-      <p:sp>
-        <p:nvSpPr>
-          <p:cNvPr id="6" name="フッター プレースホルダー 5">
-            <a:extLst>
-              <a:ext uri="{FF2B5EF4-FFF2-40B4-BE49-F238E27FC236}">
-                <a16:creationId xmlns:a16="http://schemas.microsoft.com/office/drawing/2014/main" id="{39CFC015-F252-9E7E-F23E-9859CCF4238C}"/>
-              </a:ext>
-            </a:extLst>
-          </p:cNvPr>
-          <p:cNvSpPr>
-            <a:spLocks noGrp="1"/>
-          </p:cNvSpPr>
-          <p:nvPr>
-            <p:ph type="ftr" sz="quarter" idx="11"/>
-          </p:nvPr>
-        </p:nvSpPr>
-        <p:spPr/>
-        <p:txBody>
-          <a:bodyPr/>
-          <a:lstStyle/>
-          <a:p>
-            <a:endParaRPr kumimoji="1" lang="ja-JP" altLang="en-US"/>
-          </a:p>
-        </p:txBody>
-      </p:sp>
-      <p:sp>
-        <p:nvSpPr>
-          <p:cNvPr id="7" name="スライド番号プレースホルダー 6">
-            <a:extLst>
-              <a:ext uri="{FF2B5EF4-FFF2-40B4-BE49-F238E27FC236}">
-                <a16:creationId xmlns:a16="http://schemas.microsoft.com/office/drawing/2014/main" id="{3F775C56-D7A0-4254-A2E6-4CA99D50A303}"/>
-              </a:ext>
-            </a:extLst>
-          </p:cNvPr>
-          <p:cNvSpPr>
-            <a:spLocks noGrp="1"/>
-          </p:cNvSpPr>
-          <p:nvPr>
-            <p:ph type="sldNum" sz="quarter" idx="12"/>
-          </p:nvPr>
-        </p:nvSpPr>
-        <p:spPr/>
-        <p:txBody>
-          <a:bodyPr/>
-          <a:lstStyle/>
-          <a:p>
-            <a:fld id="{9EBFBC76-F46F-4ADD-8228-9529630895ED}" type="slidenum">
-              <a:rPr kumimoji="1" lang="ja-JP" altLang="en-US" smtClean="0"/>
-              <a:t>‹#›</a:t>
-            </a:fld>
-            <a:endParaRPr kumimoji="1" lang="ja-JP" altLang="en-US"/>
-          </a:p>
-        </p:txBody>
-      </p:sp>
-    </p:spTree>
-    <p:extLst>
-      <p:ext uri="{BB962C8B-B14F-4D97-AF65-F5344CB8AC3E}">
-        <p14:creationId xmlns:p14="http://schemas.microsoft.com/office/powerpoint/2010/main" val="3546901665"/>
-      </p:ext>
-    </p:extLst>
-  </p:cSld>
-  <p:clrMapOvr>
-    <a:masterClrMapping/>
-  </p:clrMapOvr>
-</p:sldLayout>
-</file>
-
-<file path=ppt/slideLayouts/slideLayout5.xml><?xml version="1.0" encoding="utf-8"?>
-<p:sldLayout xmlns:a="http://schemas.openxmlformats.org/drawingml/2006/main" xmlns:r="http://schemas.openxmlformats.org/officeDocument/2006/relationships" xmlns:p="http://schemas.openxmlformats.org/presentationml/2006/main" type="twoTxTwoObj" preserve="1">
-  <p:cSld name="比較">
-    <p:spTree>
-      <p:nvGrpSpPr>
-        <p:cNvPr id="1" name=""/>
-        <p:cNvGrpSpPr/>
-        <p:nvPr/>
-      </p:nvGrpSpPr>
-      <p:grpSpPr>
-        <a:xfrm>
-          <a:off x="0" y="0"/>
-          <a:ext cx="0" cy="0"/>
-          <a:chOff x="0" y="0"/>
-          <a:chExt cx="0" cy="0"/>
-        </a:xfrm>
-      </p:grpSpPr>
-      <p:sp>
-        <p:nvSpPr>
-          <p:cNvPr id="2" name="タイトル 1">
-            <a:extLst>
-              <a:ext uri="{FF2B5EF4-FFF2-40B4-BE49-F238E27FC236}">
-                <a16:creationId xmlns:a16="http://schemas.microsoft.com/office/drawing/2014/main" id="{0F87F651-F4E6-22A7-969C-361E7EB82358}"/>
-              </a:ext>
-            </a:extLst>
-          </p:cNvPr>
-          <p:cNvSpPr>
-            <a:spLocks noGrp="1"/>
-          </p:cNvSpPr>
-          <p:nvPr>
-            <p:ph type="title"/>
-          </p:nvPr>
-        </p:nvSpPr>
-        <p:spPr>
-          <a:xfrm>
-            <a:off x="839788" y="365125"/>
-            <a:ext cx="10515600" cy="1325563"/>
-          </a:xfrm>
-        </p:spPr>
-        <p:txBody>
-          <a:bodyPr/>
-          <a:lstStyle/>
-          <a:p>
-            <a:r>
-              <a:rPr kumimoji="1" lang="ja-JP" altLang="en-US"/>
-              <a:t>マスター タイトルの書式設定</a:t>
-            </a:r>
-          </a:p>
-        </p:txBody>
-      </p:sp>
-      <p:sp>
-        <p:nvSpPr>
-          <p:cNvPr id="3" name="テキスト プレースホルダー 2">
-            <a:extLst>
-              <a:ext uri="{FF2B5EF4-FFF2-40B4-BE49-F238E27FC236}">
-                <a16:creationId xmlns:a16="http://schemas.microsoft.com/office/drawing/2014/main" id="{D1D87F37-09C8-1C47-DA85-89348412F3DE}"/>
-              </a:ext>
-            </a:extLst>
-          </p:cNvPr>
-          <p:cNvSpPr>
-            <a:spLocks noGrp="1"/>
-          </p:cNvSpPr>
-          <p:nvPr>
-            <p:ph type="body" idx="1"/>
-          </p:nvPr>
-        </p:nvSpPr>
-        <p:spPr>
-          <a:xfrm>
-            <a:off x="839788" y="1681163"/>
-            <a:ext cx="5157787" cy="823912"/>
-          </a:xfrm>
-        </p:spPr>
-        <p:txBody>
-          <a:bodyPr anchor="b"/>
-          <a:lstStyle>
-            <a:lvl1pPr marL="0" indent="0">
-              <a:buNone/>
-              <a:defRPr sz="2400" b="1"/>
-            </a:lvl1pPr>
-            <a:lvl2pPr marL="457200" indent="0">
-              <a:buNone/>
-              <a:defRPr sz="2000" b="1"/>
-            </a:lvl2pPr>
-            <a:lvl3pPr marL="914400" indent="0">
-              <a:buNone/>
-              <a:defRPr sz="1800" b="1"/>
-            </a:lvl3pPr>
-            <a:lvl4pPr marL="1371600" indent="0">
-              <a:buNone/>
-              <a:defRPr sz="1600" b="1"/>
-            </a:lvl4pPr>
-            <a:lvl5pPr marL="1828800" indent="0">
-              <a:buNone/>
-              <a:defRPr sz="1600" b="1"/>
-            </a:lvl5pPr>
-            <a:lvl6pPr marL="2286000" indent="0">
-              <a:buNone/>
-              <a:defRPr sz="1600" b="1"/>
-            </a:lvl6pPr>
-            <a:lvl7pPr marL="2743200" indent="0">
-              <a:buNone/>
-              <a:defRPr sz="1600" b="1"/>
-            </a:lvl7pPr>
-            <a:lvl8pPr marL="3200400" indent="0">
-              <a:buNone/>
-              <a:defRPr sz="1600" b="1"/>
-            </a:lvl8pPr>
-            <a:lvl9pPr marL="3657600" indent="0">
-              <a:buNone/>
-              <a:defRPr sz="1600" b="1"/>
-            </a:lvl9pPr>
-          </a:lstStyle>
-          <a:p>
-            <a:pPr lvl="0"/>
-            <a:r>
-              <a:rPr kumimoji="1" lang="ja-JP" altLang="en-US"/>
-              <a:t>マスター テキストの書式設定</a:t>
-            </a:r>
-          </a:p>
-        </p:txBody>
-      </p:sp>
-      <p:sp>
-        <p:nvSpPr>
-          <p:cNvPr id="4" name="コンテンツ プレースホルダー 3">
-            <a:extLst>
-              <a:ext uri="{FF2B5EF4-FFF2-40B4-BE49-F238E27FC236}">
-                <a16:creationId xmlns:a16="http://schemas.microsoft.com/office/drawing/2014/main" id="{041EDEFF-D785-4B71-7114-49A611C895D8}"/>
-              </a:ext>
-            </a:extLst>
-          </p:cNvPr>
-          <p:cNvSpPr>
-            <a:spLocks noGrp="1"/>
-          </p:cNvSpPr>
-          <p:nvPr>
-            <p:ph sz="half" idx="2"/>
-          </p:nvPr>
-        </p:nvSpPr>
-        <p:spPr>
-          <a:xfrm>
-            <a:off x="839788" y="2505075"/>
-            <a:ext cx="5157787" cy="3684588"/>
-          </a:xfrm>
-        </p:spPr>
-        <p:txBody>
-          <a:bodyPr/>
-          <a:lstStyle/>
-          <a:p>
-            <a:pPr lvl="0"/>
-            <a:r>
-              <a:rPr kumimoji="1" lang="ja-JP" altLang="en-US"/>
-              <a:t>マスター テキストの書式設定</a:t>
-            </a:r>
-          </a:p>
-          <a:p>
-            <a:pPr lvl="1"/>
-            <a:r>
-              <a:rPr kumimoji="1" lang="ja-JP" altLang="en-US"/>
-              <a:t>第 </a:t>
-            </a:r>
-            <a:r>
-              <a:rPr kumimoji="1" lang="en-US" altLang="ja-JP"/>
-              <a:t>2 </a:t>
-            </a:r>
-            <a:r>
-              <a:rPr kumimoji="1" lang="ja-JP" altLang="en-US"/>
-              <a:t>レベル</a:t>
-            </a:r>
-          </a:p>
-          <a:p>
-            <a:pPr lvl="2"/>
-            <a:r>
-              <a:rPr kumimoji="1" lang="ja-JP" altLang="en-US"/>
-              <a:t>第 </a:t>
-            </a:r>
-            <a:r>
-              <a:rPr kumimoji="1" lang="en-US" altLang="ja-JP"/>
-              <a:t>3 </a:t>
-            </a:r>
-            <a:r>
-              <a:rPr kumimoji="1" lang="ja-JP" altLang="en-US"/>
-              <a:t>レベル</a:t>
-            </a:r>
-          </a:p>
-          <a:p>
-            <a:pPr lvl="3"/>
-            <a:r>
-              <a:rPr kumimoji="1" lang="ja-JP" altLang="en-US"/>
-              <a:t>第 </a:t>
-            </a:r>
-            <a:r>
-              <a:rPr kumimoji="1" lang="en-US" altLang="ja-JP"/>
-              <a:t>4 </a:t>
-            </a:r>
-            <a:r>
-              <a:rPr kumimoji="1" lang="ja-JP" altLang="en-US"/>
-              <a:t>レベル</a:t>
-            </a:r>
-          </a:p>
-          <a:p>
-            <a:pPr lvl="4"/>
-            <a:r>
-              <a:rPr kumimoji="1" lang="ja-JP" altLang="en-US"/>
-              <a:t>第 </a:t>
-            </a:r>
-            <a:r>
-              <a:rPr kumimoji="1" lang="en-US" altLang="ja-JP"/>
-              <a:t>5 </a:t>
-            </a:r>
-            <a:r>
-              <a:rPr kumimoji="1" lang="ja-JP" altLang="en-US"/>
-              <a:t>レベル</a:t>
-            </a:r>
-          </a:p>
-        </p:txBody>
-      </p:sp>
-      <p:sp>
-        <p:nvSpPr>
-          <p:cNvPr id="5" name="テキスト プレースホルダー 4">
-            <a:extLst>
-              <a:ext uri="{FF2B5EF4-FFF2-40B4-BE49-F238E27FC236}">
-                <a16:creationId xmlns:a16="http://schemas.microsoft.com/office/drawing/2014/main" id="{A4CF3450-F545-1FFD-F875-8DE3CCB76B8D}"/>
-              </a:ext>
-            </a:extLst>
-          </p:cNvPr>
-          <p:cNvSpPr>
-            <a:spLocks noGrp="1"/>
-          </p:cNvSpPr>
-          <p:nvPr>
-            <p:ph type="body" sz="quarter" idx="3"/>
-          </p:nvPr>
-        </p:nvSpPr>
-        <p:spPr>
-          <a:xfrm>
-            <a:off x="6172200" y="1681163"/>
-            <a:ext cx="5183188" cy="823912"/>
-          </a:xfrm>
-        </p:spPr>
-        <p:txBody>
-          <a:bodyPr anchor="b"/>
-          <a:lstStyle>
-            <a:lvl1pPr marL="0" indent="0">
-              <a:buNone/>
-              <a:defRPr sz="2400" b="1"/>
-            </a:lvl1pPr>
-            <a:lvl2pPr marL="457200" indent="0">
-              <a:buNone/>
-              <a:defRPr sz="2000" b="1"/>
-            </a:lvl2pPr>
-            <a:lvl3pPr marL="914400" indent="0">
-              <a:buNone/>
-              <a:defRPr sz="1800" b="1"/>
-            </a:lvl3pPr>
-            <a:lvl4pPr marL="1371600" indent="0">
-              <a:buNone/>
-              <a:defRPr sz="1600" b="1"/>
-            </a:lvl4pPr>
-            <a:lvl5pPr marL="1828800" indent="0">
-              <a:buNone/>
-              <a:defRPr sz="1600" b="1"/>
-            </a:lvl5pPr>
-            <a:lvl6pPr marL="2286000" indent="0">
-              <a:buNone/>
-              <a:defRPr sz="1600" b="1"/>
-            </a:lvl6pPr>
-            <a:lvl7pPr marL="2743200" indent="0">
-              <a:buNone/>
-              <a:defRPr sz="1600" b="1"/>
-            </a:lvl7pPr>
-            <a:lvl8pPr marL="3200400" indent="0">
-              <a:buNone/>
-              <a:defRPr sz="1600" b="1"/>
-            </a:lvl8pPr>
-            <a:lvl9pPr marL="3657600" indent="0">
-              <a:buNone/>
-              <a:defRPr sz="1600" b="1"/>
-            </a:lvl9pPr>
-          </a:lstStyle>
-          <a:p>
-            <a:pPr lvl="0"/>
-            <a:r>
-              <a:rPr kumimoji="1" lang="ja-JP" altLang="en-US"/>
-              <a:t>マスター テキストの書式設定</a:t>
-            </a:r>
-          </a:p>
-        </p:txBody>
-      </p:sp>
-      <p:sp>
-        <p:nvSpPr>
-          <p:cNvPr id="6" name="コンテンツ プレースホルダー 5">
-            <a:extLst>
-              <a:ext uri="{FF2B5EF4-FFF2-40B4-BE49-F238E27FC236}">
-                <a16:creationId xmlns:a16="http://schemas.microsoft.com/office/drawing/2014/main" id="{95E611BD-461C-12F4-A3BC-6154F6BA1EDA}"/>
-              </a:ext>
-            </a:extLst>
-          </p:cNvPr>
-          <p:cNvSpPr>
-            <a:spLocks noGrp="1"/>
-          </p:cNvSpPr>
-          <p:nvPr>
-            <p:ph sz="quarter" idx="4"/>
-          </p:nvPr>
-        </p:nvSpPr>
-        <p:spPr>
-          <a:xfrm>
-            <a:off x="6172200" y="2505075"/>
-            <a:ext cx="5183188" cy="3684588"/>
-          </a:xfrm>
-        </p:spPr>
-        <p:txBody>
-          <a:bodyPr/>
-          <a:lstStyle/>
-          <a:p>
-            <a:pPr lvl="0"/>
-            <a:r>
-              <a:rPr kumimoji="1" lang="ja-JP" altLang="en-US"/>
-              <a:t>マスター テキストの書式設定</a:t>
-            </a:r>
-          </a:p>
-          <a:p>
-            <a:pPr lvl="1"/>
-            <a:r>
-              <a:rPr kumimoji="1" lang="ja-JP" altLang="en-US"/>
-              <a:t>第 </a:t>
-            </a:r>
-            <a:r>
-              <a:rPr kumimoji="1" lang="en-US" altLang="ja-JP"/>
-              <a:t>2 </a:t>
-            </a:r>
-            <a:r>
-              <a:rPr kumimoji="1" lang="ja-JP" altLang="en-US"/>
-              <a:t>レベル</a:t>
-            </a:r>
-          </a:p>
-          <a:p>
-            <a:pPr lvl="2"/>
-            <a:r>
-              <a:rPr kumimoji="1" lang="ja-JP" altLang="en-US"/>
-              <a:t>第 </a:t>
-            </a:r>
-            <a:r>
-              <a:rPr kumimoji="1" lang="en-US" altLang="ja-JP"/>
-              <a:t>3 </a:t>
-            </a:r>
-            <a:r>
-              <a:rPr kumimoji="1" lang="ja-JP" altLang="en-US"/>
-              <a:t>レベル</a:t>
-            </a:r>
-          </a:p>
-          <a:p>
-            <a:pPr lvl="3"/>
-            <a:r>
-              <a:rPr kumimoji="1" lang="ja-JP" altLang="en-US"/>
-              <a:t>第 </a:t>
-            </a:r>
-            <a:r>
-              <a:rPr kumimoji="1" lang="en-US" altLang="ja-JP"/>
-              <a:t>4 </a:t>
-            </a:r>
-            <a:r>
-              <a:rPr kumimoji="1" lang="ja-JP" altLang="en-US"/>
-              <a:t>レベル</a:t>
-            </a:r>
-          </a:p>
-          <a:p>
-            <a:pPr lvl="4"/>
-            <a:r>
-              <a:rPr kumimoji="1" lang="ja-JP" altLang="en-US"/>
-              <a:t>第 </a:t>
-            </a:r>
-            <a:r>
-              <a:rPr kumimoji="1" lang="en-US" altLang="ja-JP"/>
-              <a:t>5 </a:t>
-            </a:r>
-            <a:r>
-              <a:rPr kumimoji="1" lang="ja-JP" altLang="en-US"/>
-              <a:t>レベル</a:t>
-            </a:r>
-          </a:p>
-        </p:txBody>
-      </p:sp>
-      <p:sp>
-        <p:nvSpPr>
-          <p:cNvPr id="7" name="日付プレースホルダー 6">
-            <a:extLst>
-              <a:ext uri="{FF2B5EF4-FFF2-40B4-BE49-F238E27FC236}">
-                <a16:creationId xmlns:a16="http://schemas.microsoft.com/office/drawing/2014/main" id="{B4F81492-847C-EE97-CE4E-E34C2A9E0BA0}"/>
-              </a:ext>
-            </a:extLst>
-          </p:cNvPr>
-          <p:cNvSpPr>
-            <a:spLocks noGrp="1"/>
-          </p:cNvSpPr>
-          <p:nvPr>
-            <p:ph type="dt" sz="half" idx="10"/>
-          </p:nvPr>
-        </p:nvSpPr>
-        <p:spPr/>
-        <p:txBody>
-          <a:bodyPr/>
-          <a:lstStyle/>
-          <a:p>
-            <a:fld id="{E3EFBC31-9ECA-48C0-910F-E09377915FB8}" type="datetimeFigureOut">
-              <a:rPr kumimoji="1" lang="ja-JP" altLang="en-US" smtClean="0"/>
-              <a:t>2026/7/5</a:t>
-            </a:fld>
-            <a:endParaRPr kumimoji="1" lang="ja-JP" altLang="en-US"/>
-          </a:p>
-        </p:txBody>
-      </p:sp>
-      <p:sp>
-        <p:nvSpPr>
-          <p:cNvPr id="8" name="フッター プレースホルダー 7">
-            <a:extLst>
-              <a:ext uri="{FF2B5EF4-FFF2-40B4-BE49-F238E27FC236}">
-                <a16:creationId xmlns:a16="http://schemas.microsoft.com/office/drawing/2014/main" id="{508207F7-1FE0-73EF-D402-872A8833CAEE}"/>
-              </a:ext>
-            </a:extLst>
-          </p:cNvPr>
-          <p:cNvSpPr>
-            <a:spLocks noGrp="1"/>
-          </p:cNvSpPr>
-          <p:nvPr>
-            <p:ph type="ftr" sz="quarter" idx="11"/>
-          </p:nvPr>
-        </p:nvSpPr>
-        <p:spPr/>
-        <p:txBody>
-          <a:bodyPr/>
-          <a:lstStyle/>
-          <a:p>
-            <a:endParaRPr kumimoji="1" lang="ja-JP" altLang="en-US"/>
-          </a:p>
-        </p:txBody>
-      </p:sp>
-      <p:sp>
-        <p:nvSpPr>
-          <p:cNvPr id="9" name="スライド番号プレースホルダー 8">
-            <a:extLst>
-              <a:ext uri="{FF2B5EF4-FFF2-40B4-BE49-F238E27FC236}">
-                <a16:creationId xmlns:a16="http://schemas.microsoft.com/office/drawing/2014/main" id="{8F6F3EF7-641F-90DB-332E-E52417E39F7B}"/>
-              </a:ext>
-            </a:extLst>
-          </p:cNvPr>
-          <p:cNvSpPr>
-            <a:spLocks noGrp="1"/>
-          </p:cNvSpPr>
-          <p:nvPr>
-            <p:ph type="sldNum" sz="quarter" idx="12"/>
-          </p:nvPr>
-        </p:nvSpPr>
-        <p:spPr/>
-        <p:txBody>
-          <a:bodyPr/>
-          <a:lstStyle/>
-          <a:p>
-            <a:fld id="{9EBFBC76-F46F-4ADD-8228-9529630895ED}" type="slidenum">
-              <a:rPr kumimoji="1" lang="ja-JP" altLang="en-US" smtClean="0"/>
-              <a:t>‹#›</a:t>
-            </a:fld>
-            <a:endParaRPr kumimoji="1" lang="ja-JP" altLang="en-US"/>
-          </a:p>
-        </p:txBody>
-      </p:sp>
-    </p:spTree>
-    <p:extLst>
-      <p:ext uri="{BB962C8B-B14F-4D97-AF65-F5344CB8AC3E}">
-        <p14:creationId xmlns:p14="http://schemas.microsoft.com/office/powerpoint/2010/main" val="1465333793"/>
-      </p:ext>
-    </p:extLst>
-  </p:cSld>
-  <p:clrMapOvr>
-    <a:masterClrMapping/>
-  </p:clrMapOvr>
-</p:sldLayout>
-</file>
-
-<file path=ppt/slideLayouts/slideLayout6.xml><?xml version="1.0" encoding="utf-8"?>
-<p:sldLayout xmlns:a="http://schemas.openxmlformats.org/drawingml/2006/main" xmlns:r="http://schemas.openxmlformats.org/officeDocument/2006/relationships" xmlns:p="http://schemas.openxmlformats.org/presentationml/2006/main" type="titleOnly" preserve="1">
-  <p:cSld name="タイトルのみ">
-    <p:spTree>
-      <p:nvGrpSpPr>
-        <p:cNvPr id="1" name=""/>
-        <p:cNvGrpSpPr/>
-        <p:nvPr/>
-      </p:nvGrpSpPr>
-      <p:grpSpPr>
-        <a:xfrm>
-          <a:off x="0" y="0"/>
-          <a:ext cx="0" cy="0"/>
-          <a:chOff x="0" y="0"/>
-          <a:chExt cx="0" cy="0"/>
-        </a:xfrm>
-      </p:grpSpPr>
-      <p:sp>
-        <p:nvSpPr>
-          <p:cNvPr id="2" name="タイトル 1">
-            <a:extLst>
-              <a:ext uri="{FF2B5EF4-FFF2-40B4-BE49-F238E27FC236}">
-                <a16:creationId xmlns:a16="http://schemas.microsoft.com/office/drawing/2014/main" id="{0533C488-7001-3614-BBDB-52F57B051E21}"/>
-              </a:ext>
-            </a:extLst>
-          </p:cNvPr>
-          <p:cNvSpPr>
-            <a:spLocks noGrp="1"/>
-          </p:cNvSpPr>
-          <p:nvPr>
-            <p:ph type="title"/>
-          </p:nvPr>
-        </p:nvSpPr>
-        <p:spPr/>
-        <p:txBody>
-          <a:bodyPr/>
-          <a:lstStyle/>
-          <a:p>
-            <a:r>
-              <a:rPr kumimoji="1" lang="ja-JP" altLang="en-US"/>
-              <a:t>マスター タイトルの書式設定</a:t>
-            </a:r>
-          </a:p>
-        </p:txBody>
-      </p:sp>
-      <p:sp>
-        <p:nvSpPr>
-          <p:cNvPr id="3" name="日付プレースホルダー 2">
-            <a:extLst>
-              <a:ext uri="{FF2B5EF4-FFF2-40B4-BE49-F238E27FC236}">
-                <a16:creationId xmlns:a16="http://schemas.microsoft.com/office/drawing/2014/main" id="{67F87A66-C96C-D4FF-9241-9CE679FE2AA9}"/>
-              </a:ext>
-            </a:extLst>
-          </p:cNvPr>
-          <p:cNvSpPr>
-            <a:spLocks noGrp="1"/>
-          </p:cNvSpPr>
-          <p:nvPr>
-            <p:ph type="dt" sz="half" idx="10"/>
-          </p:nvPr>
-        </p:nvSpPr>
-        <p:spPr/>
-        <p:txBody>
-          <a:bodyPr/>
-          <a:lstStyle/>
-          <a:p>
-            <a:fld id="{E3EFBC31-9ECA-48C0-910F-E09377915FB8}" type="datetimeFigureOut">
-              <a:rPr kumimoji="1" lang="ja-JP" altLang="en-US" smtClean="0"/>
-              <a:t>2026/7/5</a:t>
-            </a:fld>
-            <a:endParaRPr kumimoji="1" lang="ja-JP" altLang="en-US"/>
-          </a:p>
-        </p:txBody>
-      </p:sp>
-      <p:sp>
-        <p:nvSpPr>
-          <p:cNvPr id="4" name="フッター プレースホルダー 3">
-            <a:extLst>
-              <a:ext uri="{FF2B5EF4-FFF2-40B4-BE49-F238E27FC236}">
-                <a16:creationId xmlns:a16="http://schemas.microsoft.com/office/drawing/2014/main" id="{93116E27-0034-7717-9FEE-82777DE206A0}"/>
-              </a:ext>
-            </a:extLst>
-          </p:cNvPr>
-          <p:cNvSpPr>
-            <a:spLocks noGrp="1"/>
-          </p:cNvSpPr>
-          <p:nvPr>
-            <p:ph type="ftr" sz="quarter" idx="11"/>
-          </p:nvPr>
-        </p:nvSpPr>
-        <p:spPr/>
-        <p:txBody>
-          <a:bodyPr/>
-          <a:lstStyle/>
-          <a:p>
-            <a:endParaRPr kumimoji="1" lang="ja-JP" altLang="en-US"/>
-          </a:p>
-        </p:txBody>
-      </p:sp>
-      <p:sp>
-        <p:nvSpPr>
-          <p:cNvPr id="5" name="スライド番号プレースホルダー 4">
-            <a:extLst>
-              <a:ext uri="{FF2B5EF4-FFF2-40B4-BE49-F238E27FC236}">
-                <a16:creationId xmlns:a16="http://schemas.microsoft.com/office/drawing/2014/main" id="{B21BDC13-BC57-56EC-7696-822A94E13DCA}"/>
-              </a:ext>
-            </a:extLst>
-          </p:cNvPr>
-          <p:cNvSpPr>
-            <a:spLocks noGrp="1"/>
-          </p:cNvSpPr>
-          <p:nvPr>
-            <p:ph type="sldNum" sz="quarter" idx="12"/>
-          </p:nvPr>
-        </p:nvSpPr>
-        <p:spPr/>
-        <p:txBody>
-          <a:bodyPr/>
-          <a:lstStyle/>
-          <a:p>
-            <a:fld id="{9EBFBC76-F46F-4ADD-8228-9529630895ED}" type="slidenum">
-              <a:rPr kumimoji="1" lang="ja-JP" altLang="en-US" smtClean="0"/>
-              <a:t>‹#›</a:t>
-            </a:fld>
-            <a:endParaRPr kumimoji="1" lang="ja-JP" altLang="en-US"/>
-          </a:p>
-        </p:txBody>
-      </p:sp>
-    </p:spTree>
-    <p:extLst>
-      <p:ext uri="{BB962C8B-B14F-4D97-AF65-F5344CB8AC3E}">
-        <p14:creationId xmlns:p14="http://schemas.microsoft.com/office/powerpoint/2010/main" val="3285570792"/>
-      </p:ext>
-    </p:extLst>
-  </p:cSld>
-  <p:clrMapOvr>
-    <a:masterClrMapping/>
-  </p:clrMapOvr>
-</p:sldLayout>
-</file>
-
-<file path=ppt/slideLayouts/slideLayout7.xml><?xml version="1.0" encoding="utf-8"?>
-<p:sldLayout xmlns:a="http://schemas.openxmlformats.org/drawingml/2006/main" xmlns:r="http://schemas.openxmlformats.org/officeDocument/2006/relationships" xmlns:p="http://schemas.openxmlformats.org/presentationml/2006/main" type="blank" preserve="1">
-  <p:cSld name="白紙">
-    <p:spTree>
-      <p:nvGrpSpPr>
-        <p:cNvPr id="1" name=""/>
-        <p:cNvGrpSpPr/>
-        <p:nvPr/>
-      </p:nvGrpSpPr>
-      <p:grpSpPr>
-        <a:xfrm>
-          <a:off x="0" y="0"/>
-          <a:ext cx="0" cy="0"/>
-          <a:chOff x="0" y="0"/>
-          <a:chExt cx="0" cy="0"/>
-        </a:xfrm>
-      </p:grpSpPr>
-      <p:sp>
-        <p:nvSpPr>
-          <p:cNvPr id="2" name="日付プレースホルダー 1">
-            <a:extLst>
-              <a:ext uri="{FF2B5EF4-FFF2-40B4-BE49-F238E27FC236}">
-                <a16:creationId xmlns:a16="http://schemas.microsoft.com/office/drawing/2014/main" id="{2C96747D-199C-DB70-796B-D7AD9498DAAD}"/>
-              </a:ext>
-            </a:extLst>
-          </p:cNvPr>
-          <p:cNvSpPr>
-            <a:spLocks noGrp="1"/>
-          </p:cNvSpPr>
-          <p:nvPr>
-            <p:ph type="dt" sz="half" idx="10"/>
-          </p:nvPr>
-        </p:nvSpPr>
-        <p:spPr/>
-        <p:txBody>
-          <a:bodyPr/>
-          <a:lstStyle/>
-          <a:p>
-            <a:fld id="{E3EFBC31-9ECA-48C0-910F-E09377915FB8}" type="datetimeFigureOut">
-              <a:rPr kumimoji="1" lang="ja-JP" altLang="en-US" smtClean="0"/>
-              <a:t>2026/7/5</a:t>
-            </a:fld>
-            <a:endParaRPr kumimoji="1" lang="ja-JP" altLang="en-US"/>
-          </a:p>
-        </p:txBody>
-      </p:sp>
-      <p:sp>
-        <p:nvSpPr>
-          <p:cNvPr id="3" name="フッター プレースホルダー 2">
-            <a:extLst>
-              <a:ext uri="{FF2B5EF4-FFF2-40B4-BE49-F238E27FC236}">
-                <a16:creationId xmlns:a16="http://schemas.microsoft.com/office/drawing/2014/main" id="{D95DF319-00BA-725F-BC6A-27C0CA6C687A}"/>
-              </a:ext>
-            </a:extLst>
-          </p:cNvPr>
-          <p:cNvSpPr>
-            <a:spLocks noGrp="1"/>
-          </p:cNvSpPr>
-          <p:nvPr>
-            <p:ph type="ftr" sz="quarter" idx="11"/>
-          </p:nvPr>
-        </p:nvSpPr>
-        <p:spPr/>
-        <p:txBody>
-          <a:bodyPr/>
-          <a:lstStyle/>
-          <a:p>
-            <a:endParaRPr kumimoji="1" lang="ja-JP" altLang="en-US"/>
-          </a:p>
-        </p:txBody>
-      </p:sp>
-      <p:sp>
-        <p:nvSpPr>
-          <p:cNvPr id="4" name="スライド番号プレースホルダー 3">
-            <a:extLst>
-              <a:ext uri="{FF2B5EF4-FFF2-40B4-BE49-F238E27FC236}">
-                <a16:creationId xmlns:a16="http://schemas.microsoft.com/office/drawing/2014/main" id="{F3F24241-0D68-5DC6-E45A-B7BBC9246733}"/>
-              </a:ext>
-            </a:extLst>
-          </p:cNvPr>
-          <p:cNvSpPr>
-            <a:spLocks noGrp="1"/>
-          </p:cNvSpPr>
-          <p:nvPr>
-            <p:ph type="sldNum" sz="quarter" idx="12"/>
-          </p:nvPr>
-        </p:nvSpPr>
-        <p:spPr/>
-        <p:txBody>
-          <a:bodyPr/>
-          <a:lstStyle/>
-          <a:p>
-            <a:fld id="{9EBFBC76-F46F-4ADD-8228-9529630895ED}" type="slidenum">
-              <a:rPr kumimoji="1" lang="ja-JP" altLang="en-US" smtClean="0"/>
-              <a:t>‹#›</a:t>
-            </a:fld>
-            <a:endParaRPr kumimoji="1" lang="ja-JP" altLang="en-US"/>
-          </a:p>
-        </p:txBody>
-      </p:sp>
-    </p:spTree>
-    <p:extLst>
-      <p:ext uri="{BB962C8B-B14F-4D97-AF65-F5344CB8AC3E}">
-        <p14:creationId xmlns:p14="http://schemas.microsoft.com/office/powerpoint/2010/main" val="1924275464"/>
-      </p:ext>
-    </p:extLst>
-  </p:cSld>
-  <p:clrMapOvr>
-    <a:masterClrMapping/>
-  </p:clrMapOvr>
-</p:sldLayout>
-</file>
-
-<file path=ppt/slideLayouts/slideLayout8.xml><?xml version="1.0" encoding="utf-8"?>
-<p:sldLayout xmlns:a="http://schemas.openxmlformats.org/drawingml/2006/main" xmlns:r="http://schemas.openxmlformats.org/officeDocument/2006/relationships" xmlns:p="http://schemas.openxmlformats.org/presentationml/2006/main" type="objTx" preserve="1">
-  <p:cSld name="タイトル付きのコンテンツ">
-    <p:spTree>
-      <p:nvGrpSpPr>
-        <p:cNvPr id="1" name=""/>
-        <p:cNvGrpSpPr/>
-        <p:nvPr/>
-      </p:nvGrpSpPr>
-      <p:grpSpPr>
-        <a:xfrm>
-          <a:off x="0" y="0"/>
-          <a:ext cx="0" cy="0"/>
-          <a:chOff x="0" y="0"/>
-          <a:chExt cx="0" cy="0"/>
-        </a:xfrm>
-      </p:grpSpPr>
-      <p:sp>
-        <p:nvSpPr>
-          <p:cNvPr id="2" name="タイトル 1">
-            <a:extLst>
-              <a:ext uri="{FF2B5EF4-FFF2-40B4-BE49-F238E27FC236}">
-                <a16:creationId xmlns:a16="http://schemas.microsoft.com/office/drawing/2014/main" id="{6583C645-DBBF-EBC8-73A4-9590C9AA4578}"/>
-              </a:ext>
-            </a:extLst>
-          </p:cNvPr>
-          <p:cNvSpPr>
-            <a:spLocks noGrp="1"/>
-          </p:cNvSpPr>
-          <p:nvPr>
-            <p:ph type="title"/>
-          </p:nvPr>
-        </p:nvSpPr>
-        <p:spPr>
-          <a:xfrm>
-            <a:off x="839788" y="457200"/>
-            <a:ext cx="3932237" cy="1600200"/>
-          </a:xfrm>
-        </p:spPr>
-        <p:txBody>
-          <a:bodyPr anchor="b"/>
-          <a:lstStyle>
-            <a:lvl1pPr>
-              <a:defRPr sz="3200"/>
-            </a:lvl1pPr>
-          </a:lstStyle>
-          <a:p>
-            <a:r>
-              <a:rPr kumimoji="1" lang="ja-JP" altLang="en-US"/>
-              <a:t>マスター タイトルの書式設定</a:t>
-            </a:r>
-          </a:p>
-        </p:txBody>
-      </p:sp>
-      <p:sp>
-        <p:nvSpPr>
-          <p:cNvPr id="3" name="コンテンツ プレースホルダー 2">
-            <a:extLst>
-              <a:ext uri="{FF2B5EF4-FFF2-40B4-BE49-F238E27FC236}">
-                <a16:creationId xmlns:a16="http://schemas.microsoft.com/office/drawing/2014/main" id="{2981406B-DD2E-D5D3-AE10-E0AB4E154E5A}"/>
-              </a:ext>
-            </a:extLst>
-          </p:cNvPr>
-          <p:cNvSpPr>
-            <a:spLocks noGrp="1"/>
-          </p:cNvSpPr>
-          <p:nvPr>
-            <p:ph idx="1"/>
-          </p:nvPr>
-        </p:nvSpPr>
-        <p:spPr>
-          <a:xfrm>
-            <a:off x="5183188" y="987425"/>
-            <a:ext cx="6172200" cy="4873625"/>
-          </a:xfrm>
-        </p:spPr>
-        <p:txBody>
-          <a:bodyPr/>
-          <a:lstStyle>
-            <a:lvl1pPr>
-              <a:defRPr sz="3200"/>
-            </a:lvl1pPr>
-            <a:lvl2pPr>
-              <a:defRPr sz="2800"/>
-            </a:lvl2pPr>
-            <a:lvl3pPr>
-              <a:defRPr sz="2400"/>
-            </a:lvl3pPr>
-            <a:lvl4pPr>
-              <a:defRPr sz="2000"/>
-            </a:lvl4pPr>
-            <a:lvl5pPr>
-              <a:defRPr sz="2000"/>
-            </a:lvl5pPr>
-            <a:lvl6pPr>
-              <a:defRPr sz="2000"/>
-            </a:lvl6pPr>
-            <a:lvl7pPr>
-              <a:defRPr sz="2000"/>
-            </a:lvl7pPr>
-            <a:lvl8pPr>
-              <a:defRPr sz="2000"/>
-            </a:lvl8pPr>
-            <a:lvl9pPr>
-              <a:defRPr sz="2000"/>
-            </a:lvl9pPr>
-          </a:lstStyle>
-          <a:p>
-            <a:pPr lvl="0"/>
-            <a:r>
-              <a:rPr kumimoji="1" lang="ja-JP" altLang="en-US"/>
-              <a:t>マスター テキストの書式設定</a:t>
-            </a:r>
-          </a:p>
-          <a:p>
-            <a:pPr lvl="1"/>
-            <a:r>
-              <a:rPr kumimoji="1" lang="ja-JP" altLang="en-US"/>
-              <a:t>第 </a:t>
-            </a:r>
-            <a:r>
-              <a:rPr kumimoji="1" lang="en-US" altLang="ja-JP"/>
-              <a:t>2 </a:t>
-            </a:r>
-            <a:r>
-              <a:rPr kumimoji="1" lang="ja-JP" altLang="en-US"/>
-              <a:t>レベル</a:t>
-            </a:r>
-          </a:p>
-          <a:p>
-            <a:pPr lvl="2"/>
-            <a:r>
-              <a:rPr kumimoji="1" lang="ja-JP" altLang="en-US"/>
-              <a:t>第 </a:t>
-            </a:r>
-            <a:r>
-              <a:rPr kumimoji="1" lang="en-US" altLang="ja-JP"/>
-              <a:t>3 </a:t>
-            </a:r>
-            <a:r>
-              <a:rPr kumimoji="1" lang="ja-JP" altLang="en-US"/>
-              <a:t>レベル</a:t>
-            </a:r>
-          </a:p>
-          <a:p>
-            <a:pPr lvl="3"/>
-            <a:r>
-              <a:rPr kumimoji="1" lang="ja-JP" altLang="en-US"/>
-              <a:t>第 </a:t>
-            </a:r>
-            <a:r>
-              <a:rPr kumimoji="1" lang="en-US" altLang="ja-JP"/>
-              <a:t>4 </a:t>
-            </a:r>
-            <a:r>
-              <a:rPr kumimoji="1" lang="ja-JP" altLang="en-US"/>
-              <a:t>レベル</a:t>
-            </a:r>
-          </a:p>
-          <a:p>
-            <a:pPr lvl="4"/>
-            <a:r>
-              <a:rPr kumimoji="1" lang="ja-JP" altLang="en-US"/>
-              <a:t>第 </a:t>
-            </a:r>
-            <a:r>
-              <a:rPr kumimoji="1" lang="en-US" altLang="ja-JP"/>
-              <a:t>5 </a:t>
-            </a:r>
-            <a:r>
-              <a:rPr kumimoji="1" lang="ja-JP" altLang="en-US"/>
-              <a:t>レベル</a:t>
-            </a:r>
-          </a:p>
-        </p:txBody>
-      </p:sp>
-      <p:sp>
-        <p:nvSpPr>
-          <p:cNvPr id="4" name="テキスト プレースホルダー 3">
-            <a:extLst>
-              <a:ext uri="{FF2B5EF4-FFF2-40B4-BE49-F238E27FC236}">
-                <a16:creationId xmlns:a16="http://schemas.microsoft.com/office/drawing/2014/main" id="{E11620FD-5FFA-4826-B001-35BBC49CA67D}"/>
-              </a:ext>
-            </a:extLst>
-          </p:cNvPr>
-          <p:cNvSpPr>
-            <a:spLocks noGrp="1"/>
-          </p:cNvSpPr>
-          <p:nvPr>
-            <p:ph type="body" sz="half" idx="2"/>
-          </p:nvPr>
-        </p:nvSpPr>
-        <p:spPr>
-          <a:xfrm>
-            <a:off x="839788" y="2057400"/>
-            <a:ext cx="3932237" cy="3811588"/>
-          </a:xfrm>
-        </p:spPr>
-        <p:txBody>
-          <a:bodyPr/>
-          <a:lstStyle>
-            <a:lvl1pPr marL="0" indent="0">
-              <a:buNone/>
-              <a:defRPr sz="1600"/>
-            </a:lvl1pPr>
-            <a:lvl2pPr marL="457200" indent="0">
-              <a:buNone/>
-              <a:defRPr sz="1400"/>
-            </a:lvl2pPr>
-            <a:lvl3pPr marL="914400" indent="0">
-              <a:buNone/>
-              <a:defRPr sz="1200"/>
-            </a:lvl3pPr>
-            <a:lvl4pPr marL="1371600" indent="0">
-              <a:buNone/>
-              <a:defRPr sz="1000"/>
-            </a:lvl4pPr>
-            <a:lvl5pPr marL="1828800" indent="0">
-              <a:buNone/>
-              <a:defRPr sz="1000"/>
-            </a:lvl5pPr>
-            <a:lvl6pPr marL="2286000" indent="0">
-              <a:buNone/>
-              <a:defRPr sz="1000"/>
-            </a:lvl6pPr>
-            <a:lvl7pPr marL="2743200" indent="0">
-              <a:buNone/>
-              <a:defRPr sz="1000"/>
-            </a:lvl7pPr>
-            <a:lvl8pPr marL="3200400" indent="0">
-              <a:buNone/>
-              <a:defRPr sz="1000"/>
-            </a:lvl8pPr>
-            <a:lvl9pPr marL="3657600" indent="0">
-              <a:buNone/>
-              <a:defRPr sz="1000"/>
-            </a:lvl9pPr>
-          </a:lstStyle>
-          <a:p>
-            <a:pPr lvl="0"/>
-            <a:r>
-              <a:rPr kumimoji="1" lang="ja-JP" altLang="en-US"/>
-              <a:t>マスター テキストの書式設定</a:t>
-            </a:r>
-          </a:p>
-        </p:txBody>
-      </p:sp>
-      <p:sp>
-        <p:nvSpPr>
-          <p:cNvPr id="5" name="日付プレースホルダー 4">
-            <a:extLst>
-              <a:ext uri="{FF2B5EF4-FFF2-40B4-BE49-F238E27FC236}">
-                <a16:creationId xmlns:a16="http://schemas.microsoft.com/office/drawing/2014/main" id="{A0484110-46BB-014D-41FF-BB1422C973DB}"/>
-              </a:ext>
-            </a:extLst>
-          </p:cNvPr>
-          <p:cNvSpPr>
-            <a:spLocks noGrp="1"/>
-          </p:cNvSpPr>
-          <p:nvPr>
-            <p:ph type="dt" sz="half" idx="10"/>
-          </p:nvPr>
-        </p:nvSpPr>
-        <p:spPr/>
-        <p:txBody>
-          <a:bodyPr/>
-          <a:lstStyle/>
-          <a:p>
-            <a:fld id="{E3EFBC31-9ECA-48C0-910F-E09377915FB8}" type="datetimeFigureOut">
-              <a:rPr kumimoji="1" lang="ja-JP" altLang="en-US" smtClean="0"/>
-              <a:t>2026/7/5</a:t>
-            </a:fld>
-            <a:endParaRPr kumimoji="1" lang="ja-JP" altLang="en-US"/>
-          </a:p>
-        </p:txBody>
-      </p:sp>
-      <p:sp>
-        <p:nvSpPr>
-          <p:cNvPr id="6" name="フッター プレースホルダー 5">
-            <a:extLst>
-              <a:ext uri="{FF2B5EF4-FFF2-40B4-BE49-F238E27FC236}">
-                <a16:creationId xmlns:a16="http://schemas.microsoft.com/office/drawing/2014/main" id="{D0568A18-5ED2-ABB4-0951-B33EF4C593EA}"/>
-              </a:ext>
-            </a:extLst>
-          </p:cNvPr>
-          <p:cNvSpPr>
-            <a:spLocks noGrp="1"/>
-          </p:cNvSpPr>
-          <p:nvPr>
-            <p:ph type="ftr" sz="quarter" idx="11"/>
-          </p:nvPr>
-        </p:nvSpPr>
-        <p:spPr/>
-        <p:txBody>
-          <a:bodyPr/>
-          <a:lstStyle/>
-          <a:p>
-            <a:endParaRPr kumimoji="1" lang="ja-JP" altLang="en-US"/>
-          </a:p>
-        </p:txBody>
-      </p:sp>
-      <p:sp>
-        <p:nvSpPr>
-          <p:cNvPr id="7" name="スライド番号プレースホルダー 6">
-            <a:extLst>
-              <a:ext uri="{FF2B5EF4-FFF2-40B4-BE49-F238E27FC236}">
-                <a16:creationId xmlns:a16="http://schemas.microsoft.com/office/drawing/2014/main" id="{C85EACC3-A6F9-B01D-47D1-98D369617A11}"/>
-              </a:ext>
-            </a:extLst>
-          </p:cNvPr>
-          <p:cNvSpPr>
-            <a:spLocks noGrp="1"/>
-          </p:cNvSpPr>
-          <p:nvPr>
-            <p:ph type="sldNum" sz="quarter" idx="12"/>
-          </p:nvPr>
-        </p:nvSpPr>
-        <p:spPr/>
-        <p:txBody>
-          <a:bodyPr/>
-          <a:lstStyle/>
-          <a:p>
-            <a:fld id="{9EBFBC76-F46F-4ADD-8228-9529630895ED}" type="slidenum">
-              <a:rPr kumimoji="1" lang="ja-JP" altLang="en-US" smtClean="0"/>
-              <a:t>‹#›</a:t>
-            </a:fld>
-            <a:endParaRPr kumimoji="1" lang="ja-JP" altLang="en-US"/>
-          </a:p>
-        </p:txBody>
-      </p:sp>
-    </p:spTree>
-    <p:extLst>
-      <p:ext uri="{BB962C8B-B14F-4D97-AF65-F5344CB8AC3E}">
-        <p14:creationId xmlns:p14="http://schemas.microsoft.com/office/powerpoint/2010/main" val="783369085"/>
-      </p:ext>
-    </p:extLst>
-  </p:cSld>
-  <p:clrMapOvr>
-    <a:masterClrMapping/>
-  </p:clrMapOvr>
-</p:sldLayout>
-</file>
-
-<file path=ppt/slideLayouts/slideLayout9.xml><?xml version="1.0" encoding="utf-8"?>
-<p:sldLayout xmlns:a="http://schemas.openxmlformats.org/drawingml/2006/main" xmlns:r="http://schemas.openxmlformats.org/officeDocument/2006/relationships" xmlns:p="http://schemas.openxmlformats.org/presentationml/2006/main" type="picTx" preserve="1">
-  <p:cSld name="タイトル付きの図">
-    <p:spTree>
-      <p:nvGrpSpPr>
-        <p:cNvPr id="1" name=""/>
-        <p:cNvGrpSpPr/>
-        <p:nvPr/>
-      </p:nvGrpSpPr>
-      <p:grpSpPr>
-        <a:xfrm>
-          <a:off x="0" y="0"/>
-          <a:ext cx="0" cy="0"/>
-          <a:chOff x="0" y="0"/>
-          <a:chExt cx="0" cy="0"/>
-        </a:xfrm>
-      </p:grpSpPr>
-      <p:sp>
-        <p:nvSpPr>
-          <p:cNvPr id="2" name="タイトル 1">
-            <a:extLst>
-              <a:ext uri="{FF2B5EF4-FFF2-40B4-BE49-F238E27FC236}">
-                <a16:creationId xmlns:a16="http://schemas.microsoft.com/office/drawing/2014/main" id="{10E69773-B60F-F99E-7259-84C025920DA5}"/>
-              </a:ext>
-            </a:extLst>
-          </p:cNvPr>
-          <p:cNvSpPr>
-            <a:spLocks noGrp="1"/>
-          </p:cNvSpPr>
-          <p:nvPr>
-            <p:ph type="title"/>
-          </p:nvPr>
-        </p:nvSpPr>
-        <p:spPr>
-          <a:xfrm>
-            <a:off x="839788" y="457200"/>
-            <a:ext cx="3932237" cy="1600200"/>
-          </a:xfrm>
-        </p:spPr>
-        <p:txBody>
-          <a:bodyPr anchor="b"/>
-          <a:lstStyle>
-            <a:lvl1pPr>
-              <a:defRPr sz="3200"/>
-            </a:lvl1pPr>
-          </a:lstStyle>
-          <a:p>
-            <a:r>
-              <a:rPr kumimoji="1" lang="ja-JP" altLang="en-US"/>
-              <a:t>マスター タイトルの書式設定</a:t>
-            </a:r>
-          </a:p>
-        </p:txBody>
-      </p:sp>
-      <p:sp>
-        <p:nvSpPr>
-          <p:cNvPr id="3" name="図プレースホルダー 2">
-            <a:extLst>
-              <a:ext uri="{FF2B5EF4-FFF2-40B4-BE49-F238E27FC236}">
-                <a16:creationId xmlns:a16="http://schemas.microsoft.com/office/drawing/2014/main" id="{2492595E-8F9F-0A64-3DEB-8E74E0AC3E93}"/>
-              </a:ext>
-            </a:extLst>
-          </p:cNvPr>
-          <p:cNvSpPr>
-            <a:spLocks noGrp="1"/>
-          </p:cNvSpPr>
-          <p:nvPr>
-            <p:ph type="pic" idx="1"/>
-          </p:nvPr>
-        </p:nvSpPr>
-        <p:spPr>
-          <a:xfrm>
-            <a:off x="5183188" y="987425"/>
-            <a:ext cx="6172200" cy="4873625"/>
-          </a:xfrm>
-        </p:spPr>
-        <p:txBody>
-          <a:bodyPr/>
-          <a:lstStyle>
-            <a:lvl1pPr marL="0" indent="0">
-              <a:buNone/>
-              <a:defRPr sz="3200"/>
-            </a:lvl1pPr>
-            <a:lvl2pPr marL="457200" indent="0">
-              <a:buNone/>
-              <a:defRPr sz="2800"/>
-            </a:lvl2pPr>
-            <a:lvl3pPr marL="914400" indent="0">
-              <a:buNone/>
-              <a:defRPr sz="2400"/>
-            </a:lvl3pPr>
-            <a:lvl4pPr marL="1371600" indent="0">
-              <a:buNone/>
-              <a:defRPr sz="2000"/>
-            </a:lvl4pPr>
-            <a:lvl5pPr marL="1828800" indent="0">
-              <a:buNone/>
-              <a:defRPr sz="2000"/>
-            </a:lvl5pPr>
-            <a:lvl6pPr marL="2286000" indent="0">
-              <a:buNone/>
-              <a:defRPr sz="2000"/>
-            </a:lvl6pPr>
-            <a:lvl7pPr marL="2743200" indent="0">
-              <a:buNone/>
-              <a:defRPr sz="2000"/>
-            </a:lvl7pPr>
-            <a:lvl8pPr marL="3200400" indent="0">
-              <a:buNone/>
-              <a:defRPr sz="2000"/>
-            </a:lvl8pPr>
-            <a:lvl9pPr marL="3657600" indent="0">
-              <a:buNone/>
-              <a:defRPr sz="2000"/>
-            </a:lvl9pPr>
-          </a:lstStyle>
-          <a:p>
-            <a:endParaRPr kumimoji="1" lang="ja-JP" altLang="en-US"/>
-          </a:p>
-        </p:txBody>
-      </p:sp>
-      <p:sp>
-        <p:nvSpPr>
-          <p:cNvPr id="4" name="テキスト プレースホルダー 3">
-            <a:extLst>
-              <a:ext uri="{FF2B5EF4-FFF2-40B4-BE49-F238E27FC236}">
-                <a16:creationId xmlns:a16="http://schemas.microsoft.com/office/drawing/2014/main" id="{20BCF0B5-1DAA-A506-3226-5F5AAE8E2214}"/>
-              </a:ext>
-            </a:extLst>
-          </p:cNvPr>
-          <p:cNvSpPr>
-            <a:spLocks noGrp="1"/>
-          </p:cNvSpPr>
-          <p:nvPr>
-            <p:ph type="body" sz="half" idx="2"/>
-          </p:nvPr>
-        </p:nvSpPr>
-        <p:spPr>
-          <a:xfrm>
-            <a:off x="839788" y="2057400"/>
-            <a:ext cx="3932237" cy="3811588"/>
-          </a:xfrm>
-        </p:spPr>
-        <p:txBody>
-          <a:bodyPr/>
-          <a:lstStyle>
-            <a:lvl1pPr marL="0" indent="0">
-              <a:buNone/>
-              <a:defRPr sz="1600"/>
-            </a:lvl1pPr>
-            <a:lvl2pPr marL="457200" indent="0">
-              <a:buNone/>
-              <a:defRPr sz="1400"/>
-            </a:lvl2pPr>
-            <a:lvl3pPr marL="914400" indent="0">
-              <a:buNone/>
-              <a:defRPr sz="1200"/>
-            </a:lvl3pPr>
-            <a:lvl4pPr marL="1371600" indent="0">
-              <a:buNone/>
-              <a:defRPr sz="1000"/>
-            </a:lvl4pPr>
-            <a:lvl5pPr marL="1828800" indent="0">
-              <a:buNone/>
-              <a:defRPr sz="1000"/>
-            </a:lvl5pPr>
-            <a:lvl6pPr marL="2286000" indent="0">
-              <a:buNone/>
-              <a:defRPr sz="1000"/>
-            </a:lvl6pPr>
-            <a:lvl7pPr marL="2743200" indent="0">
-              <a:buNone/>
-              <a:defRPr sz="1000"/>
-            </a:lvl7pPr>
-            <a:lvl8pPr marL="3200400" indent="0">
-              <a:buNone/>
-              <a:defRPr sz="1000"/>
-            </a:lvl8pPr>
-            <a:lvl9pPr marL="3657600" indent="0">
-              <a:buNone/>
-              <a:defRPr sz="1000"/>
-            </a:lvl9pPr>
-          </a:lstStyle>
-          <a:p>
-            <a:pPr lvl="0"/>
-            <a:r>
-              <a:rPr kumimoji="1" lang="ja-JP" altLang="en-US"/>
-              <a:t>マスター テキストの書式設定</a:t>
-            </a:r>
-          </a:p>
-        </p:txBody>
-      </p:sp>
-      <p:sp>
-        <p:nvSpPr>
-          <p:cNvPr id="5" name="日付プレースホルダー 4">
-            <a:extLst>
-              <a:ext uri="{FF2B5EF4-FFF2-40B4-BE49-F238E27FC236}">
-                <a16:creationId xmlns:a16="http://schemas.microsoft.com/office/drawing/2014/main" id="{07D2088E-9319-A7DB-F799-C26F55084C68}"/>
-              </a:ext>
-            </a:extLst>
-          </p:cNvPr>
-          <p:cNvSpPr>
-            <a:spLocks noGrp="1"/>
-          </p:cNvSpPr>
-          <p:nvPr>
-            <p:ph type="dt" sz="half" idx="10"/>
-          </p:nvPr>
-        </p:nvSpPr>
-        <p:spPr/>
-        <p:txBody>
-          <a:bodyPr/>
-          <a:lstStyle/>
-          <a:p>
-            <a:fld id="{E3EFBC31-9ECA-48C0-910F-E09377915FB8}" type="datetimeFigureOut">
-              <a:rPr kumimoji="1" lang="ja-JP" altLang="en-US" smtClean="0"/>
-              <a:t>2026/7/5</a:t>
-            </a:fld>
-            <a:endParaRPr kumimoji="1" lang="ja-JP" altLang="en-US"/>
-          </a:p>
-        </p:txBody>
-      </p:sp>
-      <p:sp>
-        <p:nvSpPr>
-          <p:cNvPr id="6" name="フッター プレースホルダー 5">
-            <a:extLst>
-              <a:ext uri="{FF2B5EF4-FFF2-40B4-BE49-F238E27FC236}">
-                <a16:creationId xmlns:a16="http://schemas.microsoft.com/office/drawing/2014/main" id="{A07741E9-DB06-1561-7A20-0A626D9DD42A}"/>
-              </a:ext>
-            </a:extLst>
-          </p:cNvPr>
-          <p:cNvSpPr>
-            <a:spLocks noGrp="1"/>
-          </p:cNvSpPr>
-          <p:nvPr>
-            <p:ph type="ftr" sz="quarter" idx="11"/>
-          </p:nvPr>
-        </p:nvSpPr>
-        <p:spPr/>
-        <p:txBody>
-          <a:bodyPr/>
-          <a:lstStyle/>
-          <a:p>
-            <a:endParaRPr kumimoji="1" lang="ja-JP" altLang="en-US"/>
-          </a:p>
-        </p:txBody>
-      </p:sp>
-      <p:sp>
-        <p:nvSpPr>
-          <p:cNvPr id="7" name="スライド番号プレースホルダー 6">
-            <a:extLst>
-              <a:ext uri="{FF2B5EF4-FFF2-40B4-BE49-F238E27FC236}">
-                <a16:creationId xmlns:a16="http://schemas.microsoft.com/office/drawing/2014/main" id="{FA71377C-7AF9-AAE2-2C83-B36C5B200143}"/>
-              </a:ext>
-            </a:extLst>
-          </p:cNvPr>
-          <p:cNvSpPr>
-            <a:spLocks noGrp="1"/>
-          </p:cNvSpPr>
-          <p:nvPr>
-            <p:ph type="sldNum" sz="quarter" idx="12"/>
-          </p:nvPr>
-        </p:nvSpPr>
-        <p:spPr/>
-        <p:txBody>
-          <a:bodyPr/>
-          <a:lstStyle/>
-          <a:p>
-            <a:fld id="{9EBFBC76-F46F-4ADD-8228-9529630895ED}" type="slidenum">
-              <a:rPr kumimoji="1" lang="ja-JP" altLang="en-US" smtClean="0"/>
-              <a:t>‹#›</a:t>
-            </a:fld>
-            <a:endParaRPr kumimoji="1" lang="ja-JP" altLang="en-US"/>
-          </a:p>
-        </p:txBody>
-      </p:sp>
-    </p:spTree>
-    <p:extLst>
-      <p:ext uri="{BB962C8B-B14F-4D97-AF65-F5344CB8AC3E}">
-        <p14:creationId xmlns:p14="http://schemas.microsoft.com/office/powerpoint/2010/main" val="3249773560"/>
       </p:ext>
     </p:extLst>
   </p:cSld>
@@ -4010,10 +1935,6 @@
             </a:lvl1pPr>
           </a:lstStyle>
           <a:p>
-            <a:fld id="{E3EFBC31-9ECA-48C0-910F-E09377915FB8}" type="datetimeFigureOut">
-              <a:rPr kumimoji="1" lang="ja-JP" altLang="en-US" smtClean="0"/>
-              <a:t>2026/7/5</a:t>
-            </a:fld>
             <a:endParaRPr kumimoji="1" lang="ja-JP" altLang="en-US"/>
           </a:p>
         </p:txBody>
@@ -4119,16 +2040,10 @@
   <p:sldLayoutIdLst>
     <p:sldLayoutId id="2147483649" r:id="rId1"/>
     <p:sldLayoutId id="2147483650" r:id="rId2"/>
-    <p:sldLayoutId id="2147483651" r:id="rId3"/>
-    <p:sldLayoutId id="2147483652" r:id="rId4"/>
-    <p:sldLayoutId id="2147483653" r:id="rId5"/>
-    <p:sldLayoutId id="2147483654" r:id="rId6"/>
-    <p:sldLayoutId id="2147483655" r:id="rId7"/>
-    <p:sldLayoutId id="2147483656" r:id="rId8"/>
-    <p:sldLayoutId id="2147483657" r:id="rId9"/>
-    <p:sldLayoutId id="2147483658" r:id="rId10"/>
-    <p:sldLayoutId id="2147483659" r:id="rId11"/>
+    <p:sldLayoutId id="2147483652" r:id="rId3"/>
+    <p:sldLayoutId id="2147483651" r:id="rId4"/>
   </p:sldLayoutIdLst>
+  <p:hf hdr="0" ftr="0" dt="0"/>
   <p:txStyles>
     <p:titleStyle>
       <a:lvl1pPr algn="l" defTabSz="914400" rtl="0" eaLnBrk="1" latinLnBrk="0" hangingPunct="1">
@@ -4483,10 +2398,40 @@
           </a:p>
         </p:txBody>
       </p:sp>
+      <p:sp>
+        <p:nvSpPr>
+          <p:cNvPr id="4" name="スライド番号プレースホルダー 3">
+            <a:extLst>
+              <a:ext uri="{FF2B5EF4-FFF2-40B4-BE49-F238E27FC236}">
+                <a16:creationId xmlns:a16="http://schemas.microsoft.com/office/drawing/2014/main" id="{2817A806-4370-A024-ED16-596D9EAB507D}"/>
+              </a:ext>
+            </a:extLst>
+          </p:cNvPr>
+          <p:cNvSpPr>
+            <a:spLocks noGrp="1"/>
+          </p:cNvSpPr>
+          <p:nvPr>
+            <p:ph type="sldNum" sz="quarter" idx="12"/>
+          </p:nvPr>
+        </p:nvSpPr>
+        <p:spPr/>
+        <p:txBody>
+          <a:bodyPr/>
+          <a:lstStyle/>
+          <a:p>
+            <a:fld id="{9EBFBC76-F46F-4ADD-8228-9529630895ED}" type="slidenum">
+              <a:rPr lang="ja-JP" altLang="en-US" smtClean="0"/>
+              <a:pPr/>
+              <a:t>1</a:t>
+            </a:fld>
+            <a:endParaRPr lang="ja-JP" altLang="en-US" dirty="0"/>
+          </a:p>
+        </p:txBody>
+      </p:sp>
     </p:spTree>
     <p:extLst>
       <p:ext uri="{BB962C8B-B14F-4D97-AF65-F5344CB8AC3E}">
-        <p14:creationId xmlns:p14="http://schemas.microsoft.com/office/powerpoint/2010/main" val="1980549886"/>
+        <p14:creationId xmlns:p14="http://schemas.microsoft.com/office/powerpoint/2010/main" val="2223500562"/>
       </p:ext>
     </p:extLst>
   </p:cSld>
@@ -4525,13 +2470,7 @@
           <p:cNvGraphicFramePr>
             <a:graphicFrameLocks noGrp="1"/>
           </p:cNvGraphicFramePr>
-          <p:nvPr>
-            <p:extLst>
-              <p:ext uri="{D42A27DB-BD31-4B8C-83A1-F6EECF244321}">
-                <p14:modId xmlns:p14="http://schemas.microsoft.com/office/powerpoint/2010/main" val="992422498"/>
-              </p:ext>
-            </p:extLst>
-          </p:nvPr>
+          <p:nvPr/>
         </p:nvGraphicFramePr>
         <p:xfrm>
           <a:off x="172278" y="1076821"/>
@@ -7608,10 +5547,40 @@
           </a:p>
         </p:txBody>
       </p:sp>
+      <p:sp>
+        <p:nvSpPr>
+          <p:cNvPr id="10" name="スライド番号プレースホルダー 9">
+            <a:extLst>
+              <a:ext uri="{FF2B5EF4-FFF2-40B4-BE49-F238E27FC236}">
+                <a16:creationId xmlns:a16="http://schemas.microsoft.com/office/drawing/2014/main" id="{C166B6DB-393A-A9BE-DCFC-673AB51E31CC}"/>
+              </a:ext>
+            </a:extLst>
+          </p:cNvPr>
+          <p:cNvSpPr>
+            <a:spLocks noGrp="1"/>
+          </p:cNvSpPr>
+          <p:nvPr>
+            <p:ph type="sldNum" sz="quarter" idx="12"/>
+          </p:nvPr>
+        </p:nvSpPr>
+        <p:spPr/>
+        <p:txBody>
+          <a:bodyPr/>
+          <a:lstStyle/>
+          <a:p>
+            <a:fld id="{9EBFBC76-F46F-4ADD-8228-9529630895ED}" type="slidenum">
+              <a:rPr lang="ja-JP" altLang="en-US" smtClean="0"/>
+              <a:pPr/>
+              <a:t>2</a:t>
+            </a:fld>
+            <a:endParaRPr lang="ja-JP" altLang="en-US" dirty="0"/>
+          </a:p>
+        </p:txBody>
+      </p:sp>
     </p:spTree>
     <p:extLst>
       <p:ext uri="{BB962C8B-B14F-4D97-AF65-F5344CB8AC3E}">
-        <p14:creationId xmlns:p14="http://schemas.microsoft.com/office/powerpoint/2010/main" val="10127502"/>
+        <p14:creationId xmlns:p14="http://schemas.microsoft.com/office/powerpoint/2010/main" val="2054728247"/>
       </p:ext>
     </p:extLst>
   </p:cSld>
@@ -7921,10 +5890,7 @@
             <a:endParaRPr lang="en-US" altLang="ja-JP" dirty="0"/>
           </a:p>
           <a:p>
-            <a:pPr marL="914400" lvl="1" indent="-457200">
-              <a:buFont typeface="+mj-lt"/>
-              <a:buAutoNum type="arabicPeriod"/>
-            </a:pPr>
+            <a:pPr lvl="1"/>
             <a:r>
               <a:rPr lang="ja-JP" altLang="en-US" dirty="0"/>
               <a:t>バイブコーディング</a:t>
@@ -8005,10 +5971,7 @@
             <a:endParaRPr lang="en-US" altLang="ja-JP" dirty="0"/>
           </a:p>
           <a:p>
-            <a:pPr marL="914400" lvl="1" indent="-457200">
-              <a:buFont typeface="+mj-lt"/>
-              <a:buAutoNum type="arabicPeriod"/>
-            </a:pPr>
+            <a:pPr lvl="1"/>
             <a:r>
               <a:rPr lang="en-US" altLang="ja-JP" dirty="0"/>
               <a:t>Git-</a:t>
@@ -8032,10 +5995,7 @@
             <a:endParaRPr lang="en-US" altLang="ja-JP" dirty="0"/>
           </a:p>
           <a:p>
-            <a:pPr marL="914400" lvl="1" indent="-457200">
-              <a:buFont typeface="+mj-lt"/>
-              <a:buAutoNum type="arabicPeriod"/>
-            </a:pPr>
+            <a:pPr lvl="1"/>
             <a:r>
               <a:rPr lang="en-US" altLang="ja-JP" dirty="0"/>
               <a:t>Git-</a:t>
@@ -8082,10 +6042,7 @@
             <a:endParaRPr lang="en-US" altLang="ja-JP" dirty="0"/>
           </a:p>
           <a:p>
-            <a:pPr marL="914400" lvl="1" indent="-457200">
-              <a:buFont typeface="+mj-lt"/>
-              <a:buAutoNum type="arabicPeriod"/>
-            </a:pPr>
+            <a:pPr lvl="1"/>
             <a:r>
               <a:rPr lang="ja-JP" altLang="en-US" dirty="0"/>
               <a:t>バイブコーディング</a:t>
@@ -8107,6 +6064,41 @@
               <a:t>ハンズオンで学習した手順を基に、各自で残りの機能を作成する。</a:t>
             </a:r>
             <a:endParaRPr lang="en-US" altLang="ja-JP" dirty="0"/>
+          </a:p>
+        </p:txBody>
+      </p:sp>
+      <p:sp>
+        <p:nvSpPr>
+          <p:cNvPr id="2" name="スライド番号プレースホルダー 1">
+            <a:extLst>
+              <a:ext uri="{FF2B5EF4-FFF2-40B4-BE49-F238E27FC236}">
+                <a16:creationId xmlns:a16="http://schemas.microsoft.com/office/drawing/2014/main" id="{58FEECBF-FBA5-F87A-A077-29AB5B6DAD79}"/>
+              </a:ext>
+            </a:extLst>
+          </p:cNvPr>
+          <p:cNvSpPr>
+            <a:spLocks noGrp="1"/>
+          </p:cNvSpPr>
+          <p:nvPr>
+            <p:ph type="sldNum" sz="quarter" idx="12"/>
+          </p:nvPr>
+        </p:nvSpPr>
+        <p:spPr>
+          <a:xfrm>
+            <a:off x="8610600" y="6421667"/>
+            <a:ext cx="2743200" cy="365125"/>
+          </a:xfrm>
+        </p:spPr>
+        <p:txBody>
+          <a:bodyPr/>
+          <a:lstStyle/>
+          <a:p>
+            <a:fld id="{9EBFBC76-F46F-4ADD-8228-9529630895ED}" type="slidenum">
+              <a:rPr lang="ja-JP" altLang="en-US" smtClean="0"/>
+              <a:pPr/>
+              <a:t>3</a:t>
+            </a:fld>
+            <a:endParaRPr lang="ja-JP" altLang="en-US" dirty="0"/>
           </a:p>
         </p:txBody>
       </p:sp>
@@ -8143,7 +6135,7 @@
     </p:spTree>
     <p:extLst>
       <p:ext uri="{BB962C8B-B14F-4D97-AF65-F5344CB8AC3E}">
-        <p14:creationId xmlns:p14="http://schemas.microsoft.com/office/powerpoint/2010/main" val="1361378517"/>
+        <p14:creationId xmlns:p14="http://schemas.microsoft.com/office/powerpoint/2010/main" val="389153788"/>
       </p:ext>
     </p:extLst>
   </p:cSld>
@@ -8229,8 +6221,8 @@
         </p:nvSpPr>
         <p:spPr>
           <a:xfrm>
-            <a:off x="168275" y="1073150"/>
-            <a:ext cx="11877675" cy="5103813"/>
+            <a:off x="167951" y="1073020"/>
+            <a:ext cx="11877869" cy="5103943"/>
           </a:xfrm>
         </p:spPr>
         <p:txBody>
@@ -8246,10 +6238,7 @@
             <a:endParaRPr lang="en-US" altLang="ja-JP" dirty="0"/>
           </a:p>
           <a:p>
-            <a:pPr marL="914400" lvl="1" indent="-457200">
-              <a:buFont typeface="+mj-lt"/>
-              <a:buAutoNum type="arabicPeriod"/>
-            </a:pPr>
+            <a:pPr lvl="1"/>
             <a:r>
               <a:rPr lang="ja-JP" altLang="en-US" dirty="0"/>
               <a:t>単体テスト</a:t>
@@ -8295,10 +6284,7 @@
             <a:endParaRPr lang="en-US" altLang="ja-JP" dirty="0"/>
           </a:p>
           <a:p>
-            <a:pPr marL="914400" lvl="1" indent="-457200">
-              <a:buFont typeface="+mj-lt"/>
-              <a:buAutoNum type="arabicPeriod"/>
-            </a:pPr>
+            <a:pPr lvl="1"/>
             <a:r>
               <a:rPr lang="ja-JP" altLang="en-US" dirty="0"/>
               <a:t>バイブコーディング</a:t>
@@ -8346,6 +6332,41 @@
               <a:t>アプリケーションを修正する。</a:t>
             </a:r>
             <a:endParaRPr lang="en-US" altLang="ja-JP" dirty="0"/>
+          </a:p>
+        </p:txBody>
+      </p:sp>
+      <p:sp>
+        <p:nvSpPr>
+          <p:cNvPr id="2" name="スライド番号プレースホルダー 1">
+            <a:extLst>
+              <a:ext uri="{FF2B5EF4-FFF2-40B4-BE49-F238E27FC236}">
+                <a16:creationId xmlns:a16="http://schemas.microsoft.com/office/drawing/2014/main" id="{D76DEE03-ED6A-071F-B38A-2086FEB3D399}"/>
+              </a:ext>
+            </a:extLst>
+          </p:cNvPr>
+          <p:cNvSpPr>
+            <a:spLocks noGrp="1"/>
+          </p:cNvSpPr>
+          <p:nvPr>
+            <p:ph type="sldNum" sz="quarter" idx="12"/>
+          </p:nvPr>
+        </p:nvSpPr>
+        <p:spPr>
+          <a:xfrm>
+            <a:off x="8610600" y="6421667"/>
+            <a:ext cx="2743200" cy="365125"/>
+          </a:xfrm>
+        </p:spPr>
+        <p:txBody>
+          <a:bodyPr/>
+          <a:lstStyle/>
+          <a:p>
+            <a:fld id="{9EBFBC76-F46F-4ADD-8228-9529630895ED}" type="slidenum">
+              <a:rPr lang="ja-JP" altLang="en-US" smtClean="0"/>
+              <a:pPr/>
+              <a:t>4</a:t>
+            </a:fld>
+            <a:endParaRPr lang="ja-JP" altLang="en-US" dirty="0"/>
           </a:p>
         </p:txBody>
       </p:sp>
@@ -8468,8 +6489,8 @@
         </p:nvSpPr>
         <p:spPr>
           <a:xfrm>
-            <a:off x="168275" y="1073150"/>
-            <a:ext cx="11877675" cy="5103813"/>
+            <a:off x="167951" y="1073020"/>
+            <a:ext cx="11877869" cy="5103943"/>
           </a:xfrm>
         </p:spPr>
         <p:txBody>
@@ -8485,10 +6506,7 @@
             <a:endParaRPr lang="en-US" altLang="ja-JP" dirty="0"/>
           </a:p>
           <a:p>
-            <a:pPr marL="914400" lvl="1" indent="-457200">
-              <a:buFont typeface="+mj-lt"/>
-              <a:buAutoNum type="arabicPeriod"/>
-            </a:pPr>
+            <a:pPr lvl="1"/>
             <a:r>
               <a:rPr lang="ja-JP" altLang="en-US" dirty="0"/>
               <a:t>アプリケーションの比較・分析</a:t>
@@ -8535,10 +6553,7 @@
             <a:endParaRPr lang="en-US" altLang="ja-JP" dirty="0"/>
           </a:p>
           <a:p>
-            <a:pPr marL="914400" lvl="1" indent="-457200">
-              <a:buFont typeface="+mj-lt"/>
-              <a:buAutoNum type="arabicPeriod"/>
-            </a:pPr>
+            <a:pPr lvl="1"/>
             <a:r>
               <a:rPr lang="ja-JP" altLang="en-US" dirty="0"/>
               <a:t>改善点の整理</a:t>
@@ -8578,10 +6593,7 @@
             <a:endParaRPr lang="en-US" altLang="ja-JP" dirty="0"/>
           </a:p>
           <a:p>
-            <a:pPr marL="914400" lvl="1" indent="-457200">
-              <a:buFont typeface="+mj-lt"/>
-              <a:buAutoNum type="arabicPeriod"/>
-            </a:pPr>
+            <a:pPr lvl="1"/>
             <a:r>
               <a:rPr lang="ja-JP" altLang="en-US" dirty="0"/>
               <a:t>比較・分析結果の共有</a:t>
@@ -8595,6 +6607,41 @@
               <a:t>比較・分析した結果や改善点をチーム内で共有する。</a:t>
             </a:r>
             <a:endParaRPr lang="en-US" altLang="ja-JP" dirty="0"/>
+          </a:p>
+        </p:txBody>
+      </p:sp>
+      <p:sp>
+        <p:nvSpPr>
+          <p:cNvPr id="2" name="スライド番号プレースホルダー 1">
+            <a:extLst>
+              <a:ext uri="{FF2B5EF4-FFF2-40B4-BE49-F238E27FC236}">
+                <a16:creationId xmlns:a16="http://schemas.microsoft.com/office/drawing/2014/main" id="{ACE6D655-79AC-CDCF-F5F6-3BD563E0DC34}"/>
+              </a:ext>
+            </a:extLst>
+          </p:cNvPr>
+          <p:cNvSpPr>
+            <a:spLocks noGrp="1"/>
+          </p:cNvSpPr>
+          <p:nvPr>
+            <p:ph type="sldNum" sz="quarter" idx="12"/>
+          </p:nvPr>
+        </p:nvSpPr>
+        <p:spPr>
+          <a:xfrm>
+            <a:off x="8610600" y="6421667"/>
+            <a:ext cx="2743200" cy="365125"/>
+          </a:xfrm>
+        </p:spPr>
+        <p:txBody>
+          <a:bodyPr/>
+          <a:lstStyle/>
+          <a:p>
+            <a:fld id="{9EBFBC76-F46F-4ADD-8228-9529630895ED}" type="slidenum">
+              <a:rPr lang="ja-JP" altLang="en-US" smtClean="0"/>
+              <a:pPr/>
+              <a:t>5</a:t>
+            </a:fld>
+            <a:endParaRPr lang="ja-JP" altLang="en-US" dirty="0"/>
           </a:p>
         </p:txBody>
       </p:sp>

--- a/00_オリエンテーション/【AI Native研修-バイブコーディング】研修の概要.pptx
+++ b/00_オリエンテーション/【AI Native研修-バイブコーディング】研修の概要.pptx
@@ -201,7 +201,7 @@
           <a:p>
             <a:fld id="{3E092660-A910-48D6-9DD5-B02CDD5983C2}" type="datetimeFigureOut">
               <a:rPr kumimoji="1" lang="ja-JP" altLang="en-US" smtClean="0"/>
-              <a:t>2026/7/5</a:t>
+              <a:t>2026/8/7</a:t>
             </a:fld>
             <a:endParaRPr kumimoji="1" lang="ja-JP" altLang="en-US"/>
           </a:p>
@@ -3587,7 +3587,10 @@
             <a:avLst/>
           </a:prstGeom>
           <a:solidFill>
-            <a:srgbClr val="FFFFFF"/>
+            <a:schemeClr val="accent1">
+              <a:lumMod val="20000"/>
+              <a:lumOff val="80000"/>
+            </a:schemeClr>
           </a:solidFill>
           <a:ln w="3175" cap="flat" cmpd="sng" algn="ctr">
             <a:solidFill>
@@ -3660,7 +3663,10 @@
             <a:avLst/>
           </a:prstGeom>
           <a:solidFill>
-            <a:srgbClr val="FFFFFF"/>
+            <a:schemeClr val="accent1">
+              <a:lumMod val="20000"/>
+              <a:lumOff val="80000"/>
+            </a:schemeClr>
           </a:solidFill>
           <a:ln w="3175" cap="flat" cmpd="sng" algn="ctr">
             <a:solidFill>
@@ -3869,7 +3875,10 @@
             <a:avLst/>
           </a:prstGeom>
           <a:solidFill>
-            <a:srgbClr val="FFFFFF"/>
+            <a:schemeClr val="accent1">
+              <a:lumMod val="20000"/>
+              <a:lumOff val="80000"/>
+            </a:schemeClr>
           </a:solidFill>
           <a:ln w="3175" cap="flat" cmpd="sng" algn="ctr">
             <a:solidFill>
@@ -4253,7 +4262,10 @@
             <a:avLst/>
           </a:prstGeom>
           <a:solidFill>
-            <a:srgbClr val="FFFFFF"/>
+            <a:schemeClr val="accent1">
+              <a:lumMod val="20000"/>
+              <a:lumOff val="80000"/>
+            </a:schemeClr>
           </a:solidFill>
           <a:ln w="3175" cap="flat" cmpd="sng" algn="ctr">
             <a:solidFill>
@@ -6104,10 +6116,10 @@
       </p:sp>
       <p:pic>
         <p:nvPicPr>
-          <p:cNvPr id="5" name="図 4">
+          <p:cNvPr id="7" name="図 6">
             <a:extLst>
               <a:ext uri="{FF2B5EF4-FFF2-40B4-BE49-F238E27FC236}">
-                <a16:creationId xmlns:a16="http://schemas.microsoft.com/office/drawing/2014/main" id="{7EE1383F-6BB1-6426-18A2-5BBA545C899C}"/>
+                <a16:creationId xmlns:a16="http://schemas.microsoft.com/office/drawing/2014/main" id="{F3C4A913-BAE1-A5E4-B7EE-D883315A47BE}"/>
               </a:ext>
             </a:extLst>
           </p:cNvPr>
@@ -6124,7 +6136,7 @@
         </p:blipFill>
         <p:spPr>
           <a:xfrm>
-            <a:off x="8360035" y="1073020"/>
+            <a:off x="8150193" y="635124"/>
             <a:ext cx="3664014" cy="4249280"/>
           </a:xfrm>
           <a:prstGeom prst="rect">
@@ -6372,10 +6384,10 @@
       </p:sp>
       <p:pic>
         <p:nvPicPr>
-          <p:cNvPr id="6" name="図 5">
+          <p:cNvPr id="7" name="図 6">
             <a:extLst>
               <a:ext uri="{FF2B5EF4-FFF2-40B4-BE49-F238E27FC236}">
-                <a16:creationId xmlns:a16="http://schemas.microsoft.com/office/drawing/2014/main" id="{273090A3-582E-448D-E6B4-C72FD3F1EABB}"/>
+                <a16:creationId xmlns:a16="http://schemas.microsoft.com/office/drawing/2014/main" id="{26755B71-26EF-7626-6DDF-4C4672EDC2D8}"/>
               </a:ext>
             </a:extLst>
           </p:cNvPr>
@@ -6392,7 +6404,7 @@
         </p:blipFill>
         <p:spPr>
           <a:xfrm>
-            <a:off x="8359711" y="1073150"/>
+            <a:off x="8150193" y="635124"/>
             <a:ext cx="3664014" cy="3334801"/>
           </a:xfrm>
           <a:prstGeom prst="rect">
@@ -6647,10 +6659,10 @@
       </p:sp>
       <p:pic>
         <p:nvPicPr>
-          <p:cNvPr id="9" name="図 8">
+          <p:cNvPr id="4" name="図 3">
             <a:extLst>
               <a:ext uri="{FF2B5EF4-FFF2-40B4-BE49-F238E27FC236}">
-                <a16:creationId xmlns:a16="http://schemas.microsoft.com/office/drawing/2014/main" id="{00A0A1D1-3352-6216-4793-0D5317F01303}"/>
+                <a16:creationId xmlns:a16="http://schemas.microsoft.com/office/drawing/2014/main" id="{31F82C19-9715-86C3-B176-26FD8A9616FE}"/>
               </a:ext>
             </a:extLst>
           </p:cNvPr>
@@ -6667,7 +6679,7 @@
         </p:blipFill>
         <p:spPr>
           <a:xfrm>
-            <a:off x="8414580" y="1073150"/>
+            <a:off x="8177627" y="635124"/>
             <a:ext cx="3609145" cy="2182557"/>
           </a:xfrm>
           <a:prstGeom prst="rect">
